--- a/slides/antigravity_retail_workshop_es.pptx
+++ b/slides/antigravity_retail_workshop_es.pptx
@@ -16,6 +16,10 @@
     <p:sldId id="264" r:id="rId16"/>
     <p:sldId id="265" r:id="rId17"/>
     <p:sldId id="266" r:id="rId18"/>
+    <p:sldId id="267" r:id="rId19"/>
+    <p:sldId id="268" r:id="rId20"/>
+    <p:sldId id="269" r:id="rId21"/>
+    <p:sldId id="270" r:id="rId22"/>
   </p:sldIdLst>
   <p:sldSz cx="12191695" cy="6858000" type="screen4x3"/>
   <p:notesSz cx="6858000" cy="9144000"/>
@@ -582,7 +586,7 @@
           <a:lstStyle/>
           <a:p>
             <a:r>
-              <a:t>Explica cómo Antigravity ayuda a diseñar y programar el sistema multi-agente basado en Google ADK + protocolo A2A, cómo probarlo localmente con `adk web` y cómo desplegarlo con Terraform a Google Cloud y Gemini Enterprise.</a:t>
+              <a:t>Módulo clave de seguridad y gobernanza: muestra en la consola de Google Cloud cómo se auditan las licencias Gemini Enterprise y cómo los Hooks locales bloquean acciones riesgosas.</a:t>
             </a:r>
           </a:p>
         </p:txBody>
@@ -652,7 +656,287 @@
           <a:lstStyle/>
           <a:p>
             <a:r>
-              <a:t>Guía a los participantes en el Capstone final: pruebas en el dashboard web, en la interfaz interactiva ADK Dev UI (`./scripts/run_adk_web.sh`) y validación de despliegue Terraform (`./deploy/deploy_gcp.sh --dry-run`).</a:t>
+              <a:t>Revisa los Objetivos del Lab 3 de Retail y los componentes FastMCP + Hook que construirán.</a:t>
+            </a:r>
+          </a:p>
+        </p:txBody>
+      </p:sp>
+      <p:sp>
+        <p:nvSpPr>
+          <p:cNvPr id="4" name="Slide Number Placeholder 3"/>
+          <p:cNvSpPr>
+            <a:spLocks noGrp="1"/>
+          </p:cNvSpPr>
+          <p:nvPr>
+            <p:ph type="sldNum" idx="5" sz="quarter"/>
+          </p:nvPr>
+        </p:nvSpPr>
+        <p:spPr/>
+      </p:sp>
+    </p:spTree>
+  </p:cSld>
+  <p:clrMapOvr>
+    <a:masterClrMapping/>
+  </p:clrMapOvr>
+</p:notes>
+</file>
+
+<file path=ppt/notesSlides/notesSlide12.xml><?xml version="1.0" encoding="utf-8"?>
+<p:notes xmlns:a="http://schemas.openxmlformats.org/drawingml/2006/main" xmlns:p="http://schemas.openxmlformats.org/presentationml/2006/main" xmlns:r="http://schemas.openxmlformats.org/officeDocument/2006/relationships">
+  <p:cSld>
+    <p:spTree>
+      <p:nvGrpSpPr>
+        <p:cNvPr id="1" name=""/>
+        <p:cNvGrpSpPr/>
+        <p:nvPr/>
+      </p:nvGrpSpPr>
+      <p:grpSpPr>
+        <a:xfrm>
+          <a:off x="0" y="0"/>
+          <a:ext cx="0" cy="0"/>
+          <a:chOff x="0" y="0"/>
+          <a:chExt cx="0" cy="0"/>
+        </a:xfrm>
+      </p:grpSpPr>
+      <p:sp>
+        <p:nvSpPr>
+          <p:cNvPr id="2" name="Slide Image Placeholder 1"/>
+          <p:cNvSpPr>
+            <a:spLocks noGrp="1"/>
+          </p:cNvSpPr>
+          <p:nvPr>
+            <p:ph type="sldImg" idx="2"/>
+          </p:nvPr>
+        </p:nvSpPr>
+        <p:spPr/>
+      </p:sp>
+      <p:sp>
+        <p:nvSpPr>
+          <p:cNvPr id="3" name="Notes Placeholder 2"/>
+          <p:cNvSpPr>
+            <a:spLocks noGrp="1"/>
+          </p:cNvSpPr>
+          <p:nvPr>
+            <p:ph type="body" idx="3" sz="quarter"/>
+          </p:nvPr>
+        </p:nvSpPr>
+        <p:spPr/>
+        <p:txBody>
+          <a:bodyPr/>
+          <a:lstStyle/>
+          <a:p>
+            <a:r>
+              <a:t>Mantén esta diapositiva proyectada durante el Lab 3 de Retail.</a:t>
+            </a:r>
+          </a:p>
+        </p:txBody>
+      </p:sp>
+      <p:sp>
+        <p:nvSpPr>
+          <p:cNvPr id="4" name="Slide Number Placeholder 3"/>
+          <p:cNvSpPr>
+            <a:spLocks noGrp="1"/>
+          </p:cNvSpPr>
+          <p:nvPr>
+            <p:ph type="sldNum" idx="5" sz="quarter"/>
+          </p:nvPr>
+        </p:nvSpPr>
+        <p:spPr/>
+      </p:sp>
+    </p:spTree>
+  </p:cSld>
+  <p:clrMapOvr>
+    <a:masterClrMapping/>
+  </p:clrMapOvr>
+</p:notes>
+</file>
+
+<file path=ppt/notesSlides/notesSlide13.xml><?xml version="1.0" encoding="utf-8"?>
+<p:notes xmlns:a="http://schemas.openxmlformats.org/drawingml/2006/main" xmlns:p="http://schemas.openxmlformats.org/presentationml/2006/main" xmlns:r="http://schemas.openxmlformats.org/officeDocument/2006/relationships">
+  <p:cSld>
+    <p:spTree>
+      <p:nvGrpSpPr>
+        <p:cNvPr id="1" name=""/>
+        <p:cNvGrpSpPr/>
+        <p:nvPr/>
+      </p:nvGrpSpPr>
+      <p:grpSpPr>
+        <a:xfrm>
+          <a:off x="0" y="0"/>
+          <a:ext cx="0" cy="0"/>
+          <a:chOff x="0" y="0"/>
+          <a:chExt cx="0" cy="0"/>
+        </a:xfrm>
+      </p:grpSpPr>
+      <p:sp>
+        <p:nvSpPr>
+          <p:cNvPr id="2" name="Slide Image Placeholder 1"/>
+          <p:cNvSpPr>
+            <a:spLocks noGrp="1"/>
+          </p:cNvSpPr>
+          <p:nvPr>
+            <p:ph type="sldImg" idx="2"/>
+          </p:nvPr>
+        </p:nvSpPr>
+        <p:spPr/>
+      </p:sp>
+      <p:sp>
+        <p:nvSpPr>
+          <p:cNvPr id="3" name="Notes Placeholder 2"/>
+          <p:cNvSpPr>
+            <a:spLocks noGrp="1"/>
+          </p:cNvSpPr>
+          <p:nvPr>
+            <p:ph type="body" idx="3" sz="quarter"/>
+          </p:nvPr>
+        </p:nvSpPr>
+        <p:spPr/>
+        <p:txBody>
+          <a:bodyPr/>
+          <a:lstStyle/>
+          <a:p>
+            <a:r>
+              <a:t>Explica cómo Antigravity ayuda a diseñar y programar el sistema multi-agente basado en Google ADK + protocolo A2A, cómo probarlo localmente con `adk web` y cómo desplegarlo con Terraform a Google Cloud y Gemini Enterprise.</a:t>
+            </a:r>
+          </a:p>
+        </p:txBody>
+      </p:sp>
+      <p:sp>
+        <p:nvSpPr>
+          <p:cNvPr id="4" name="Slide Number Placeholder 3"/>
+          <p:cNvSpPr>
+            <a:spLocks noGrp="1"/>
+          </p:cNvSpPr>
+          <p:nvPr>
+            <p:ph type="sldNum" idx="5" sz="quarter"/>
+          </p:nvPr>
+        </p:nvSpPr>
+        <p:spPr/>
+      </p:sp>
+    </p:spTree>
+  </p:cSld>
+  <p:clrMapOvr>
+    <a:masterClrMapping/>
+  </p:clrMapOvr>
+</p:notes>
+</file>
+
+<file path=ppt/notesSlides/notesSlide14.xml><?xml version="1.0" encoding="utf-8"?>
+<p:notes xmlns:a="http://schemas.openxmlformats.org/drawingml/2006/main" xmlns:p="http://schemas.openxmlformats.org/presentationml/2006/main" xmlns:r="http://schemas.openxmlformats.org/officeDocument/2006/relationships">
+  <p:cSld>
+    <p:spTree>
+      <p:nvGrpSpPr>
+        <p:cNvPr id="1" name=""/>
+        <p:cNvGrpSpPr/>
+        <p:nvPr/>
+      </p:nvGrpSpPr>
+      <p:grpSpPr>
+        <a:xfrm>
+          <a:off x="0" y="0"/>
+          <a:ext cx="0" cy="0"/>
+          <a:chOff x="0" y="0"/>
+          <a:chExt cx="0" cy="0"/>
+        </a:xfrm>
+      </p:grpSpPr>
+      <p:sp>
+        <p:nvSpPr>
+          <p:cNvPr id="2" name="Slide Image Placeholder 1"/>
+          <p:cNvSpPr>
+            <a:spLocks noGrp="1"/>
+          </p:cNvSpPr>
+          <p:nvPr>
+            <p:ph type="sldImg" idx="2"/>
+          </p:nvPr>
+        </p:nvSpPr>
+        <p:spPr/>
+      </p:sp>
+      <p:sp>
+        <p:nvSpPr>
+          <p:cNvPr id="3" name="Notes Placeholder 2"/>
+          <p:cNvSpPr>
+            <a:spLocks noGrp="1"/>
+          </p:cNvSpPr>
+          <p:nvPr>
+            <p:ph type="body" idx="3" sz="quarter"/>
+          </p:nvPr>
+        </p:nvSpPr>
+        <p:spPr/>
+        <p:txBody>
+          <a:bodyPr/>
+          <a:lstStyle/>
+          <a:p>
+            <a:r>
+              <a:t>Presenta los Objetivos del Lab 4 Capstone de Retail y los 3 componentes que construirán.</a:t>
+            </a:r>
+          </a:p>
+        </p:txBody>
+      </p:sp>
+      <p:sp>
+        <p:nvSpPr>
+          <p:cNvPr id="4" name="Slide Number Placeholder 3"/>
+          <p:cNvSpPr>
+            <a:spLocks noGrp="1"/>
+          </p:cNvSpPr>
+          <p:nvPr>
+            <p:ph type="sldNum" idx="5" sz="quarter"/>
+          </p:nvPr>
+        </p:nvSpPr>
+        <p:spPr/>
+      </p:sp>
+    </p:spTree>
+  </p:cSld>
+  <p:clrMapOvr>
+    <a:masterClrMapping/>
+  </p:clrMapOvr>
+</p:notes>
+</file>
+
+<file path=ppt/notesSlides/notesSlide15.xml><?xml version="1.0" encoding="utf-8"?>
+<p:notes xmlns:a="http://schemas.openxmlformats.org/drawingml/2006/main" xmlns:p="http://schemas.openxmlformats.org/presentationml/2006/main" xmlns:r="http://schemas.openxmlformats.org/officeDocument/2006/relationships">
+  <p:cSld>
+    <p:spTree>
+      <p:nvGrpSpPr>
+        <p:cNvPr id="1" name=""/>
+        <p:cNvGrpSpPr/>
+        <p:nvPr/>
+      </p:nvGrpSpPr>
+      <p:grpSpPr>
+        <a:xfrm>
+          <a:off x="0" y="0"/>
+          <a:ext cx="0" cy="0"/>
+          <a:chOff x="0" y="0"/>
+          <a:chExt cx="0" cy="0"/>
+        </a:xfrm>
+      </p:grpSpPr>
+      <p:sp>
+        <p:nvSpPr>
+          <p:cNvPr id="2" name="Slide Image Placeholder 1"/>
+          <p:cNvSpPr>
+            <a:spLocks noGrp="1"/>
+          </p:cNvSpPr>
+          <p:nvPr>
+            <p:ph type="sldImg" idx="2"/>
+          </p:nvPr>
+        </p:nvSpPr>
+        <p:spPr/>
+      </p:sp>
+      <p:sp>
+        <p:nvSpPr>
+          <p:cNvPr id="3" name="Notes Placeholder 2"/>
+          <p:cNvSpPr>
+            <a:spLocks noGrp="1"/>
+          </p:cNvSpPr>
+          <p:nvPr>
+            <p:ph type="body" idx="3" sz="quarter"/>
+          </p:nvPr>
+        </p:nvSpPr>
+        <p:spPr/>
+        <p:txBody>
+          <a:bodyPr/>
+          <a:lstStyle/>
+          <a:p>
+            <a:r>
+              <a:t>Mantén esta diapositiva proyectada durante el Lab 4 Capstone de Retail.</a:t>
             </a:r>
           </a:p>
         </p:txBody>
@@ -722,7 +1006,7 @@
           <a:lstStyle/>
           <a:p>
             <a:r>
-              <a:t>Explica la agenda de 4 horas y cómo los participantes usarán Antigravity con los prompts optimizados de PROMPTS.es.md.</a:t>
+              <a:t>Explica la agenda de 4 horas y cómo los participantes usarán Antigravity con los prompts optimizados de PROMPTS.es.md y las guías en PDF.</a:t>
             </a:r>
           </a:p>
         </p:txBody>
@@ -932,7 +1216,7 @@
           <a:lstStyle/>
           <a:p>
             <a:r>
-              <a:t>Inicia el Lab 1. Pide a los asistentes ejecutar install.sh, abrir el dashboard web local y usar los prompts de PROMPTS.es.md.</a:t>
+              <a:t>Revisa los Objetivos del Lab 1 de Retail y los dos servicios que los asistentes repararán.</a:t>
             </a:r>
           </a:p>
         </p:txBody>
@@ -1002,7 +1286,7 @@
           <a:lstStyle/>
           <a:p>
             <a:r>
-              <a:t>Explica el mecanismo interno de divulgación progresiva (progressive disclosure) y por qué permite tener decenas de skills sin consumir tokens innecesarios.</a:t>
+              <a:t>Mantén esta diapositiva proyectada durante el Lab 1 de Retail.</a:t>
             </a:r>
           </a:p>
         </p:txBody>
@@ -1072,7 +1356,7 @@
           <a:lstStyle/>
           <a:p>
             <a:r>
-              <a:t>Guía a los participantes durante el Lab 2 para crear GEMINI.md, reglas de dominio y su primer Skill ejecutable.</a:t>
+              <a:t>Explica el mecanismo interno de divulgación progresiva (progressive disclosure) y por qué permite tener decenas de skills sin consumir tokens innecesarios.</a:t>
             </a:r>
           </a:p>
         </p:txBody>
@@ -1142,7 +1426,7 @@
           <a:lstStyle/>
           <a:p>
             <a:r>
-              <a:t>Módulo clave de seguridad y gobernanza: muestra en la consola de Google Cloud cómo se auditan las licencias Gemini Enterprise y cómo los Hooks locales bloquean acciones riesgosas.</a:t>
+              <a:t>Revisa los Objetivos del Lab 2 de Retail y los archivos de personalización que construirán.</a:t>
             </a:r>
           </a:p>
         </p:txBody>
@@ -1212,7 +1496,7 @@
           <a:lstStyle/>
           <a:p>
             <a:r>
-              <a:t>Los asistentes implementan su servidor FastMCP, configuran mcp_config.json y hooks.json, y verifican el bloqueo determinista de violaciones.</a:t>
+              <a:t>Mantén esta diapositiva visible durante el Lab 2 de Retail.</a:t>
             </a:r>
           </a:p>
         </p:txBody>
@@ -4387,7 +4671,7 @@
           <a:lstStyle/>
           <a:p>
             <a:pPr>
-              <a:defRPr sz="2400" b="1">
+              <a:defRPr sz="2250" b="1">
                 <a:solidFill>
                   <a:srgbClr val="F0F6FC"/>
                 </a:solidFill>
@@ -4423,7 +4707,7 @@
           <a:lstStyle/>
           <a:p>
             <a:pPr>
-              <a:defRPr sz="1350">
+              <a:defRPr sz="1300">
                 <a:solidFill>
                   <a:srgbClr val="8B949E"/>
                 </a:solidFill>
@@ -4556,8 +4840,8 @@
         </p:nvSpPr>
         <p:spPr>
           <a:xfrm>
-            <a:off x="6537960" y="1920240"/>
-            <a:ext cx="4919472" cy="3886200"/>
+            <a:off x="6510528" y="1901952"/>
+            <a:ext cx="4974336" cy="3922776"/>
           </a:xfrm>
           <a:prstGeom prst="rect">
             <a:avLst/>
@@ -4572,25 +4856,25 @@
           <a:p>
             <a:pPr>
               <a:spcAft>
-                <a:spcPts val="1000"/>
-              </a:spcAft>
-              <a:defRPr sz="1600" b="1">
-                <a:solidFill>
-                  <a:srgbClr val="20E3B2"/>
-                </a:solidFill>
-                <a:latin typeface="Arial"/>
-              </a:defRPr>
-            </a:pPr>
-            <a:r>
-              <a:t>Misión del Taller y Arquitectura de Datos</a:t>
-            </a:r>
-          </a:p>
-          <a:p>
-            <a:pPr>
-              <a:spcAft>
                 <a:spcPts val="800"/>
               </a:spcAft>
-              <a:defRPr sz="1220">
+              <a:defRPr sz="1500" b="1">
+                <a:solidFill>
+                  <a:srgbClr val="20E3B2"/>
+                </a:solidFill>
+                <a:latin typeface="Arial"/>
+              </a:defRPr>
+            </a:pPr>
+            <a:r>
+              <a:t>Misión del Taller y Arquitectura de Datos</a:t>
+            </a:r>
+          </a:p>
+          <a:p>
+            <a:pPr>
+              <a:spcAft>
+                <a:spcPts val="650"/>
+              </a:spcAft>
+              <a:defRPr sz="1130">
                 <a:solidFill>
                   <a:srgbClr val="F0F6FC"/>
                 </a:solidFill>
@@ -4604,9 +4888,9 @@
           <a:p>
             <a:pPr>
               <a:spcAft>
-                <a:spcPts val="800"/>
+                <a:spcPts val="650"/>
               </a:spcAft>
-              <a:defRPr sz="1220">
+              <a:defRPr sz="1130">
                 <a:solidFill>
                   <a:srgbClr val="F0F6FC"/>
                 </a:solidFill>
@@ -4620,9 +4904,9 @@
           <a:p>
             <a:pPr>
               <a:spcAft>
-                <a:spcPts val="800"/>
+                <a:spcPts val="650"/>
               </a:spcAft>
-              <a:defRPr sz="1220">
+              <a:defRPr sz="1130">
                 <a:solidFill>
                   <a:srgbClr val="F0F6FC"/>
                 </a:solidFill>
@@ -4636,9 +4920,9 @@
           <a:p>
             <a:pPr>
               <a:spcAft>
-                <a:spcPts val="800"/>
+                <a:spcPts val="650"/>
               </a:spcAft>
-              <a:defRPr sz="1220">
+              <a:defRPr sz="1130">
                 <a:solidFill>
                   <a:srgbClr val="F0F6FC"/>
                 </a:solidFill>
@@ -4652,9 +4936,9 @@
           <a:p>
             <a:pPr>
               <a:spcAft>
-                <a:spcPts val="800"/>
+                <a:spcPts val="650"/>
               </a:spcAft>
-              <a:defRPr sz="1220">
+              <a:defRPr sz="1130">
                 <a:solidFill>
                   <a:srgbClr val="F0F6FC"/>
                 </a:solidFill>
@@ -4743,7 +5027,7 @@
               </a:defRPr>
             </a:pPr>
             <a:r>
-              <a:t>Impartido por Tryolabs • Ejecución 100% Local en Laptop + Despliegue Terraform a Cloud Run y Gemini Enterprise    |    Slide 1/11</a:t>
+              <a:t>Impartido por Tryolabs • Ejecución 100% Local en Laptop + Despliegue Terraform a Cloud Run y Gemini Enterprise    |    Slide 1/15</a:t>
             </a:r>
           </a:p>
         </p:txBody>
@@ -4907,7 +5191,7 @@
               </a:defRPr>
             </a:pPr>
             <a:r>
-              <a:t>MÓDULO TEÓRICO 4 (6 MINUTOS) • SUBAGENTES, GOOGLE ADK, A2A Y TERRAFORM</a:t>
+              <a:t>MÓDULO TEÓRICO 3 (6 MINUTOS) • MCP, HOOKS Y GOBERNANZA EMPRESARIAL</a:t>
             </a:r>
           </a:p>
         </p:txBody>
@@ -4935,7 +5219,7 @@
           <a:lstStyle/>
           <a:p>
             <a:pPr>
-              <a:defRPr sz="2400" b="1">
+              <a:defRPr sz="2250" b="1">
                 <a:solidFill>
                   <a:srgbClr val="F0F6FC"/>
                 </a:solidFill>
@@ -4943,7 +5227,7 @@
               </a:defRPr>
             </a:pPr>
             <a:r>
-              <a:t>Sistemas Multi-Agente con Google ADK, Protocolo A2A y Terraform</a:t>
+              <a:t>Puente MCP en Vivo, Hooks Deterministas y Gobernanza Gemini Enterprise</a:t>
             </a:r>
           </a:p>
         </p:txBody>
@@ -4971,7 +5255,7 @@
           <a:lstStyle/>
           <a:p>
             <a:pPr>
-              <a:defRPr sz="1350">
+              <a:defRPr sz="1300">
                 <a:solidFill>
                   <a:srgbClr val="8B949E"/>
                 </a:solidFill>
@@ -4979,14 +5263,14 @@
               </a:defRPr>
             </a:pPr>
             <a:r>
-              <a:t>Diseñando arquitecturas multi-agente localmente con `adk web` y desplegando a Cloud Run y Gemini Enterprise</a:t>
+              <a:t>Conectando bases de datos en tiempo real con seguridad empresarial demostrable en Google Cloud</a:t>
             </a:r>
           </a:p>
         </p:txBody>
       </p:sp>
       <p:pic>
         <p:nvPicPr>
-          <p:cNvPr id="8" name="Picture 7" descr="adk_a2a_cloud_es.png"/>
+          <p:cNvPr id="8" name="Picture 7" descr="governance_es.png"/>
           <p:cNvPicPr>
             <a:picLocks noChangeAspect="1"/>
           </p:cNvPicPr>
@@ -5068,7 +5352,7 @@
             <a:avLst/>
           </a:prstGeom>
           <a:solidFill>
-            <a:srgbClr val="20E3B2"/>
+            <a:srgbClr val="D29922"/>
           </a:solidFill>
           <a:ln>
             <a:noFill/>
@@ -5104,8 +5388,8 @@
         </p:nvSpPr>
         <p:spPr>
           <a:xfrm>
-            <a:off x="6537960" y="1920240"/>
-            <a:ext cx="4919472" cy="3886200"/>
+            <a:off x="6510528" y="1901952"/>
+            <a:ext cx="4974336" cy="3922776"/>
           </a:xfrm>
           <a:prstGeom prst="rect">
             <a:avLst/>
@@ -5120,25 +5404,25 @@
           <a:p>
             <a:pPr>
               <a:spcAft>
-                <a:spcPts val="1000"/>
-              </a:spcAft>
-              <a:defRPr sz="1600" b="1">
-                <a:solidFill>
-                  <a:srgbClr val="20E3B2"/>
-                </a:solidFill>
-                <a:latin typeface="Arial"/>
-              </a:defRPr>
-            </a:pPr>
-            <a:r>
-              <a:t>Arquitectura Multi-Agente de Punta a Punta</a:t>
-            </a:r>
-          </a:p>
-          <a:p>
-            <a:pPr>
-              <a:spcAft>
                 <a:spcPts val="800"/>
               </a:spcAft>
-              <a:defRPr sz="1220">
+              <a:defRPr sz="1500" b="1">
+                <a:solidFill>
+                  <a:srgbClr val="D29922"/>
+                </a:solidFill>
+                <a:latin typeface="Arial"/>
+              </a:defRPr>
+            </a:pPr>
+            <a:r>
+              <a:t>Seguridad y Gobernanza en 2 Capas</a:t>
+            </a:r>
+          </a:p>
+          <a:p>
+            <a:pPr>
+              <a:spcAft>
+                <a:spcPts val="650"/>
+              </a:spcAft>
+              <a:defRPr sz="1130">
                 <a:solidFill>
                   <a:srgbClr val="F0F6FC"/>
                 </a:solidFill>
@@ -5146,15 +5430,15 @@
               </a:defRPr>
             </a:pPr>
             <a:r>
-              <a:t>▸  Subagentes de Antigravity (/teamwork, /boost, /grill-me): Delega tareas paralelas de investigación y programación dentro de Antigravity</a:t>
+              <a:t>▸  Capa 1 — Google Cloud y Gemini Enterprise (Demo en Vivo del Instructor): Cloud IAM (roles/cloudaicompanion.user), Cloud Audit Logs (cloudaicompanion.googleapis.com), perímetros VPC-SC, Cero Retención y Cero Entrenamiento con código del cliente</a:t>
             </a:r>
           </a:p>
           <a:p>
             <a:pPr>
               <a:spcAft>
-                <a:spcPts val="800"/>
+                <a:spcPts val="650"/>
               </a:spcAft>
-              <a:defRPr sz="1220">
+              <a:defRPr sz="1130">
                 <a:solidFill>
                   <a:srgbClr val="F0F6FC"/>
                 </a:solidFill>
@@ -5162,15 +5446,15 @@
               </a:defRPr>
             </a:pPr>
             <a:r>
-              <a:t>▸  Google ADK (Agent Development Kit): Construye jerarquías multi-agente de dominio (`root_agent` coordinando agentes especialistas Técnico y Comercial con herramientas tipadas)</a:t>
+              <a:t>▸  Capa 2 — Seguridad Local en Antigravity: Política de Ejecución (strict / request-review / proceed-in-sandbox), Sandbox de Terminal SO, bloqueo de archivos fuera del workspace y listas permitidas/bloqueadas</a:t>
             </a:r>
           </a:p>
           <a:p>
             <a:pPr>
               <a:spcAft>
-                <a:spcPts val="800"/>
+                <a:spcPts val="650"/>
               </a:spcAft>
-              <a:defRPr sz="1220">
+              <a:defRPr sz="1130">
                 <a:solidFill>
                   <a:srgbClr val="F0F6FC"/>
                 </a:solidFill>
@@ -5178,15 +5462,15 @@
               </a:defRPr>
             </a:pPr>
             <a:r>
-              <a:t>▸  Pruebas Locales con ADK Dev UI (`adk web`): Ejecuta `./scripts/run_adk_web.sh` (http://localhost:8080) para inspeccionar trazas de eventos multi-agente, llamadas a herramientas y estado</a:t>
+              <a:t>▸  Contexto en Vivo vía FastMCP (.agents/mcp_config.json): Expone herramientas Python tipadas sobre SQLite y telemetría vía stdio/SSE</a:t>
             </a:r>
           </a:p>
           <a:p>
             <a:pPr>
               <a:spcAft>
-                <a:spcPts val="800"/>
+                <a:spcPts val="650"/>
               </a:spcAft>
-              <a:defRPr sz="1220">
+              <a:defRPr sz="1130">
                 <a:solidFill>
                   <a:srgbClr val="F0F6FC"/>
                 </a:solidFill>
@@ -5194,23 +5478,7 @@
               </a:defRPr>
             </a:pPr>
             <a:r>
-              <a:t>▸  Protocolo A2A (Agent2Agent): Publica `GET /.well-known/agent.json` (Agent Card) y `POST /api/v1/a2a` (JSON-RPC 2.0 `tasks/send`) para interoperabilidad entre agentes</a:t>
-            </a:r>
-          </a:p>
-          <a:p>
-            <a:pPr>
-              <a:spcAft>
-                <a:spcPts val="800"/>
-              </a:spcAft>
-              <a:defRPr sz="1220">
-                <a:solidFill>
-                  <a:srgbClr val="F0F6FC"/>
-                </a:solidFill>
-                <a:latin typeface="Arial"/>
-              </a:defRPr>
-            </a:pPr>
-            <a:r>
-              <a:t>▸  Terraform + Gemini Enterprise: Aprovisiona Cloud Run v2 e IAM vía `infra/terraform/` (`deploy_gcp.sh`) y registra tu agente A2A en Gemini Enterprise (`register_gemini_enterprise_agent.sh`)</a:t>
+              <a:t>▸  Hooks Deterministas (.agents/hooks.json): El script PreToolUse inspecciona el JSON en stdin; devolver código 2 bloquea violaciones e imprime un registro de auditoría inmutable</a:t>
             </a:r>
           </a:p>
         </p:txBody>
@@ -5291,7 +5559,7 @@
               </a:defRPr>
             </a:pPr>
             <a:r>
-              <a:t>¡Desarrolla y prueba 100% localmente con `adk web` + `pytest`, y despliega a Google Cloud y Gemini Enterprise con Terraform!    |    Slide 10/11</a:t>
+              <a:t>Demo del Instructor: Mostrar Cloud Audit Logs en GCP Console + disparar un bloqueo PreToolUse con código 2 localmente.    |    Slide 10/15</a:t>
             </a:r>
           </a:p>
         </p:txBody>
@@ -5455,7 +5723,7 @@
               </a:defRPr>
             </a:pPr>
             <a:r>
-              <a:t>LABORATORIO PRÁCTICO 4 CAPSTONE (55 MINUTOS) • ADK, A2A Y DESPLIEGUE CLOUD</a:t>
+              <a:t>LABORATORIO PRÁCTICO 3 (PARTE 1/2) • OBJETIVOS Y QUÉ CONSTRUIRÁS</a:t>
             </a:r>
           </a:p>
         </p:txBody>
@@ -5483,7 +5751,7 @@
           <a:lstStyle/>
           <a:p>
             <a:pPr>
-              <a:defRPr sz="2400" b="1">
+              <a:defRPr sz="2250" b="1">
                 <a:solidFill>
                   <a:srgbClr val="F0F6FC"/>
                 </a:solidFill>
@@ -5491,7 +5759,7 @@
               </a:defRPr>
             </a:pPr>
             <a:r>
-              <a:t>Lab 4 Capstone: Construye el Sistema Multi-Agente ADK + A2A</a:t>
+              <a:t>Lab 3: Servidor FastMCP Retail y Hooks de Margen — Objetivos y Diseño</a:t>
             </a:r>
           </a:p>
         </p:txBody>
@@ -5519,7 +5787,7 @@
           <a:lstStyle/>
           <a:p>
             <a:pPr>
-              <a:defRPr sz="1350">
+              <a:defRPr sz="1300">
                 <a:solidFill>
                   <a:srgbClr val="8B949E"/>
                 </a:solidFill>
@@ -5527,14 +5795,14 @@
               </a:defRPr>
             </a:pPr>
             <a:r>
-              <a:t>Usa Antigravity (/grill-me, /boost, Subagentes) para construir, probar en `adk web` y validar Terraform</a:t>
+              <a:t>55 Minutos • Guía PDF Imprimible: labs/lab-03-mcp-and-hooks/LAB_03_INSTRUCTIONS_ES.pdf</a:t>
             </a:r>
           </a:p>
         </p:txBody>
       </p:sp>
       <p:pic>
         <p:nvPicPr>
-          <p:cNvPr id="8" name="Picture 7" descr="adk_a2a_cloud_es.png"/>
+          <p:cNvPr id="8" name="Picture 7" descr="governance_es.png"/>
           <p:cNvPicPr>
             <a:picLocks noChangeAspect="1"/>
           </p:cNvPicPr>
@@ -5616,7 +5884,7 @@
             <a:avLst/>
           </a:prstGeom>
           <a:solidFill>
-            <a:srgbClr val="20E3B2"/>
+            <a:srgbClr val="BC8CFF"/>
           </a:solidFill>
           <a:ln>
             <a:noFill/>
@@ -5652,8 +5920,8 @@
         </p:nvSpPr>
         <p:spPr>
           <a:xfrm>
-            <a:off x="6537960" y="1920240"/>
-            <a:ext cx="4919472" cy="3886200"/>
+            <a:off x="6510528" y="1901952"/>
+            <a:ext cx="4974336" cy="3922776"/>
           </a:xfrm>
           <a:prstGeom prst="rect">
             <a:avLst/>
@@ -5668,25 +5936,25 @@
           <a:p>
             <a:pPr>
               <a:spcAft>
-                <a:spcPts val="1000"/>
-              </a:spcAft>
-              <a:defRPr sz="1600" b="1">
-                <a:solidFill>
-                  <a:srgbClr val="20E3B2"/>
-                </a:solidFill>
-                <a:latin typeface="Arial"/>
-              </a:defRPr>
-            </a:pPr>
-            <a:r>
-              <a:t>Guía del Lab 4 y Prompts Optimizados</a:t>
-            </a:r>
-          </a:p>
-          <a:p>
-            <a:pPr>
-              <a:spcAft>
                 <a:spcPts val="800"/>
               </a:spcAft>
-              <a:defRPr sz="1220">
+              <a:defRPr sz="1500" b="1">
+                <a:solidFill>
+                  <a:srgbClr val="BC8CFF"/>
+                </a:solidFill>
+                <a:latin typeface="Arial"/>
+              </a:defRPr>
+            </a:pPr>
+            <a:r>
+              <a:t>Objetivos del Lab 3 y Qué Construirás</a:t>
+            </a:r>
+          </a:p>
+          <a:p>
+            <a:pPr>
+              <a:spcAft>
+                <a:spcPts val="650"/>
+              </a:spcAft>
+              <a:defRPr sz="1130">
                 <a:solidFill>
                   <a:srgbClr val="F0F6FC"/>
                 </a:solidFill>
@@ -5694,15 +5962,15 @@
               </a:defRPr>
             </a:pPr>
             <a:r>
-              <a:t>▸  Setup: Ejecuta ./labs/lab-04-multi-agent-capstone/install.sh</a:t>
+              <a:t>▸  Objetivo 1 (Conexión Omnicanal en Vivo vía MCP): Conectar Antigravity a tablas SQLite de inventario WMS, órdenes VIP y contratos OTIF mediante un servidor `FastMCP`.</a:t>
             </a:r>
           </a:p>
           <a:p>
             <a:pPr>
               <a:spcAft>
-                <a:spcPts val="800"/>
+                <a:spcPts val="650"/>
               </a:spcAft>
-              <a:defRPr sz="1220">
+              <a:defRPr sz="1130">
                 <a:solidFill>
                   <a:srgbClr val="F0F6FC"/>
                 </a:solidFill>
@@ -5710,15 +5978,15 @@
               </a:defRPr>
             </a:pPr>
             <a:r>
-              <a:t>▸  Tarea 1 (Jerarquía Google ADK): Implementa @src/agents/adk_a2a_orchestrator.py y @adk_agents/retail_pulse/agent.py (WMSInventoryATPAgent + MerchandisingMarginOTIFAgent -&gt; RetailPulseOrchestratorAgent)</a:t>
+              <a:t>▸  Objetivo 2 (Guardarraíles Deterministas de Margen): Interceptar ediciones de código y comandos shell con un hook `PreToolUse` que bloquee con código `2` cualquier intento de desactivar el piso de margen (`15%`).</a:t>
             </a:r>
           </a:p>
           <a:p>
             <a:pPr>
               <a:spcAft>
-                <a:spcPts val="800"/>
+                <a:spcPts val="650"/>
               </a:spcAft>
-              <a:defRPr sz="1220">
+              <a:defRPr sz="1130">
                 <a:solidFill>
                   <a:srgbClr val="F0F6FC"/>
                 </a:solidFill>
@@ -5726,15 +5994,15 @@
               </a:defRPr>
             </a:pPr>
             <a:r>
-              <a:t>▸  Tarea 2 (Protocolo A2A): Expón GET /.well-known/agent.json y POST /api/v1/a2a (JSON-RPC 2.0 tasks/send) + rutas de enrutamiento omnicanal y reclamos OTIF</a:t>
+              <a:t>▸  Qué Construirás #1 (`mcp_server/retail_mcp.py` y `.agents/mcp_config.json`): 4 herramientas `@mcp.tool()` (`query_true_atp_inventory`, `audit_vendor_otif_contracts`, `simulate_promo_margin_guard`, `list_at_risk_vip_orders`).</a:t>
             </a:r>
           </a:p>
           <a:p>
             <a:pPr>
               <a:spcAft>
-                <a:spcPts val="800"/>
+                <a:spcPts val="650"/>
               </a:spcAft>
-              <a:defRPr sz="1220">
+              <a:defRPr sz="1130">
                 <a:solidFill>
                   <a:srgbClr val="F0F6FC"/>
                 </a:solidFill>
@@ -5742,15 +6010,15 @@
               </a:defRPr>
             </a:pPr>
             <a:r>
-              <a:t>▸  Tarea 3 (ADK Dev UI Local): Ejecuta ./scripts/run_adk_web.sh para probar en `adk web` (http://localhost:8080) y corre ./labs/lab-04-multi-agent-capstone/verify.sh</a:t>
+              <a:t>▸  Qué Construirás #2 (`.agents/hooks.json` y `scripts/margin_guard_hook.py`): Hook determinista `PreToolUse` que bloquea `enforce_floor=False`, margen `&lt; 0.15` o SQL `DROP`/`DELETE`, auditando en `data/logs/hook_compliance_audit.jsonl`.</a:t>
             </a:r>
           </a:p>
           <a:p>
             <a:pPr>
               <a:spcAft>
-                <a:spcPts val="800"/>
+                <a:spcPts val="650"/>
               </a:spcAft>
-              <a:defRPr sz="1220">
+              <a:defRPr sz="1130">
                 <a:solidFill>
                   <a:srgbClr val="F0F6FC"/>
                 </a:solidFill>
@@ -5758,7 +6026,7 @@
               </a:defRPr>
             </a:pPr>
             <a:r>
-              <a:t>▸  Tarea 4 (Terraform y Gemini Enterprise): Valida con ./deploy/deploy_gcp.sh --dry-run, despliega a Cloud Run con Terraform y registra en Gemini Enterprise con ./deploy/register_gemini_enterprise_agent.sh</a:t>
+              <a:t>▸  Entregable y Verificación: Pasar los 5 tests de MCP y Hooks en `./labs/lab-03-mcp-and-hooks/verify.sh`.</a:t>
             </a:r>
           </a:p>
         </p:txBody>
@@ -5839,7 +6107,2533 @@
               </a:defRPr>
             </a:pPr>
             <a:r>
-              <a:t>¡Felicidades! Ejecuta ./labs/lab-04-multi-agent-capstone/verify.sh para validar el 100% de la suite de pruebas.    |    Slide 11/11</a:t>
+              <a:t>Impartido por Tryolabs • Guía imprimible completa: LAB_03_INSTRUCTIONS_ES.pdf    |    Slide 11/15</a:t>
+            </a:r>
+          </a:p>
+        </p:txBody>
+      </p:sp>
+    </p:spTree>
+  </p:cSld>
+  <p:clrMapOvr>
+    <a:masterClrMapping/>
+  </p:clrMapOvr>
+</p:sld>
+</file>
+
+<file path=ppt/slides/slide12.xml><?xml version="1.0" encoding="utf-8"?>
+<p:sld xmlns:a="http://schemas.openxmlformats.org/drawingml/2006/main" xmlns:p="http://schemas.openxmlformats.org/presentationml/2006/main" xmlns:r="http://schemas.openxmlformats.org/officeDocument/2006/relationships">
+  <p:cSld>
+    <p:spTree>
+      <p:nvGrpSpPr>
+        <p:cNvPr id="1" name=""/>
+        <p:cNvGrpSpPr/>
+        <p:nvPr/>
+      </p:nvGrpSpPr>
+      <p:grpSpPr/>
+      <p:sp>
+        <p:nvSpPr>
+          <p:cNvPr id="2" name="Rectangle 1"/>
+          <p:cNvSpPr/>
+          <p:nvPr/>
+        </p:nvSpPr>
+        <p:spPr>
+          <a:xfrm>
+            <a:off x="0" y="0"/>
+            <a:ext cx="12191695" cy="6858000"/>
+          </a:xfrm>
+          <a:prstGeom prst="rect">
+            <a:avLst/>
+          </a:prstGeom>
+          <a:solidFill>
+            <a:srgbClr val="0D1117"/>
+          </a:solidFill>
+          <a:ln>
+            <a:noFill/>
+          </a:ln>
+        </p:spPr>
+        <p:style>
+          <a:lnRef idx="1">
+            <a:schemeClr val="accent1"/>
+          </a:lnRef>
+          <a:fillRef idx="3">
+            <a:schemeClr val="accent1"/>
+          </a:fillRef>
+          <a:effectRef idx="2">
+            <a:schemeClr val="accent1"/>
+          </a:effectRef>
+          <a:fontRef idx="minor">
+            <a:schemeClr val="lt1"/>
+          </a:fontRef>
+        </p:style>
+        <p:txBody>
+          <a:bodyPr rtlCol="0" anchor="ctr"/>
+          <a:lstStyle/>
+          <a:p>
+            <a:pPr algn="ctr"/>
+          </a:p>
+        </p:txBody>
+      </p:sp>
+      <p:sp>
+        <p:nvSpPr>
+          <p:cNvPr id="3" name="Rectangle 2"/>
+          <p:cNvSpPr/>
+          <p:nvPr/>
+        </p:nvSpPr>
+        <p:spPr>
+          <a:xfrm>
+            <a:off x="0" y="0"/>
+            <a:ext cx="12191695" cy="73152"/>
+          </a:xfrm>
+          <a:prstGeom prst="rect">
+            <a:avLst/>
+          </a:prstGeom>
+          <a:solidFill>
+            <a:srgbClr val="20E3B2"/>
+          </a:solidFill>
+          <a:ln>
+            <a:noFill/>
+          </a:ln>
+        </p:spPr>
+        <p:style>
+          <a:lnRef idx="1">
+            <a:schemeClr val="accent1"/>
+          </a:lnRef>
+          <a:fillRef idx="3">
+            <a:schemeClr val="accent1"/>
+          </a:fillRef>
+          <a:effectRef idx="2">
+            <a:schemeClr val="accent1"/>
+          </a:effectRef>
+          <a:fontRef idx="minor">
+            <a:schemeClr val="lt1"/>
+          </a:fontRef>
+        </p:style>
+        <p:txBody>
+          <a:bodyPr rtlCol="0" anchor="ctr"/>
+          <a:lstStyle/>
+          <a:p>
+            <a:pPr algn="ctr"/>
+          </a:p>
+        </p:txBody>
+      </p:sp>
+      <p:pic>
+        <p:nvPicPr>
+          <p:cNvPr id="4" name="Picture 3" descr="tryolabs-logo-dark-bg.png"/>
+          <p:cNvPicPr>
+            <a:picLocks noChangeAspect="1"/>
+          </p:cNvPicPr>
+          <p:nvPr/>
+        </p:nvPicPr>
+        <p:blipFill>
+          <a:blip r:embed="rId2"/>
+          <a:stretch>
+            <a:fillRect/>
+          </a:stretch>
+        </p:blipFill>
+        <p:spPr>
+          <a:xfrm>
+            <a:off x="9829800" y="256032"/>
+            <a:ext cx="1874519" cy="417876"/>
+          </a:xfrm>
+          <a:prstGeom prst="rect">
+            <a:avLst/>
+          </a:prstGeom>
+        </p:spPr>
+      </p:pic>
+      <p:sp>
+        <p:nvSpPr>
+          <p:cNvPr id="5" name="TextBox 4"/>
+          <p:cNvSpPr txBox="1"/>
+          <p:nvPr/>
+        </p:nvSpPr>
+        <p:spPr>
+          <a:xfrm>
+            <a:off x="502920" y="256032"/>
+            <a:ext cx="9144000" cy="320040"/>
+          </a:xfrm>
+          <a:prstGeom prst="rect">
+            <a:avLst/>
+          </a:prstGeom>
+          <a:noFill/>
+        </p:spPr>
+        <p:txBody>
+          <a:bodyPr wrap="square">
+            <a:spAutoFit/>
+          </a:bodyPr>
+          <a:lstStyle/>
+          <a:p>
+            <a:pPr>
+              <a:defRPr sz="1050" b="1">
+                <a:solidFill>
+                  <a:srgbClr val="20E3B2"/>
+                </a:solidFill>
+                <a:latin typeface="Arial"/>
+              </a:defRPr>
+            </a:pPr>
+            <a:r>
+              <a:t>LABORATORIO PRÁCTICO 3 (PARTE 2/2) • INSTRUCCIONES PASO A PASO Y PROMPTS</a:t>
+            </a:r>
+          </a:p>
+        </p:txBody>
+      </p:sp>
+      <p:sp>
+        <p:nvSpPr>
+          <p:cNvPr id="6" name="TextBox 5"/>
+          <p:cNvSpPr txBox="1"/>
+          <p:nvPr/>
+        </p:nvSpPr>
+        <p:spPr>
+          <a:xfrm>
+            <a:off x="502920" y="566928"/>
+            <a:ext cx="9235440" cy="594360"/>
+          </a:xfrm>
+          <a:prstGeom prst="rect">
+            <a:avLst/>
+          </a:prstGeom>
+          <a:noFill/>
+        </p:spPr>
+        <p:txBody>
+          <a:bodyPr wrap="square">
+            <a:spAutoFit/>
+          </a:bodyPr>
+          <a:lstStyle/>
+          <a:p>
+            <a:pPr>
+              <a:defRPr sz="2250" b="1">
+                <a:solidFill>
+                  <a:srgbClr val="F0F6FC"/>
+                </a:solidFill>
+                <a:latin typeface="Arial"/>
+              </a:defRPr>
+            </a:pPr>
+            <a:r>
+              <a:t>Instrucciones del Lab 3 y Prompts para Copiar y Pegar</a:t>
+            </a:r>
+          </a:p>
+        </p:txBody>
+      </p:sp>
+      <p:sp>
+        <p:nvSpPr>
+          <p:cNvPr id="7" name="TextBox 6"/>
+          <p:cNvSpPr txBox="1"/>
+          <p:nvPr/>
+        </p:nvSpPr>
+        <p:spPr>
+          <a:xfrm>
+            <a:off x="502920" y="1207008"/>
+            <a:ext cx="11155680" cy="411480"/>
+          </a:xfrm>
+          <a:prstGeom prst="rect">
+            <a:avLst/>
+          </a:prstGeom>
+          <a:noFill/>
+        </p:spPr>
+        <p:txBody>
+          <a:bodyPr wrap="square">
+            <a:spAutoFit/>
+          </a:bodyPr>
+          <a:lstStyle/>
+          <a:p>
+            <a:pPr>
+              <a:defRPr sz="1300">
+                <a:solidFill>
+                  <a:srgbClr val="8B949E"/>
+                </a:solidFill>
+                <a:latin typeface="Arial"/>
+              </a:defRPr>
+            </a:pPr>
+            <a:r>
+              <a:t>Sigue los Pasos 1–5 a la izquierda y copia los prompts desde labs/lab-03-mcp-and-hooks/PROMPTS.es.md</a:t>
+            </a:r>
+          </a:p>
+        </p:txBody>
+      </p:sp>
+      <p:sp>
+        <p:nvSpPr>
+          <p:cNvPr id="8" name="Rounded Rectangle 7"/>
+          <p:cNvSpPr/>
+          <p:nvPr/>
+        </p:nvSpPr>
+        <p:spPr>
+          <a:xfrm>
+            <a:off x="502920" y="1755648"/>
+            <a:ext cx="5504688" cy="4160520"/>
+          </a:xfrm>
+          <a:prstGeom prst="roundRect">
+            <a:avLst/>
+          </a:prstGeom>
+          <a:solidFill>
+            <a:srgbClr val="161B22"/>
+          </a:solidFill>
+          <a:ln w="19050">
+            <a:solidFill>
+              <a:srgbClr val="30363D"/>
+            </a:solidFill>
+          </a:ln>
+        </p:spPr>
+        <p:style>
+          <a:lnRef idx="1">
+            <a:schemeClr val="accent1"/>
+          </a:lnRef>
+          <a:fillRef idx="3">
+            <a:schemeClr val="accent1"/>
+          </a:fillRef>
+          <a:effectRef idx="2">
+            <a:schemeClr val="accent1"/>
+          </a:effectRef>
+          <a:fontRef idx="minor">
+            <a:schemeClr val="lt1"/>
+          </a:fontRef>
+        </p:style>
+        <p:txBody>
+          <a:bodyPr rtlCol="0" anchor="ctr"/>
+          <a:lstStyle/>
+          <a:p>
+            <a:pPr algn="ctr"/>
+          </a:p>
+        </p:txBody>
+      </p:sp>
+      <p:sp>
+        <p:nvSpPr>
+          <p:cNvPr id="9" name="Rectangle 8"/>
+          <p:cNvSpPr/>
+          <p:nvPr/>
+        </p:nvSpPr>
+        <p:spPr>
+          <a:xfrm>
+            <a:off x="502920" y="1755648"/>
+            <a:ext cx="5504688" cy="64008"/>
+          </a:xfrm>
+          <a:prstGeom prst="rect">
+            <a:avLst/>
+          </a:prstGeom>
+          <a:solidFill>
+            <a:srgbClr val="BC8CFF"/>
+          </a:solidFill>
+          <a:ln>
+            <a:noFill/>
+          </a:ln>
+        </p:spPr>
+        <p:style>
+          <a:lnRef idx="1">
+            <a:schemeClr val="accent1"/>
+          </a:lnRef>
+          <a:fillRef idx="3">
+            <a:schemeClr val="accent1"/>
+          </a:fillRef>
+          <a:effectRef idx="2">
+            <a:schemeClr val="accent1"/>
+          </a:effectRef>
+          <a:fontRef idx="minor">
+            <a:schemeClr val="lt1"/>
+          </a:fontRef>
+        </p:style>
+        <p:txBody>
+          <a:bodyPr rtlCol="0" anchor="ctr"/>
+          <a:lstStyle/>
+          <a:p>
+            <a:pPr algn="ctr"/>
+          </a:p>
+        </p:txBody>
+      </p:sp>
+      <p:sp>
+        <p:nvSpPr>
+          <p:cNvPr id="10" name="TextBox 9"/>
+          <p:cNvSpPr txBox="1"/>
+          <p:nvPr/>
+        </p:nvSpPr>
+        <p:spPr>
+          <a:xfrm>
+            <a:off x="704088" y="1901952"/>
+            <a:ext cx="5102352" cy="3922776"/>
+          </a:xfrm>
+          <a:prstGeom prst="rect">
+            <a:avLst/>
+          </a:prstGeom>
+          <a:noFill/>
+        </p:spPr>
+        <p:txBody>
+          <a:bodyPr wrap="square">
+            <a:spAutoFit/>
+          </a:bodyPr>
+          <a:lstStyle/>
+          <a:p>
+            <a:pPr>
+              <a:spcAft>
+                <a:spcPts val="800"/>
+              </a:spcAft>
+              <a:defRPr sz="1500" b="1">
+                <a:solidFill>
+                  <a:srgbClr val="BC8CFF"/>
+                </a:solidFill>
+                <a:latin typeface="Arial"/>
+              </a:defRPr>
+            </a:pPr>
+            <a:r>
+              <a:t>Instrucciones Paso a Paso del Lab 3</a:t>
+            </a:r>
+          </a:p>
+          <a:p>
+            <a:pPr>
+              <a:spcAft>
+                <a:spcPts val="650"/>
+              </a:spcAft>
+              <a:defRPr sz="1130">
+                <a:solidFill>
+                  <a:srgbClr val="F0F6FC"/>
+                </a:solidFill>
+                <a:latin typeface="Arial"/>
+              </a:defRPr>
+            </a:pPr>
+            <a:r>
+              <a:t>▸  Paso 1 (Inicializar Lab 03): Ejecuta `./labs/lab-03-mcp-and-hooks/install.sh` (aplica Labs 01–02 automáticamente).</a:t>
+            </a:r>
+          </a:p>
+          <a:p>
+            <a:pPr>
+              <a:spcAft>
+                <a:spcPts val="650"/>
+              </a:spcAft>
+              <a:defRPr sz="1130">
+                <a:solidFill>
+                  <a:srgbClr val="F0F6FC"/>
+                </a:solidFill>
+                <a:latin typeface="Arial"/>
+              </a:defRPr>
+            </a:pPr>
+            <a:r>
+              <a:t>▸  Paso 2 (Completar `mcp_server/retail_mcp.py`): Implementa `simulate_promo_margin_guard(promo_code, category, loyalty_tier)` y `list_at_risk_vip_orders(loyalty_tier, limit)`.</a:t>
+            </a:r>
+          </a:p>
+          <a:p>
+            <a:pPr>
+              <a:spcAft>
+                <a:spcPts val="650"/>
+              </a:spcAft>
+              <a:defRPr sz="1130">
+                <a:solidFill>
+                  <a:srgbClr val="F0F6FC"/>
+                </a:solidFill>
+                <a:latin typeface="Arial"/>
+              </a:defRPr>
+            </a:pPr>
+            <a:r>
+              <a:t>▸  Paso 3 (Registrar `.agents/mcp_config.json`): Registra `retail-pulse-mcp` ejecutando `.venv/bin/python -m mcp_server.retail_mcp`.</a:t>
+            </a:r>
+          </a:p>
+          <a:p>
+            <a:pPr>
+              <a:spcAft>
+                <a:spcPts val="650"/>
+              </a:spcAft>
+              <a:defRPr sz="1130">
+                <a:solidFill>
+                  <a:srgbClr val="F0F6FC"/>
+                </a:solidFill>
+                <a:latin typeface="Arial"/>
+              </a:defRPr>
+            </a:pPr>
+            <a:r>
+              <a:t>▸  Paso 4 (Configurar `.agents/hooks.json`): Conecta `PreToolUse` a `scripts/margin_guard_hook.py` (bloquea `enforce_floor=False` o margen `&lt; 0.15` con código `2`).</a:t>
+            </a:r>
+          </a:p>
+          <a:p>
+            <a:pPr>
+              <a:spcAft>
+                <a:spcPts val="650"/>
+              </a:spcAft>
+              <a:defRPr sz="1130">
+                <a:solidFill>
+                  <a:srgbClr val="F0F6FC"/>
+                </a:solidFill>
+                <a:latin typeface="Arial"/>
+              </a:defRPr>
+            </a:pPr>
+            <a:r>
+              <a:t>▸  Paso 5 (Verificar): Ejecuta `./labs/lab-03-mcp-and-hooks/verify.sh` (`5 passed` + bitácora de auditoría).</a:t>
+            </a:r>
+          </a:p>
+        </p:txBody>
+      </p:sp>
+      <p:sp>
+        <p:nvSpPr>
+          <p:cNvPr id="11" name="Rounded Rectangle 10"/>
+          <p:cNvSpPr/>
+          <p:nvPr/>
+        </p:nvSpPr>
+        <p:spPr>
+          <a:xfrm>
+            <a:off x="6199632" y="1755648"/>
+            <a:ext cx="5486400" cy="4160520"/>
+          </a:xfrm>
+          <a:prstGeom prst="roundRect">
+            <a:avLst/>
+          </a:prstGeom>
+          <a:solidFill>
+            <a:srgbClr val="161B22"/>
+          </a:solidFill>
+          <a:ln w="19050">
+            <a:solidFill>
+              <a:srgbClr val="30363D"/>
+            </a:solidFill>
+          </a:ln>
+        </p:spPr>
+        <p:style>
+          <a:lnRef idx="1">
+            <a:schemeClr val="accent1"/>
+          </a:lnRef>
+          <a:fillRef idx="3">
+            <a:schemeClr val="accent1"/>
+          </a:fillRef>
+          <a:effectRef idx="2">
+            <a:schemeClr val="accent1"/>
+          </a:effectRef>
+          <a:fontRef idx="minor">
+            <a:schemeClr val="lt1"/>
+          </a:fontRef>
+        </p:style>
+        <p:txBody>
+          <a:bodyPr rtlCol="0" anchor="ctr"/>
+          <a:lstStyle/>
+          <a:p>
+            <a:pPr algn="ctr"/>
+          </a:p>
+        </p:txBody>
+      </p:sp>
+      <p:sp>
+        <p:nvSpPr>
+          <p:cNvPr id="12" name="Rectangle 11"/>
+          <p:cNvSpPr/>
+          <p:nvPr/>
+        </p:nvSpPr>
+        <p:spPr>
+          <a:xfrm>
+            <a:off x="6199632" y="1755648"/>
+            <a:ext cx="5486400" cy="64008"/>
+          </a:xfrm>
+          <a:prstGeom prst="rect">
+            <a:avLst/>
+          </a:prstGeom>
+          <a:solidFill>
+            <a:srgbClr val="D29922"/>
+          </a:solidFill>
+          <a:ln>
+            <a:noFill/>
+          </a:ln>
+        </p:spPr>
+        <p:style>
+          <a:lnRef idx="1">
+            <a:schemeClr val="accent1"/>
+          </a:lnRef>
+          <a:fillRef idx="3">
+            <a:schemeClr val="accent1"/>
+          </a:fillRef>
+          <a:effectRef idx="2">
+            <a:schemeClr val="accent1"/>
+          </a:effectRef>
+          <a:fontRef idx="minor">
+            <a:schemeClr val="lt1"/>
+          </a:fontRef>
+        </p:style>
+        <p:txBody>
+          <a:bodyPr rtlCol="0" anchor="ctr"/>
+          <a:lstStyle/>
+          <a:p>
+            <a:pPr algn="ctr"/>
+          </a:p>
+        </p:txBody>
+      </p:sp>
+      <p:sp>
+        <p:nvSpPr>
+          <p:cNvPr id="13" name="TextBox 12"/>
+          <p:cNvSpPr txBox="1"/>
+          <p:nvPr/>
+        </p:nvSpPr>
+        <p:spPr>
+          <a:xfrm>
+            <a:off x="6400800" y="1901952"/>
+            <a:ext cx="5084064" cy="3922776"/>
+          </a:xfrm>
+          <a:prstGeom prst="rect">
+            <a:avLst/>
+          </a:prstGeom>
+          <a:noFill/>
+        </p:spPr>
+        <p:txBody>
+          <a:bodyPr wrap="square">
+            <a:spAutoFit/>
+          </a:bodyPr>
+          <a:lstStyle/>
+          <a:p>
+            <a:pPr>
+              <a:spcAft>
+                <a:spcPts val="800"/>
+              </a:spcAft>
+              <a:defRPr sz="1500" b="1">
+                <a:solidFill>
+                  <a:srgbClr val="D29922"/>
+                </a:solidFill>
+                <a:latin typeface="Arial"/>
+              </a:defRPr>
+            </a:pPr>
+            <a:r>
+              <a:t>Prompts Optimizados (PROMPTS.es.md) y Verificación</a:t>
+            </a:r>
+          </a:p>
+          <a:p>
+            <a:pPr>
+              <a:spcAft>
+                <a:spcPts val="650"/>
+              </a:spcAft>
+              <a:defRPr sz="1130">
+                <a:solidFill>
+                  <a:srgbClr val="F0F6FC"/>
+                </a:solidFill>
+                <a:latin typeface="Arial"/>
+              </a:defRPr>
+            </a:pPr>
+            <a:r>
+              <a:t>▸  Prompt 1 — Completar Servidor FastMCP: '/plan Implementa simulate_promo_margin_guard y list_at_risk_vip_orders en @mcp_server/retail_mcp.py cumpliendo con @tests/test_lab03_mcp_hooks.py.'</a:t>
+            </a:r>
+          </a:p>
+          <a:p>
+            <a:pPr>
+              <a:spcAft>
+                <a:spcPts val="650"/>
+              </a:spcAft>
+              <a:defRPr sz="1130">
+                <a:solidFill>
+                  <a:srgbClr val="F0F6FC"/>
+                </a:solidFill>
+                <a:latin typeface="Arial"/>
+              </a:defRPr>
+            </a:pPr>
+            <a:r>
+              <a:t>▸  Prompt 2 — Configurar MCP y Hooks: 'Crea @.agents/mcp_config.json para retail-pulse-mcp y @.agents/hooks.json conectando PreToolUse a ./scripts/margin_guard_hook.py.'</a:t>
+            </a:r>
+          </a:p>
+          <a:p>
+            <a:pPr>
+              <a:spcAft>
+                <a:spcPts val="650"/>
+              </a:spcAft>
+              <a:defRPr sz="1130">
+                <a:solidFill>
+                  <a:srgbClr val="F0F6FC"/>
+                </a:solidFill>
+                <a:latin typeface="Arial"/>
+              </a:defRPr>
+            </a:pPr>
+            <a:r>
+              <a:t>▸  Prompt 3 — Probar Bloqueo del Hook (Código 2): Ejecuta `echo '{"tool_name":"edit_file","tool_input":{"Path":"src/services/promo_pricing.py","Replacement":"enforce_floor=False"}}' | .venv/bin/python scripts/margin_guard_hook.py`</a:t>
+            </a:r>
+          </a:p>
+          <a:p>
+            <a:pPr>
+              <a:spcAft>
+                <a:spcPts val="650"/>
+              </a:spcAft>
+              <a:defRPr sz="1130">
+                <a:solidFill>
+                  <a:srgbClr val="F0F6FC"/>
+                </a:solidFill>
+                <a:latin typeface="Arial"/>
+              </a:defRPr>
+            </a:pPr>
+            <a:r>
+              <a:t>▸  Comando de Verificación: Ejecuta `./labs/lab-03-mcp-and-hooks/verify.sh` y revisa `data/logs/hook_compliance_audit.jsonl`.</a:t>
+            </a:r>
+          </a:p>
+        </p:txBody>
+      </p:sp>
+      <p:sp>
+        <p:nvSpPr>
+          <p:cNvPr id="14" name="Rectangle 13"/>
+          <p:cNvSpPr/>
+          <p:nvPr/>
+        </p:nvSpPr>
+        <p:spPr>
+          <a:xfrm>
+            <a:off x="502920" y="6108192"/>
+            <a:ext cx="11183112" cy="475488"/>
+          </a:xfrm>
+          <a:prstGeom prst="rect">
+            <a:avLst/>
+          </a:prstGeom>
+          <a:solidFill>
+            <a:srgbClr val="161B22"/>
+          </a:solidFill>
+          <a:ln w="12700">
+            <a:solidFill>
+              <a:srgbClr val="30363D"/>
+            </a:solidFill>
+          </a:ln>
+        </p:spPr>
+        <p:style>
+          <a:lnRef idx="1">
+            <a:schemeClr val="accent1"/>
+          </a:lnRef>
+          <a:fillRef idx="3">
+            <a:schemeClr val="accent1"/>
+          </a:fillRef>
+          <a:effectRef idx="2">
+            <a:schemeClr val="accent1"/>
+          </a:effectRef>
+          <a:fontRef idx="minor">
+            <a:schemeClr val="lt1"/>
+          </a:fontRef>
+        </p:style>
+        <p:txBody>
+          <a:bodyPr rtlCol="0" anchor="ctr"/>
+          <a:lstStyle/>
+          <a:p>
+            <a:pPr algn="ctr"/>
+          </a:p>
+        </p:txBody>
+      </p:sp>
+      <p:sp>
+        <p:nvSpPr>
+          <p:cNvPr id="15" name="TextBox 14"/>
+          <p:cNvSpPr txBox="1"/>
+          <p:nvPr/>
+        </p:nvSpPr>
+        <p:spPr>
+          <a:xfrm>
+            <a:off x="685800" y="6172200"/>
+            <a:ext cx="10789920" cy="347472"/>
+          </a:xfrm>
+          <a:prstGeom prst="rect">
+            <a:avLst/>
+          </a:prstGeom>
+          <a:noFill/>
+        </p:spPr>
+        <p:txBody>
+          <a:bodyPr wrap="square">
+            <a:spAutoFit/>
+          </a:bodyPr>
+          <a:lstStyle/>
+          <a:p>
+            <a:pPr>
+              <a:defRPr sz="1150" b="1">
+                <a:solidFill>
+                  <a:srgbClr val="20E3B2"/>
+                </a:solidFill>
+                <a:latin typeface="Arial"/>
+              </a:defRPr>
+            </a:pPr>
+            <a:r>
+              <a:t>Impartido por Tryolabs • Solución de Referencia: ./labs/lab-03-mcp-and-hooks/apply_solution.sh    |    Slide 12/15</a:t>
+            </a:r>
+          </a:p>
+        </p:txBody>
+      </p:sp>
+    </p:spTree>
+  </p:cSld>
+  <p:clrMapOvr>
+    <a:masterClrMapping/>
+  </p:clrMapOvr>
+</p:sld>
+</file>
+
+<file path=ppt/slides/slide13.xml><?xml version="1.0" encoding="utf-8"?>
+<p:sld xmlns:a="http://schemas.openxmlformats.org/drawingml/2006/main" xmlns:p="http://schemas.openxmlformats.org/presentationml/2006/main" xmlns:r="http://schemas.openxmlformats.org/officeDocument/2006/relationships">
+  <p:cSld>
+    <p:spTree>
+      <p:nvGrpSpPr>
+        <p:cNvPr id="1" name=""/>
+        <p:cNvGrpSpPr/>
+        <p:nvPr/>
+      </p:nvGrpSpPr>
+      <p:grpSpPr/>
+      <p:sp>
+        <p:nvSpPr>
+          <p:cNvPr id="2" name="Rectangle 1"/>
+          <p:cNvSpPr/>
+          <p:nvPr/>
+        </p:nvSpPr>
+        <p:spPr>
+          <a:xfrm>
+            <a:off x="0" y="0"/>
+            <a:ext cx="12191695" cy="6858000"/>
+          </a:xfrm>
+          <a:prstGeom prst="rect">
+            <a:avLst/>
+          </a:prstGeom>
+          <a:solidFill>
+            <a:srgbClr val="0D1117"/>
+          </a:solidFill>
+          <a:ln>
+            <a:noFill/>
+          </a:ln>
+        </p:spPr>
+        <p:style>
+          <a:lnRef idx="1">
+            <a:schemeClr val="accent1"/>
+          </a:lnRef>
+          <a:fillRef idx="3">
+            <a:schemeClr val="accent1"/>
+          </a:fillRef>
+          <a:effectRef idx="2">
+            <a:schemeClr val="accent1"/>
+          </a:effectRef>
+          <a:fontRef idx="minor">
+            <a:schemeClr val="lt1"/>
+          </a:fontRef>
+        </p:style>
+        <p:txBody>
+          <a:bodyPr rtlCol="0" anchor="ctr"/>
+          <a:lstStyle/>
+          <a:p>
+            <a:pPr algn="ctr"/>
+          </a:p>
+        </p:txBody>
+      </p:sp>
+      <p:sp>
+        <p:nvSpPr>
+          <p:cNvPr id="3" name="Rectangle 2"/>
+          <p:cNvSpPr/>
+          <p:nvPr/>
+        </p:nvSpPr>
+        <p:spPr>
+          <a:xfrm>
+            <a:off x="0" y="0"/>
+            <a:ext cx="12191695" cy="73152"/>
+          </a:xfrm>
+          <a:prstGeom prst="rect">
+            <a:avLst/>
+          </a:prstGeom>
+          <a:solidFill>
+            <a:srgbClr val="20E3B2"/>
+          </a:solidFill>
+          <a:ln>
+            <a:noFill/>
+          </a:ln>
+        </p:spPr>
+        <p:style>
+          <a:lnRef idx="1">
+            <a:schemeClr val="accent1"/>
+          </a:lnRef>
+          <a:fillRef idx="3">
+            <a:schemeClr val="accent1"/>
+          </a:fillRef>
+          <a:effectRef idx="2">
+            <a:schemeClr val="accent1"/>
+          </a:effectRef>
+          <a:fontRef idx="minor">
+            <a:schemeClr val="lt1"/>
+          </a:fontRef>
+        </p:style>
+        <p:txBody>
+          <a:bodyPr rtlCol="0" anchor="ctr"/>
+          <a:lstStyle/>
+          <a:p>
+            <a:pPr algn="ctr"/>
+          </a:p>
+        </p:txBody>
+      </p:sp>
+      <p:pic>
+        <p:nvPicPr>
+          <p:cNvPr id="4" name="Picture 3" descr="tryolabs-logo-dark-bg.png"/>
+          <p:cNvPicPr>
+            <a:picLocks noChangeAspect="1"/>
+          </p:cNvPicPr>
+          <p:nvPr/>
+        </p:nvPicPr>
+        <p:blipFill>
+          <a:blip r:embed="rId2"/>
+          <a:stretch>
+            <a:fillRect/>
+          </a:stretch>
+        </p:blipFill>
+        <p:spPr>
+          <a:xfrm>
+            <a:off x="9829800" y="256032"/>
+            <a:ext cx="1874519" cy="417876"/>
+          </a:xfrm>
+          <a:prstGeom prst="rect">
+            <a:avLst/>
+          </a:prstGeom>
+        </p:spPr>
+      </p:pic>
+      <p:sp>
+        <p:nvSpPr>
+          <p:cNvPr id="5" name="TextBox 4"/>
+          <p:cNvSpPr txBox="1"/>
+          <p:nvPr/>
+        </p:nvSpPr>
+        <p:spPr>
+          <a:xfrm>
+            <a:off x="502920" y="256032"/>
+            <a:ext cx="9144000" cy="320040"/>
+          </a:xfrm>
+          <a:prstGeom prst="rect">
+            <a:avLst/>
+          </a:prstGeom>
+          <a:noFill/>
+        </p:spPr>
+        <p:txBody>
+          <a:bodyPr wrap="square">
+            <a:spAutoFit/>
+          </a:bodyPr>
+          <a:lstStyle/>
+          <a:p>
+            <a:pPr>
+              <a:defRPr sz="1050" b="1">
+                <a:solidFill>
+                  <a:srgbClr val="20E3B2"/>
+                </a:solidFill>
+                <a:latin typeface="Arial"/>
+              </a:defRPr>
+            </a:pPr>
+            <a:r>
+              <a:t>MÓDULO TEÓRICO 4 (6 MINUTOS) • SUBAGENTES, GOOGLE ADK, A2A Y TERRAFORM</a:t>
+            </a:r>
+          </a:p>
+        </p:txBody>
+      </p:sp>
+      <p:sp>
+        <p:nvSpPr>
+          <p:cNvPr id="6" name="TextBox 5"/>
+          <p:cNvSpPr txBox="1"/>
+          <p:nvPr/>
+        </p:nvSpPr>
+        <p:spPr>
+          <a:xfrm>
+            <a:off x="502920" y="566928"/>
+            <a:ext cx="9235440" cy="594360"/>
+          </a:xfrm>
+          <a:prstGeom prst="rect">
+            <a:avLst/>
+          </a:prstGeom>
+          <a:noFill/>
+        </p:spPr>
+        <p:txBody>
+          <a:bodyPr wrap="square">
+            <a:spAutoFit/>
+          </a:bodyPr>
+          <a:lstStyle/>
+          <a:p>
+            <a:pPr>
+              <a:defRPr sz="2250" b="1">
+                <a:solidFill>
+                  <a:srgbClr val="F0F6FC"/>
+                </a:solidFill>
+                <a:latin typeface="Arial"/>
+              </a:defRPr>
+            </a:pPr>
+            <a:r>
+              <a:t>Sistemas Multi-Agente con Google ADK, Protocolo A2A y Terraform</a:t>
+            </a:r>
+          </a:p>
+        </p:txBody>
+      </p:sp>
+      <p:sp>
+        <p:nvSpPr>
+          <p:cNvPr id="7" name="TextBox 6"/>
+          <p:cNvSpPr txBox="1"/>
+          <p:nvPr/>
+        </p:nvSpPr>
+        <p:spPr>
+          <a:xfrm>
+            <a:off x="502920" y="1207008"/>
+            <a:ext cx="11155680" cy="411480"/>
+          </a:xfrm>
+          <a:prstGeom prst="rect">
+            <a:avLst/>
+          </a:prstGeom>
+          <a:noFill/>
+        </p:spPr>
+        <p:txBody>
+          <a:bodyPr wrap="square">
+            <a:spAutoFit/>
+          </a:bodyPr>
+          <a:lstStyle/>
+          <a:p>
+            <a:pPr>
+              <a:defRPr sz="1300">
+                <a:solidFill>
+                  <a:srgbClr val="8B949E"/>
+                </a:solidFill>
+                <a:latin typeface="Arial"/>
+              </a:defRPr>
+            </a:pPr>
+            <a:r>
+              <a:t>Diseñando arquitecturas multi-agente localmente con `adk web` y desplegando a Cloud Run y Gemini Enterprise</a:t>
+            </a:r>
+          </a:p>
+        </p:txBody>
+      </p:sp>
+      <p:pic>
+        <p:nvPicPr>
+          <p:cNvPr id="8" name="Picture 7" descr="adk_a2a_cloud_es.png"/>
+          <p:cNvPicPr>
+            <a:picLocks noChangeAspect="1"/>
+          </p:cNvPicPr>
+          <p:nvPr/>
+        </p:nvPicPr>
+        <p:blipFill>
+          <a:blip r:embed="rId3"/>
+          <a:stretch>
+            <a:fillRect/>
+          </a:stretch>
+        </p:blipFill>
+        <p:spPr>
+          <a:xfrm>
+            <a:off x="502920" y="1755648"/>
+            <a:ext cx="5623560" cy="3186684"/>
+          </a:xfrm>
+          <a:prstGeom prst="rect">
+            <a:avLst/>
+          </a:prstGeom>
+        </p:spPr>
+      </p:pic>
+      <p:sp>
+        <p:nvSpPr>
+          <p:cNvPr id="9" name="Rounded Rectangle 8"/>
+          <p:cNvSpPr/>
+          <p:nvPr/>
+        </p:nvSpPr>
+        <p:spPr>
+          <a:xfrm>
+            <a:off x="6309360" y="1755648"/>
+            <a:ext cx="5376672" cy="4160520"/>
+          </a:xfrm>
+          <a:prstGeom prst="roundRect">
+            <a:avLst/>
+          </a:prstGeom>
+          <a:solidFill>
+            <a:srgbClr val="161B22"/>
+          </a:solidFill>
+          <a:ln w="19050">
+            <a:solidFill>
+              <a:srgbClr val="30363D"/>
+            </a:solidFill>
+          </a:ln>
+        </p:spPr>
+        <p:style>
+          <a:lnRef idx="1">
+            <a:schemeClr val="accent1"/>
+          </a:lnRef>
+          <a:fillRef idx="3">
+            <a:schemeClr val="accent1"/>
+          </a:fillRef>
+          <a:effectRef idx="2">
+            <a:schemeClr val="accent1"/>
+          </a:effectRef>
+          <a:fontRef idx="minor">
+            <a:schemeClr val="lt1"/>
+          </a:fontRef>
+        </p:style>
+        <p:txBody>
+          <a:bodyPr rtlCol="0" anchor="ctr"/>
+          <a:lstStyle/>
+          <a:p>
+            <a:pPr algn="ctr"/>
+          </a:p>
+        </p:txBody>
+      </p:sp>
+      <p:sp>
+        <p:nvSpPr>
+          <p:cNvPr id="10" name="Rectangle 9"/>
+          <p:cNvSpPr/>
+          <p:nvPr/>
+        </p:nvSpPr>
+        <p:spPr>
+          <a:xfrm>
+            <a:off x="6309360" y="1755648"/>
+            <a:ext cx="5376672" cy="64008"/>
+          </a:xfrm>
+          <a:prstGeom prst="rect">
+            <a:avLst/>
+          </a:prstGeom>
+          <a:solidFill>
+            <a:srgbClr val="20E3B2"/>
+          </a:solidFill>
+          <a:ln>
+            <a:noFill/>
+          </a:ln>
+        </p:spPr>
+        <p:style>
+          <a:lnRef idx="1">
+            <a:schemeClr val="accent1"/>
+          </a:lnRef>
+          <a:fillRef idx="3">
+            <a:schemeClr val="accent1"/>
+          </a:fillRef>
+          <a:effectRef idx="2">
+            <a:schemeClr val="accent1"/>
+          </a:effectRef>
+          <a:fontRef idx="minor">
+            <a:schemeClr val="lt1"/>
+          </a:fontRef>
+        </p:style>
+        <p:txBody>
+          <a:bodyPr rtlCol="0" anchor="ctr"/>
+          <a:lstStyle/>
+          <a:p>
+            <a:pPr algn="ctr"/>
+          </a:p>
+        </p:txBody>
+      </p:sp>
+      <p:sp>
+        <p:nvSpPr>
+          <p:cNvPr id="11" name="TextBox 10"/>
+          <p:cNvSpPr txBox="1"/>
+          <p:nvPr/>
+        </p:nvSpPr>
+        <p:spPr>
+          <a:xfrm>
+            <a:off x="6510528" y="1901952"/>
+            <a:ext cx="4974336" cy="3922776"/>
+          </a:xfrm>
+          <a:prstGeom prst="rect">
+            <a:avLst/>
+          </a:prstGeom>
+          <a:noFill/>
+        </p:spPr>
+        <p:txBody>
+          <a:bodyPr wrap="square">
+            <a:spAutoFit/>
+          </a:bodyPr>
+          <a:lstStyle/>
+          <a:p>
+            <a:pPr>
+              <a:spcAft>
+                <a:spcPts val="800"/>
+              </a:spcAft>
+              <a:defRPr sz="1500" b="1">
+                <a:solidFill>
+                  <a:srgbClr val="20E3B2"/>
+                </a:solidFill>
+                <a:latin typeface="Arial"/>
+              </a:defRPr>
+            </a:pPr>
+            <a:r>
+              <a:t>Arquitectura Multi-Agente de Punta a Punta</a:t>
+            </a:r>
+          </a:p>
+          <a:p>
+            <a:pPr>
+              <a:spcAft>
+                <a:spcPts val="650"/>
+              </a:spcAft>
+              <a:defRPr sz="1130">
+                <a:solidFill>
+                  <a:srgbClr val="F0F6FC"/>
+                </a:solidFill>
+                <a:latin typeface="Arial"/>
+              </a:defRPr>
+            </a:pPr>
+            <a:r>
+              <a:t>▸  Subagentes de Antigravity (/teamwork, /boost, /grill-me): Delega tareas paralelas de investigación y programación dentro de Antigravity</a:t>
+            </a:r>
+          </a:p>
+          <a:p>
+            <a:pPr>
+              <a:spcAft>
+                <a:spcPts val="650"/>
+              </a:spcAft>
+              <a:defRPr sz="1130">
+                <a:solidFill>
+                  <a:srgbClr val="F0F6FC"/>
+                </a:solidFill>
+                <a:latin typeface="Arial"/>
+              </a:defRPr>
+            </a:pPr>
+            <a:r>
+              <a:t>▸  Google ADK (Agent Development Kit): Construye jerarquías multi-agente de dominio (`root_agent` coordinando agentes especialistas Técnico y Comercial con herramientas tipadas)</a:t>
+            </a:r>
+          </a:p>
+          <a:p>
+            <a:pPr>
+              <a:spcAft>
+                <a:spcPts val="650"/>
+              </a:spcAft>
+              <a:defRPr sz="1130">
+                <a:solidFill>
+                  <a:srgbClr val="F0F6FC"/>
+                </a:solidFill>
+                <a:latin typeface="Arial"/>
+              </a:defRPr>
+            </a:pPr>
+            <a:r>
+              <a:t>▸  Pruebas Locales con ADK Dev UI (`adk web`): Ejecuta `./scripts/run_adk_web.sh` (http://localhost:8080) para inspeccionar trazas de eventos multi-agente, llamadas a herramientas y estado</a:t>
+            </a:r>
+          </a:p>
+          <a:p>
+            <a:pPr>
+              <a:spcAft>
+                <a:spcPts val="650"/>
+              </a:spcAft>
+              <a:defRPr sz="1130">
+                <a:solidFill>
+                  <a:srgbClr val="F0F6FC"/>
+                </a:solidFill>
+                <a:latin typeface="Arial"/>
+              </a:defRPr>
+            </a:pPr>
+            <a:r>
+              <a:t>▸  Protocolo A2A (Agent2Agent): Publica `GET /.well-known/agent.json` (Agent Card) y `POST /api/v1/a2a` (JSON-RPC 2.0 `tasks/send`) para interoperabilidad entre agentes</a:t>
+            </a:r>
+          </a:p>
+          <a:p>
+            <a:pPr>
+              <a:spcAft>
+                <a:spcPts val="650"/>
+              </a:spcAft>
+              <a:defRPr sz="1130">
+                <a:solidFill>
+                  <a:srgbClr val="F0F6FC"/>
+                </a:solidFill>
+                <a:latin typeface="Arial"/>
+              </a:defRPr>
+            </a:pPr>
+            <a:r>
+              <a:t>▸  Terraform + Gemini Enterprise: Aprovisiona Cloud Run v2 e IAM vía `infra/terraform/` (`deploy_gcp.sh`) y registra tu agente A2A en Gemini Enterprise (`register_gemini_enterprise_agent.sh`)</a:t>
+            </a:r>
+          </a:p>
+        </p:txBody>
+      </p:sp>
+      <p:sp>
+        <p:nvSpPr>
+          <p:cNvPr id="12" name="Rectangle 11"/>
+          <p:cNvSpPr/>
+          <p:nvPr/>
+        </p:nvSpPr>
+        <p:spPr>
+          <a:xfrm>
+            <a:off x="502920" y="6108192"/>
+            <a:ext cx="11183112" cy="475488"/>
+          </a:xfrm>
+          <a:prstGeom prst="rect">
+            <a:avLst/>
+          </a:prstGeom>
+          <a:solidFill>
+            <a:srgbClr val="161B22"/>
+          </a:solidFill>
+          <a:ln w="12700">
+            <a:solidFill>
+              <a:srgbClr val="30363D"/>
+            </a:solidFill>
+          </a:ln>
+        </p:spPr>
+        <p:style>
+          <a:lnRef idx="1">
+            <a:schemeClr val="accent1"/>
+          </a:lnRef>
+          <a:fillRef idx="3">
+            <a:schemeClr val="accent1"/>
+          </a:fillRef>
+          <a:effectRef idx="2">
+            <a:schemeClr val="accent1"/>
+          </a:effectRef>
+          <a:fontRef idx="minor">
+            <a:schemeClr val="lt1"/>
+          </a:fontRef>
+        </p:style>
+        <p:txBody>
+          <a:bodyPr rtlCol="0" anchor="ctr"/>
+          <a:lstStyle/>
+          <a:p>
+            <a:pPr algn="ctr"/>
+          </a:p>
+        </p:txBody>
+      </p:sp>
+      <p:sp>
+        <p:nvSpPr>
+          <p:cNvPr id="13" name="TextBox 12"/>
+          <p:cNvSpPr txBox="1"/>
+          <p:nvPr/>
+        </p:nvSpPr>
+        <p:spPr>
+          <a:xfrm>
+            <a:off x="685800" y="6172200"/>
+            <a:ext cx="10789920" cy="347472"/>
+          </a:xfrm>
+          <a:prstGeom prst="rect">
+            <a:avLst/>
+          </a:prstGeom>
+          <a:noFill/>
+        </p:spPr>
+        <p:txBody>
+          <a:bodyPr wrap="square">
+            <a:spAutoFit/>
+          </a:bodyPr>
+          <a:lstStyle/>
+          <a:p>
+            <a:pPr>
+              <a:defRPr sz="1150" b="1">
+                <a:solidFill>
+                  <a:srgbClr val="20E3B2"/>
+                </a:solidFill>
+                <a:latin typeface="Arial"/>
+              </a:defRPr>
+            </a:pPr>
+            <a:r>
+              <a:t>¡Desarrolla y prueba 100% localmente con `adk web` + `pytest`, y despliega a Google Cloud y Gemini Enterprise con Terraform!    |    Slide 13/15</a:t>
+            </a:r>
+          </a:p>
+        </p:txBody>
+      </p:sp>
+    </p:spTree>
+  </p:cSld>
+  <p:clrMapOvr>
+    <a:masterClrMapping/>
+  </p:clrMapOvr>
+</p:sld>
+</file>
+
+<file path=ppt/slides/slide14.xml><?xml version="1.0" encoding="utf-8"?>
+<p:sld xmlns:a="http://schemas.openxmlformats.org/drawingml/2006/main" xmlns:p="http://schemas.openxmlformats.org/presentationml/2006/main" xmlns:r="http://schemas.openxmlformats.org/officeDocument/2006/relationships">
+  <p:cSld>
+    <p:spTree>
+      <p:nvGrpSpPr>
+        <p:cNvPr id="1" name=""/>
+        <p:cNvGrpSpPr/>
+        <p:nvPr/>
+      </p:nvGrpSpPr>
+      <p:grpSpPr/>
+      <p:sp>
+        <p:nvSpPr>
+          <p:cNvPr id="2" name="Rectangle 1"/>
+          <p:cNvSpPr/>
+          <p:nvPr/>
+        </p:nvSpPr>
+        <p:spPr>
+          <a:xfrm>
+            <a:off x="0" y="0"/>
+            <a:ext cx="12191695" cy="6858000"/>
+          </a:xfrm>
+          <a:prstGeom prst="rect">
+            <a:avLst/>
+          </a:prstGeom>
+          <a:solidFill>
+            <a:srgbClr val="0D1117"/>
+          </a:solidFill>
+          <a:ln>
+            <a:noFill/>
+          </a:ln>
+        </p:spPr>
+        <p:style>
+          <a:lnRef idx="1">
+            <a:schemeClr val="accent1"/>
+          </a:lnRef>
+          <a:fillRef idx="3">
+            <a:schemeClr val="accent1"/>
+          </a:fillRef>
+          <a:effectRef idx="2">
+            <a:schemeClr val="accent1"/>
+          </a:effectRef>
+          <a:fontRef idx="minor">
+            <a:schemeClr val="lt1"/>
+          </a:fontRef>
+        </p:style>
+        <p:txBody>
+          <a:bodyPr rtlCol="0" anchor="ctr"/>
+          <a:lstStyle/>
+          <a:p>
+            <a:pPr algn="ctr"/>
+          </a:p>
+        </p:txBody>
+      </p:sp>
+      <p:sp>
+        <p:nvSpPr>
+          <p:cNvPr id="3" name="Rectangle 2"/>
+          <p:cNvSpPr/>
+          <p:nvPr/>
+        </p:nvSpPr>
+        <p:spPr>
+          <a:xfrm>
+            <a:off x="0" y="0"/>
+            <a:ext cx="12191695" cy="73152"/>
+          </a:xfrm>
+          <a:prstGeom prst="rect">
+            <a:avLst/>
+          </a:prstGeom>
+          <a:solidFill>
+            <a:srgbClr val="20E3B2"/>
+          </a:solidFill>
+          <a:ln>
+            <a:noFill/>
+          </a:ln>
+        </p:spPr>
+        <p:style>
+          <a:lnRef idx="1">
+            <a:schemeClr val="accent1"/>
+          </a:lnRef>
+          <a:fillRef idx="3">
+            <a:schemeClr val="accent1"/>
+          </a:fillRef>
+          <a:effectRef idx="2">
+            <a:schemeClr val="accent1"/>
+          </a:effectRef>
+          <a:fontRef idx="minor">
+            <a:schemeClr val="lt1"/>
+          </a:fontRef>
+        </p:style>
+        <p:txBody>
+          <a:bodyPr rtlCol="0" anchor="ctr"/>
+          <a:lstStyle/>
+          <a:p>
+            <a:pPr algn="ctr"/>
+          </a:p>
+        </p:txBody>
+      </p:sp>
+      <p:pic>
+        <p:nvPicPr>
+          <p:cNvPr id="4" name="Picture 3" descr="tryolabs-logo-dark-bg.png"/>
+          <p:cNvPicPr>
+            <a:picLocks noChangeAspect="1"/>
+          </p:cNvPicPr>
+          <p:nvPr/>
+        </p:nvPicPr>
+        <p:blipFill>
+          <a:blip r:embed="rId2"/>
+          <a:stretch>
+            <a:fillRect/>
+          </a:stretch>
+        </p:blipFill>
+        <p:spPr>
+          <a:xfrm>
+            <a:off x="9829800" y="256032"/>
+            <a:ext cx="1874519" cy="417876"/>
+          </a:xfrm>
+          <a:prstGeom prst="rect">
+            <a:avLst/>
+          </a:prstGeom>
+        </p:spPr>
+      </p:pic>
+      <p:sp>
+        <p:nvSpPr>
+          <p:cNvPr id="5" name="TextBox 4"/>
+          <p:cNvSpPr txBox="1"/>
+          <p:nvPr/>
+        </p:nvSpPr>
+        <p:spPr>
+          <a:xfrm>
+            <a:off x="502920" y="256032"/>
+            <a:ext cx="9144000" cy="320040"/>
+          </a:xfrm>
+          <a:prstGeom prst="rect">
+            <a:avLst/>
+          </a:prstGeom>
+          <a:noFill/>
+        </p:spPr>
+        <p:txBody>
+          <a:bodyPr wrap="square">
+            <a:spAutoFit/>
+          </a:bodyPr>
+          <a:lstStyle/>
+          <a:p>
+            <a:pPr>
+              <a:defRPr sz="1050" b="1">
+                <a:solidFill>
+                  <a:srgbClr val="20E3B2"/>
+                </a:solidFill>
+                <a:latin typeface="Arial"/>
+              </a:defRPr>
+            </a:pPr>
+            <a:r>
+              <a:t>LABORATORIO PRÁCTICO 4 CAPSTONE (PARTE 1/2) • OBJETIVOS Y QUÉ CONSTRUIRÁS</a:t>
+            </a:r>
+          </a:p>
+        </p:txBody>
+      </p:sp>
+      <p:sp>
+        <p:nvSpPr>
+          <p:cNvPr id="6" name="TextBox 5"/>
+          <p:cNvSpPr txBox="1"/>
+          <p:nvPr/>
+        </p:nvSpPr>
+        <p:spPr>
+          <a:xfrm>
+            <a:off x="502920" y="566928"/>
+            <a:ext cx="9235440" cy="594360"/>
+          </a:xfrm>
+          <a:prstGeom prst="rect">
+            <a:avLst/>
+          </a:prstGeom>
+          <a:noFill/>
+        </p:spPr>
+        <p:txBody>
+          <a:bodyPr wrap="square">
+            <a:spAutoFit/>
+          </a:bodyPr>
+          <a:lstStyle/>
+          <a:p>
+            <a:pPr>
+              <a:defRPr sz="2250" b="1">
+                <a:solidFill>
+                  <a:srgbClr val="F0F6FC"/>
+                </a:solidFill>
+                <a:latin typeface="Arial"/>
+              </a:defRPr>
+            </a:pPr>
+            <a:r>
+              <a:t>Lab 4 Capstone: Sistemas Multi-Agente ADK, A2A y Terraform — Objetivos</a:t>
+            </a:r>
+          </a:p>
+        </p:txBody>
+      </p:sp>
+      <p:sp>
+        <p:nvSpPr>
+          <p:cNvPr id="7" name="TextBox 6"/>
+          <p:cNvSpPr txBox="1"/>
+          <p:nvPr/>
+        </p:nvSpPr>
+        <p:spPr>
+          <a:xfrm>
+            <a:off x="502920" y="1207008"/>
+            <a:ext cx="11155680" cy="411480"/>
+          </a:xfrm>
+          <a:prstGeom prst="rect">
+            <a:avLst/>
+          </a:prstGeom>
+          <a:noFill/>
+        </p:spPr>
+        <p:txBody>
+          <a:bodyPr wrap="square">
+            <a:spAutoFit/>
+          </a:bodyPr>
+          <a:lstStyle/>
+          <a:p>
+            <a:pPr>
+              <a:defRPr sz="1300">
+                <a:solidFill>
+                  <a:srgbClr val="8B949E"/>
+                </a:solidFill>
+                <a:latin typeface="Arial"/>
+              </a:defRPr>
+            </a:pPr>
+            <a:r>
+              <a:t>55 Minutos • Guía PDF Imprimible: labs/lab-04-multi-agent-capstone/LAB_04_INSTRUCTIONS_ES.pdf</a:t>
+            </a:r>
+          </a:p>
+        </p:txBody>
+      </p:sp>
+      <p:pic>
+        <p:nvPicPr>
+          <p:cNvPr id="8" name="Picture 7" descr="adk_a2a_cloud_es.png"/>
+          <p:cNvPicPr>
+            <a:picLocks noChangeAspect="1"/>
+          </p:cNvPicPr>
+          <p:nvPr/>
+        </p:nvPicPr>
+        <p:blipFill>
+          <a:blip r:embed="rId3"/>
+          <a:stretch>
+            <a:fillRect/>
+          </a:stretch>
+        </p:blipFill>
+        <p:spPr>
+          <a:xfrm>
+            <a:off x="502920" y="1755648"/>
+            <a:ext cx="5623560" cy="3186684"/>
+          </a:xfrm>
+          <a:prstGeom prst="rect">
+            <a:avLst/>
+          </a:prstGeom>
+        </p:spPr>
+      </p:pic>
+      <p:sp>
+        <p:nvSpPr>
+          <p:cNvPr id="9" name="Rounded Rectangle 8"/>
+          <p:cNvSpPr/>
+          <p:nvPr/>
+        </p:nvSpPr>
+        <p:spPr>
+          <a:xfrm>
+            <a:off x="6309360" y="1755648"/>
+            <a:ext cx="5376672" cy="4160520"/>
+          </a:xfrm>
+          <a:prstGeom prst="roundRect">
+            <a:avLst/>
+          </a:prstGeom>
+          <a:solidFill>
+            <a:srgbClr val="161B22"/>
+          </a:solidFill>
+          <a:ln w="19050">
+            <a:solidFill>
+              <a:srgbClr val="30363D"/>
+            </a:solidFill>
+          </a:ln>
+        </p:spPr>
+        <p:style>
+          <a:lnRef idx="1">
+            <a:schemeClr val="accent1"/>
+          </a:lnRef>
+          <a:fillRef idx="3">
+            <a:schemeClr val="accent1"/>
+          </a:fillRef>
+          <a:effectRef idx="2">
+            <a:schemeClr val="accent1"/>
+          </a:effectRef>
+          <a:fontRef idx="minor">
+            <a:schemeClr val="lt1"/>
+          </a:fontRef>
+        </p:style>
+        <p:txBody>
+          <a:bodyPr rtlCol="0" anchor="ctr"/>
+          <a:lstStyle/>
+          <a:p>
+            <a:pPr algn="ctr"/>
+          </a:p>
+        </p:txBody>
+      </p:sp>
+      <p:sp>
+        <p:nvSpPr>
+          <p:cNvPr id="10" name="Rectangle 9"/>
+          <p:cNvSpPr/>
+          <p:nvPr/>
+        </p:nvSpPr>
+        <p:spPr>
+          <a:xfrm>
+            <a:off x="6309360" y="1755648"/>
+            <a:ext cx="5376672" cy="64008"/>
+          </a:xfrm>
+          <a:prstGeom prst="rect">
+            <a:avLst/>
+          </a:prstGeom>
+          <a:solidFill>
+            <a:srgbClr val="20E3B2"/>
+          </a:solidFill>
+          <a:ln>
+            <a:noFill/>
+          </a:ln>
+        </p:spPr>
+        <p:style>
+          <a:lnRef idx="1">
+            <a:schemeClr val="accent1"/>
+          </a:lnRef>
+          <a:fillRef idx="3">
+            <a:schemeClr val="accent1"/>
+          </a:fillRef>
+          <a:effectRef idx="2">
+            <a:schemeClr val="accent1"/>
+          </a:effectRef>
+          <a:fontRef idx="minor">
+            <a:schemeClr val="lt1"/>
+          </a:fontRef>
+        </p:style>
+        <p:txBody>
+          <a:bodyPr rtlCol="0" anchor="ctr"/>
+          <a:lstStyle/>
+          <a:p>
+            <a:pPr algn="ctr"/>
+          </a:p>
+        </p:txBody>
+      </p:sp>
+      <p:sp>
+        <p:nvSpPr>
+          <p:cNvPr id="11" name="TextBox 10"/>
+          <p:cNvSpPr txBox="1"/>
+          <p:nvPr/>
+        </p:nvSpPr>
+        <p:spPr>
+          <a:xfrm>
+            <a:off x="6510528" y="1901952"/>
+            <a:ext cx="4974336" cy="3922776"/>
+          </a:xfrm>
+          <a:prstGeom prst="rect">
+            <a:avLst/>
+          </a:prstGeom>
+          <a:noFill/>
+        </p:spPr>
+        <p:txBody>
+          <a:bodyPr wrap="square">
+            <a:spAutoFit/>
+          </a:bodyPr>
+          <a:lstStyle/>
+          <a:p>
+            <a:pPr>
+              <a:spcAft>
+                <a:spcPts val="800"/>
+              </a:spcAft>
+              <a:defRPr sz="1500" b="1">
+                <a:solidFill>
+                  <a:srgbClr val="20E3B2"/>
+                </a:solidFill>
+                <a:latin typeface="Arial"/>
+              </a:defRPr>
+            </a:pPr>
+            <a:r>
+              <a:t>Objetivos del Lab 4 y Qué Construirás</a:t>
+            </a:r>
+          </a:p>
+          <a:p>
+            <a:pPr>
+              <a:spcAft>
+                <a:spcPts val="650"/>
+              </a:spcAft>
+              <a:defRPr sz="1130">
+                <a:solidFill>
+                  <a:srgbClr val="F0F6FC"/>
+                </a:solidFill>
+                <a:latin typeface="Arial"/>
+              </a:defRPr>
+            </a:pPr>
+            <a:r>
+              <a:t>▸  Objetivo 1 (Diseño Multi-Agente con Google ADK y A2A): Construir un sistema jerárquico multi-agente con Google ADK (`LlmAgent`) y exponer su Agent Card + endpoint JSON-RPC 2.0 A2A.</a:t>
+            </a:r>
+          </a:p>
+          <a:p>
+            <a:pPr>
+              <a:spcAft>
+                <a:spcPts val="650"/>
+              </a:spcAft>
+              <a:defRPr sz="1130">
+                <a:solidFill>
+                  <a:srgbClr val="F0F6FC"/>
+                </a:solidFill>
+                <a:latin typeface="Arial"/>
+              </a:defRPr>
+            </a:pPr>
+            <a:r>
+              <a:t>▸  Objetivo 2 (Prueba Local en `adk web` y Despliegue Cloud con Terraform): Probar delegaciones entre agentes en `adk web` (`http://localhost:8080`) y validar el despliegue a Cloud Run + Gemini Enterprise con Terraform.</a:t>
+            </a:r>
+          </a:p>
+          <a:p>
+            <a:pPr>
+              <a:spcAft>
+                <a:spcPts val="650"/>
+              </a:spcAft>
+              <a:defRPr sz="1130">
+                <a:solidFill>
+                  <a:srgbClr val="F0F6FC"/>
+                </a:solidFill>
+                <a:latin typeface="Arial"/>
+              </a:defRPr>
+            </a:pPr>
+            <a:r>
+              <a:t>▸  Qué Construirás #1 (`src/services/fulfillment_router.py`): Optimizador omnicanal de re-enrutamiento (`evaluate_candidates` y `optimize_at_risk_orders`) rescatando las 35 órdenes VIP según margen neto post-envío.</a:t>
+            </a:r>
+          </a:p>
+          <a:p>
+            <a:pPr>
+              <a:spcAft>
+                <a:spcPts val="650"/>
+              </a:spcAft>
+              <a:defRPr sz="1130">
+                <a:solidFill>
+                  <a:srgbClr val="F0F6FC"/>
+                </a:solidFill>
+                <a:latin typeface="Arial"/>
+              </a:defRPr>
+            </a:pPr>
+            <a:r>
+              <a:t>▸  Qué Construirás #2 (`src/agents/adk_a2a_orchestrator.py` y `adk_agents/retail_pulse/`): `WMSInventoryATPAgent` + `MerchandisingMarginOTIFAgent` coordinados por `RetailPulseOrchestratorAgent`, más `GET /.well-known/agent.json` y `POST /api/v1/a2a`.</a:t>
+            </a:r>
+          </a:p>
+          <a:p>
+            <a:pPr>
+              <a:spcAft>
+                <a:spcPts val="650"/>
+              </a:spcAft>
+              <a:defRPr sz="1130">
+                <a:solidFill>
+                  <a:srgbClr val="F0F6FC"/>
+                </a:solidFill>
+                <a:latin typeface="Arial"/>
+              </a:defRPr>
+            </a:pPr>
+            <a:r>
+              <a:t>▸  Qué Construirás #3 (Infraestructura Cloud): Validar `infra/terraform/main.tf` y el registro en Gemini Enterprise con `./labs/lab-04-multi-agent-capstone/deploy_gcp.sh --dry-run`.</a:t>
+            </a:r>
+          </a:p>
+        </p:txBody>
+      </p:sp>
+      <p:sp>
+        <p:nvSpPr>
+          <p:cNvPr id="12" name="Rectangle 11"/>
+          <p:cNvSpPr/>
+          <p:nvPr/>
+        </p:nvSpPr>
+        <p:spPr>
+          <a:xfrm>
+            <a:off x="502920" y="6108192"/>
+            <a:ext cx="11183112" cy="475488"/>
+          </a:xfrm>
+          <a:prstGeom prst="rect">
+            <a:avLst/>
+          </a:prstGeom>
+          <a:solidFill>
+            <a:srgbClr val="161B22"/>
+          </a:solidFill>
+          <a:ln w="12700">
+            <a:solidFill>
+              <a:srgbClr val="30363D"/>
+            </a:solidFill>
+          </a:ln>
+        </p:spPr>
+        <p:style>
+          <a:lnRef idx="1">
+            <a:schemeClr val="accent1"/>
+          </a:lnRef>
+          <a:fillRef idx="3">
+            <a:schemeClr val="accent1"/>
+          </a:fillRef>
+          <a:effectRef idx="2">
+            <a:schemeClr val="accent1"/>
+          </a:effectRef>
+          <a:fontRef idx="minor">
+            <a:schemeClr val="lt1"/>
+          </a:fontRef>
+        </p:style>
+        <p:txBody>
+          <a:bodyPr rtlCol="0" anchor="ctr"/>
+          <a:lstStyle/>
+          <a:p>
+            <a:pPr algn="ctr"/>
+          </a:p>
+        </p:txBody>
+      </p:sp>
+      <p:sp>
+        <p:nvSpPr>
+          <p:cNvPr id="13" name="TextBox 12"/>
+          <p:cNvSpPr txBox="1"/>
+          <p:nvPr/>
+        </p:nvSpPr>
+        <p:spPr>
+          <a:xfrm>
+            <a:off x="685800" y="6172200"/>
+            <a:ext cx="10789920" cy="347472"/>
+          </a:xfrm>
+          <a:prstGeom prst="rect">
+            <a:avLst/>
+          </a:prstGeom>
+          <a:noFill/>
+        </p:spPr>
+        <p:txBody>
+          <a:bodyPr wrap="square">
+            <a:spAutoFit/>
+          </a:bodyPr>
+          <a:lstStyle/>
+          <a:p>
+            <a:pPr>
+              <a:defRPr sz="1150" b="1">
+                <a:solidFill>
+                  <a:srgbClr val="20E3B2"/>
+                </a:solidFill>
+                <a:latin typeface="Arial"/>
+              </a:defRPr>
+            </a:pPr>
+            <a:r>
+              <a:t>Impartido por Tryolabs • Guía imprimible completa: LAB_04_INSTRUCTIONS_ES.pdf    |    Slide 14/15</a:t>
+            </a:r>
+          </a:p>
+        </p:txBody>
+      </p:sp>
+    </p:spTree>
+  </p:cSld>
+  <p:clrMapOvr>
+    <a:masterClrMapping/>
+  </p:clrMapOvr>
+</p:sld>
+</file>
+
+<file path=ppt/slides/slide15.xml><?xml version="1.0" encoding="utf-8"?>
+<p:sld xmlns:a="http://schemas.openxmlformats.org/drawingml/2006/main" xmlns:p="http://schemas.openxmlformats.org/presentationml/2006/main" xmlns:r="http://schemas.openxmlformats.org/officeDocument/2006/relationships">
+  <p:cSld>
+    <p:spTree>
+      <p:nvGrpSpPr>
+        <p:cNvPr id="1" name=""/>
+        <p:cNvGrpSpPr/>
+        <p:nvPr/>
+      </p:nvGrpSpPr>
+      <p:grpSpPr/>
+      <p:sp>
+        <p:nvSpPr>
+          <p:cNvPr id="2" name="Rectangle 1"/>
+          <p:cNvSpPr/>
+          <p:nvPr/>
+        </p:nvSpPr>
+        <p:spPr>
+          <a:xfrm>
+            <a:off x="0" y="0"/>
+            <a:ext cx="12191695" cy="6858000"/>
+          </a:xfrm>
+          <a:prstGeom prst="rect">
+            <a:avLst/>
+          </a:prstGeom>
+          <a:solidFill>
+            <a:srgbClr val="0D1117"/>
+          </a:solidFill>
+          <a:ln>
+            <a:noFill/>
+          </a:ln>
+        </p:spPr>
+        <p:style>
+          <a:lnRef idx="1">
+            <a:schemeClr val="accent1"/>
+          </a:lnRef>
+          <a:fillRef idx="3">
+            <a:schemeClr val="accent1"/>
+          </a:fillRef>
+          <a:effectRef idx="2">
+            <a:schemeClr val="accent1"/>
+          </a:effectRef>
+          <a:fontRef idx="minor">
+            <a:schemeClr val="lt1"/>
+          </a:fontRef>
+        </p:style>
+        <p:txBody>
+          <a:bodyPr rtlCol="0" anchor="ctr"/>
+          <a:lstStyle/>
+          <a:p>
+            <a:pPr algn="ctr"/>
+          </a:p>
+        </p:txBody>
+      </p:sp>
+      <p:sp>
+        <p:nvSpPr>
+          <p:cNvPr id="3" name="Rectangle 2"/>
+          <p:cNvSpPr/>
+          <p:nvPr/>
+        </p:nvSpPr>
+        <p:spPr>
+          <a:xfrm>
+            <a:off x="0" y="0"/>
+            <a:ext cx="12191695" cy="73152"/>
+          </a:xfrm>
+          <a:prstGeom prst="rect">
+            <a:avLst/>
+          </a:prstGeom>
+          <a:solidFill>
+            <a:srgbClr val="20E3B2"/>
+          </a:solidFill>
+          <a:ln>
+            <a:noFill/>
+          </a:ln>
+        </p:spPr>
+        <p:style>
+          <a:lnRef idx="1">
+            <a:schemeClr val="accent1"/>
+          </a:lnRef>
+          <a:fillRef idx="3">
+            <a:schemeClr val="accent1"/>
+          </a:fillRef>
+          <a:effectRef idx="2">
+            <a:schemeClr val="accent1"/>
+          </a:effectRef>
+          <a:fontRef idx="minor">
+            <a:schemeClr val="lt1"/>
+          </a:fontRef>
+        </p:style>
+        <p:txBody>
+          <a:bodyPr rtlCol="0" anchor="ctr"/>
+          <a:lstStyle/>
+          <a:p>
+            <a:pPr algn="ctr"/>
+          </a:p>
+        </p:txBody>
+      </p:sp>
+      <p:pic>
+        <p:nvPicPr>
+          <p:cNvPr id="4" name="Picture 3" descr="tryolabs-logo-dark-bg.png"/>
+          <p:cNvPicPr>
+            <a:picLocks noChangeAspect="1"/>
+          </p:cNvPicPr>
+          <p:nvPr/>
+        </p:nvPicPr>
+        <p:blipFill>
+          <a:blip r:embed="rId2"/>
+          <a:stretch>
+            <a:fillRect/>
+          </a:stretch>
+        </p:blipFill>
+        <p:spPr>
+          <a:xfrm>
+            <a:off x="9829800" y="256032"/>
+            <a:ext cx="1874519" cy="417876"/>
+          </a:xfrm>
+          <a:prstGeom prst="rect">
+            <a:avLst/>
+          </a:prstGeom>
+        </p:spPr>
+      </p:pic>
+      <p:sp>
+        <p:nvSpPr>
+          <p:cNvPr id="5" name="TextBox 4"/>
+          <p:cNvSpPr txBox="1"/>
+          <p:nvPr/>
+        </p:nvSpPr>
+        <p:spPr>
+          <a:xfrm>
+            <a:off x="502920" y="256032"/>
+            <a:ext cx="9144000" cy="320040"/>
+          </a:xfrm>
+          <a:prstGeom prst="rect">
+            <a:avLst/>
+          </a:prstGeom>
+          <a:noFill/>
+        </p:spPr>
+        <p:txBody>
+          <a:bodyPr wrap="square">
+            <a:spAutoFit/>
+          </a:bodyPr>
+          <a:lstStyle/>
+          <a:p>
+            <a:pPr>
+              <a:defRPr sz="1050" b="1">
+                <a:solidFill>
+                  <a:srgbClr val="20E3B2"/>
+                </a:solidFill>
+                <a:latin typeface="Arial"/>
+              </a:defRPr>
+            </a:pPr>
+            <a:r>
+              <a:t>LABORATORIO PRÁCTICO 4 CAPSTONE (PARTE 2/2) • INSTRUCCIONES PASO A PASO Y PROMPTS</a:t>
+            </a:r>
+          </a:p>
+        </p:txBody>
+      </p:sp>
+      <p:sp>
+        <p:nvSpPr>
+          <p:cNvPr id="6" name="TextBox 5"/>
+          <p:cNvSpPr txBox="1"/>
+          <p:nvPr/>
+        </p:nvSpPr>
+        <p:spPr>
+          <a:xfrm>
+            <a:off x="502920" y="566928"/>
+            <a:ext cx="9235440" cy="594360"/>
+          </a:xfrm>
+          <a:prstGeom prst="rect">
+            <a:avLst/>
+          </a:prstGeom>
+          <a:noFill/>
+        </p:spPr>
+        <p:txBody>
+          <a:bodyPr wrap="square">
+            <a:spAutoFit/>
+          </a:bodyPr>
+          <a:lstStyle/>
+          <a:p>
+            <a:pPr>
+              <a:defRPr sz="2250" b="1">
+                <a:solidFill>
+                  <a:srgbClr val="F0F6FC"/>
+                </a:solidFill>
+                <a:latin typeface="Arial"/>
+              </a:defRPr>
+            </a:pPr>
+            <a:r>
+              <a:t>Instrucciones del Lab 4, Prueba en `adk web` y Despliegue Terraform</a:t>
+            </a:r>
+          </a:p>
+        </p:txBody>
+      </p:sp>
+      <p:sp>
+        <p:nvSpPr>
+          <p:cNvPr id="7" name="TextBox 6"/>
+          <p:cNvSpPr txBox="1"/>
+          <p:nvPr/>
+        </p:nvSpPr>
+        <p:spPr>
+          <a:xfrm>
+            <a:off x="502920" y="1207008"/>
+            <a:ext cx="11155680" cy="411480"/>
+          </a:xfrm>
+          <a:prstGeom prst="rect">
+            <a:avLst/>
+          </a:prstGeom>
+          <a:noFill/>
+        </p:spPr>
+        <p:txBody>
+          <a:bodyPr wrap="square">
+            <a:spAutoFit/>
+          </a:bodyPr>
+          <a:lstStyle/>
+          <a:p>
+            <a:pPr>
+              <a:defRPr sz="1300">
+                <a:solidFill>
+                  <a:srgbClr val="8B949E"/>
+                </a:solidFill>
+                <a:latin typeface="Arial"/>
+              </a:defRPr>
+            </a:pPr>
+            <a:r>
+              <a:t>Sigue los Pasos 1–5 a la izquierda y copia los prompts desde labs/lab-04-multi-agent-capstone/PROMPTS.es.md</a:t>
+            </a:r>
+          </a:p>
+        </p:txBody>
+      </p:sp>
+      <p:sp>
+        <p:nvSpPr>
+          <p:cNvPr id="8" name="Rounded Rectangle 7"/>
+          <p:cNvSpPr/>
+          <p:nvPr/>
+        </p:nvSpPr>
+        <p:spPr>
+          <a:xfrm>
+            <a:off x="502920" y="1755648"/>
+            <a:ext cx="5504688" cy="4160520"/>
+          </a:xfrm>
+          <a:prstGeom prst="roundRect">
+            <a:avLst/>
+          </a:prstGeom>
+          <a:solidFill>
+            <a:srgbClr val="161B22"/>
+          </a:solidFill>
+          <a:ln w="19050">
+            <a:solidFill>
+              <a:srgbClr val="30363D"/>
+            </a:solidFill>
+          </a:ln>
+        </p:spPr>
+        <p:style>
+          <a:lnRef idx="1">
+            <a:schemeClr val="accent1"/>
+          </a:lnRef>
+          <a:fillRef idx="3">
+            <a:schemeClr val="accent1"/>
+          </a:fillRef>
+          <a:effectRef idx="2">
+            <a:schemeClr val="accent1"/>
+          </a:effectRef>
+          <a:fontRef idx="minor">
+            <a:schemeClr val="lt1"/>
+          </a:fontRef>
+        </p:style>
+        <p:txBody>
+          <a:bodyPr rtlCol="0" anchor="ctr"/>
+          <a:lstStyle/>
+          <a:p>
+            <a:pPr algn="ctr"/>
+          </a:p>
+        </p:txBody>
+      </p:sp>
+      <p:sp>
+        <p:nvSpPr>
+          <p:cNvPr id="9" name="Rectangle 8"/>
+          <p:cNvSpPr/>
+          <p:nvPr/>
+        </p:nvSpPr>
+        <p:spPr>
+          <a:xfrm>
+            <a:off x="502920" y="1755648"/>
+            <a:ext cx="5504688" cy="64008"/>
+          </a:xfrm>
+          <a:prstGeom prst="rect">
+            <a:avLst/>
+          </a:prstGeom>
+          <a:solidFill>
+            <a:srgbClr val="20E3B2"/>
+          </a:solidFill>
+          <a:ln>
+            <a:noFill/>
+          </a:ln>
+        </p:spPr>
+        <p:style>
+          <a:lnRef idx="1">
+            <a:schemeClr val="accent1"/>
+          </a:lnRef>
+          <a:fillRef idx="3">
+            <a:schemeClr val="accent1"/>
+          </a:fillRef>
+          <a:effectRef idx="2">
+            <a:schemeClr val="accent1"/>
+          </a:effectRef>
+          <a:fontRef idx="minor">
+            <a:schemeClr val="lt1"/>
+          </a:fontRef>
+        </p:style>
+        <p:txBody>
+          <a:bodyPr rtlCol="0" anchor="ctr"/>
+          <a:lstStyle/>
+          <a:p>
+            <a:pPr algn="ctr"/>
+          </a:p>
+        </p:txBody>
+      </p:sp>
+      <p:sp>
+        <p:nvSpPr>
+          <p:cNvPr id="10" name="TextBox 9"/>
+          <p:cNvSpPr txBox="1"/>
+          <p:nvPr/>
+        </p:nvSpPr>
+        <p:spPr>
+          <a:xfrm>
+            <a:off x="704088" y="1901952"/>
+            <a:ext cx="5102352" cy="3922776"/>
+          </a:xfrm>
+          <a:prstGeom prst="rect">
+            <a:avLst/>
+          </a:prstGeom>
+          <a:noFill/>
+        </p:spPr>
+        <p:txBody>
+          <a:bodyPr wrap="square">
+            <a:spAutoFit/>
+          </a:bodyPr>
+          <a:lstStyle/>
+          <a:p>
+            <a:pPr>
+              <a:spcAft>
+                <a:spcPts val="800"/>
+              </a:spcAft>
+              <a:defRPr sz="1500" b="1">
+                <a:solidFill>
+                  <a:srgbClr val="20E3B2"/>
+                </a:solidFill>
+                <a:latin typeface="Arial"/>
+              </a:defRPr>
+            </a:pPr>
+            <a:r>
+              <a:t>Instrucciones Paso a Paso del Lab 4</a:t>
+            </a:r>
+          </a:p>
+          <a:p>
+            <a:pPr>
+              <a:spcAft>
+                <a:spcPts val="650"/>
+              </a:spcAft>
+              <a:defRPr sz="1130">
+                <a:solidFill>
+                  <a:srgbClr val="F0F6FC"/>
+                </a:solidFill>
+                <a:latin typeface="Arial"/>
+              </a:defRPr>
+            </a:pPr>
+            <a:r>
+              <a:t>▸  Paso 1 (Inicializar Lab 04): Ejecuta `./labs/lab-04-multi-agent-capstone/install.sh`.</a:t>
+            </a:r>
+          </a:p>
+          <a:p>
+            <a:pPr>
+              <a:spcAft>
+                <a:spcPts val="650"/>
+              </a:spcAft>
+              <a:defRPr sz="1130">
+                <a:solidFill>
+                  <a:srgbClr val="F0F6FC"/>
+                </a:solidFill>
+                <a:latin typeface="Arial"/>
+              </a:defRPr>
+            </a:pPr>
+            <a:r>
+              <a:t>▸  Paso 2 (Enrutador Omnicanal): Implementa `evaluate_candidates()` y `optimize_at_risk_orders()` en `src/services/fulfillment_router.py` (re-enrutando las 35 órdenes VIP según mayor margen neto post-envío).</a:t>
+            </a:r>
+          </a:p>
+          <a:p>
+            <a:pPr>
+              <a:spcAft>
+                <a:spcPts val="650"/>
+              </a:spcAft>
+              <a:defRPr sz="1130">
+                <a:solidFill>
+                  <a:srgbClr val="F0F6FC"/>
+                </a:solidFill>
+                <a:latin typeface="Arial"/>
+              </a:defRPr>
+            </a:pPr>
+            <a:r>
+              <a:t>▸  Paso 3 (Orquestador Google ADK y A2A): Completa `src/agents/adk_a2a_orchestrator.py` (`WMSInventoryATPAgent`, `MerchandisingMarginOTIFAgent`, `RetailPulseOrchestratorAgent`, `GET /.well-known/agent.json`, `POST /api/v1/a2a`).</a:t>
+            </a:r>
+          </a:p>
+          <a:p>
+            <a:pPr>
+              <a:spcAft>
+                <a:spcPts val="650"/>
+              </a:spcAft>
+              <a:defRPr sz="1130">
+                <a:solidFill>
+                  <a:srgbClr val="F0F6FC"/>
+                </a:solidFill>
+                <a:latin typeface="Arial"/>
+              </a:defRPr>
+            </a:pPr>
+            <a:r>
+              <a:t>▸  Paso 4 (Interfaz Local `adk web`): Ejecuta `./scripts/run_adk_web.sh --port 8080` y prueba `retail_pulse` en `http://localhost:8080`.</a:t>
+            </a:r>
+          </a:p>
+          <a:p>
+            <a:pPr>
+              <a:spcAft>
+                <a:spcPts val="650"/>
+              </a:spcAft>
+              <a:defRPr sz="1130">
+                <a:solidFill>
+                  <a:srgbClr val="F0F6FC"/>
+                </a:solidFill>
+                <a:latin typeface="Arial"/>
+              </a:defRPr>
+            </a:pPr>
+            <a:r>
+              <a:t>▸  Paso 5 (Terraform y Verificación Total): Ejecuta `./labs/lab-04-multi-agent-capstone/deploy_gcp.sh --dry-run` y `./labs/lab-04-multi-agent-capstone/verify.sh` (**¡20/20 tests pasando!**).</a:t>
+            </a:r>
+          </a:p>
+        </p:txBody>
+      </p:sp>
+      <p:sp>
+        <p:nvSpPr>
+          <p:cNvPr id="11" name="Rounded Rectangle 10"/>
+          <p:cNvSpPr/>
+          <p:nvPr/>
+        </p:nvSpPr>
+        <p:spPr>
+          <a:xfrm>
+            <a:off x="6199632" y="1755648"/>
+            <a:ext cx="5486400" cy="4160520"/>
+          </a:xfrm>
+          <a:prstGeom prst="roundRect">
+            <a:avLst/>
+          </a:prstGeom>
+          <a:solidFill>
+            <a:srgbClr val="161B22"/>
+          </a:solidFill>
+          <a:ln w="19050">
+            <a:solidFill>
+              <a:srgbClr val="30363D"/>
+            </a:solidFill>
+          </a:ln>
+        </p:spPr>
+        <p:style>
+          <a:lnRef idx="1">
+            <a:schemeClr val="accent1"/>
+          </a:lnRef>
+          <a:fillRef idx="3">
+            <a:schemeClr val="accent1"/>
+          </a:fillRef>
+          <a:effectRef idx="2">
+            <a:schemeClr val="accent1"/>
+          </a:effectRef>
+          <a:fontRef idx="minor">
+            <a:schemeClr val="lt1"/>
+          </a:fontRef>
+        </p:style>
+        <p:txBody>
+          <a:bodyPr rtlCol="0" anchor="ctr"/>
+          <a:lstStyle/>
+          <a:p>
+            <a:pPr algn="ctr"/>
+          </a:p>
+        </p:txBody>
+      </p:sp>
+      <p:sp>
+        <p:nvSpPr>
+          <p:cNvPr id="12" name="Rectangle 11"/>
+          <p:cNvSpPr/>
+          <p:nvPr/>
+        </p:nvSpPr>
+        <p:spPr>
+          <a:xfrm>
+            <a:off x="6199632" y="1755648"/>
+            <a:ext cx="5486400" cy="64008"/>
+          </a:xfrm>
+          <a:prstGeom prst="rect">
+            <a:avLst/>
+          </a:prstGeom>
+          <a:solidFill>
+            <a:srgbClr val="3FB950"/>
+          </a:solidFill>
+          <a:ln>
+            <a:noFill/>
+          </a:ln>
+        </p:spPr>
+        <p:style>
+          <a:lnRef idx="1">
+            <a:schemeClr val="accent1"/>
+          </a:lnRef>
+          <a:fillRef idx="3">
+            <a:schemeClr val="accent1"/>
+          </a:fillRef>
+          <a:effectRef idx="2">
+            <a:schemeClr val="accent1"/>
+          </a:effectRef>
+          <a:fontRef idx="minor">
+            <a:schemeClr val="lt1"/>
+          </a:fontRef>
+        </p:style>
+        <p:txBody>
+          <a:bodyPr rtlCol="0" anchor="ctr"/>
+          <a:lstStyle/>
+          <a:p>
+            <a:pPr algn="ctr"/>
+          </a:p>
+        </p:txBody>
+      </p:sp>
+      <p:sp>
+        <p:nvSpPr>
+          <p:cNvPr id="13" name="TextBox 12"/>
+          <p:cNvSpPr txBox="1"/>
+          <p:nvPr/>
+        </p:nvSpPr>
+        <p:spPr>
+          <a:xfrm>
+            <a:off x="6400800" y="1901952"/>
+            <a:ext cx="5084064" cy="3922776"/>
+          </a:xfrm>
+          <a:prstGeom prst="rect">
+            <a:avLst/>
+          </a:prstGeom>
+          <a:noFill/>
+        </p:spPr>
+        <p:txBody>
+          <a:bodyPr wrap="square">
+            <a:spAutoFit/>
+          </a:bodyPr>
+          <a:lstStyle/>
+          <a:p>
+            <a:pPr>
+              <a:spcAft>
+                <a:spcPts val="800"/>
+              </a:spcAft>
+              <a:defRPr sz="1500" b="1">
+                <a:solidFill>
+                  <a:srgbClr val="3FB950"/>
+                </a:solidFill>
+                <a:latin typeface="Arial"/>
+              </a:defRPr>
+            </a:pPr>
+            <a:r>
+              <a:t>Prompts Optimizados, `adk web` y Comandos Cloud</a:t>
+            </a:r>
+          </a:p>
+          <a:p>
+            <a:pPr>
+              <a:spcAft>
+                <a:spcPts val="650"/>
+              </a:spcAft>
+              <a:defRPr sz="1130">
+                <a:solidFill>
+                  <a:srgbClr val="F0F6FC"/>
+                </a:solidFill>
+                <a:latin typeface="Arial"/>
+              </a:defRPr>
+            </a:pPr>
+            <a:r>
+              <a:t>▸  Prompt 1 — Enrutador Omnicanal: '/plan Implementa evaluate_candidates y optimize_at_risk_orders en @src/services/fulfillment_router.py ordenando nodos por (-post_shipping_net_margin_usd, shipping_cost_usd, prioridad DC).'</a:t>
+            </a:r>
+          </a:p>
+          <a:p>
+            <a:pPr>
+              <a:spcAft>
+                <a:spcPts val="650"/>
+              </a:spcAft>
+              <a:defRPr sz="1130">
+                <a:solidFill>
+                  <a:srgbClr val="F0F6FC"/>
+                </a:solidFill>
+                <a:latin typeface="Arial"/>
+              </a:defRPr>
+            </a:pPr>
+            <a:r>
+              <a:t>▸  Prompt 2 — Orquestador ADK + A2A: '/teamwork Implementa WMSInventoryATPAgent, MerchandisingMarginOTIFAgent, RetailPulseOrchestratorAgent, build_a2a_agent_card y handle_a2a_jsonrpc en @src/agents/adk_a2a_orchestrator.py.'</a:t>
+            </a:r>
+          </a:p>
+          <a:p>
+            <a:pPr>
+              <a:spcAft>
+                <a:spcPts val="650"/>
+              </a:spcAft>
+              <a:defRPr sz="1130">
+                <a:solidFill>
+                  <a:srgbClr val="F0F6FC"/>
+                </a:solidFill>
+                <a:latin typeface="Arial"/>
+              </a:defRPr>
+            </a:pPr>
+            <a:r>
+              <a:t>▸  Prompt 3 — Interactivo en `adk web` (http://localhost:8080): 'Ejecuta remediación omnicanal: aplica el piso de 15% de margen, re-enruta las 35 órdenes VIP y reclama penalidades OTIF.'</a:t>
+            </a:r>
+          </a:p>
+          <a:p>
+            <a:pPr>
+              <a:spcAft>
+                <a:spcPts val="650"/>
+              </a:spcAft>
+              <a:defRPr sz="1130">
+                <a:solidFill>
+                  <a:srgbClr val="F0F6FC"/>
+                </a:solidFill>
+                <a:latin typeface="Arial"/>
+              </a:defRPr>
+            </a:pPr>
+            <a:r>
+              <a:t>▸  Despliegue y Verificación: Ejecuta `./labs/lab-04-multi-agent-capstone/deploy_gcp.sh --dry-run` y `./labs/lab-04-multi-agent-capstone/verify.sh`.</a:t>
+            </a:r>
+          </a:p>
+        </p:txBody>
+      </p:sp>
+      <p:sp>
+        <p:nvSpPr>
+          <p:cNvPr id="14" name="Rectangle 13"/>
+          <p:cNvSpPr/>
+          <p:nvPr/>
+        </p:nvSpPr>
+        <p:spPr>
+          <a:xfrm>
+            <a:off x="502920" y="6108192"/>
+            <a:ext cx="11183112" cy="475488"/>
+          </a:xfrm>
+          <a:prstGeom prst="rect">
+            <a:avLst/>
+          </a:prstGeom>
+          <a:solidFill>
+            <a:srgbClr val="161B22"/>
+          </a:solidFill>
+          <a:ln w="12700">
+            <a:solidFill>
+              <a:srgbClr val="30363D"/>
+            </a:solidFill>
+          </a:ln>
+        </p:spPr>
+        <p:style>
+          <a:lnRef idx="1">
+            <a:schemeClr val="accent1"/>
+          </a:lnRef>
+          <a:fillRef idx="3">
+            <a:schemeClr val="accent1"/>
+          </a:fillRef>
+          <a:effectRef idx="2">
+            <a:schemeClr val="accent1"/>
+          </a:effectRef>
+          <a:fontRef idx="minor">
+            <a:schemeClr val="lt1"/>
+          </a:fontRef>
+        </p:style>
+        <p:txBody>
+          <a:bodyPr rtlCol="0" anchor="ctr"/>
+          <a:lstStyle/>
+          <a:p>
+            <a:pPr algn="ctr"/>
+          </a:p>
+        </p:txBody>
+      </p:sp>
+      <p:sp>
+        <p:nvSpPr>
+          <p:cNvPr id="15" name="TextBox 14"/>
+          <p:cNvSpPr txBox="1"/>
+          <p:nvPr/>
+        </p:nvSpPr>
+        <p:spPr>
+          <a:xfrm>
+            <a:off x="685800" y="6172200"/>
+            <a:ext cx="10789920" cy="347472"/>
+          </a:xfrm>
+          <a:prstGeom prst="rect">
+            <a:avLst/>
+          </a:prstGeom>
+          <a:noFill/>
+        </p:spPr>
+        <p:txBody>
+          <a:bodyPr wrap="square">
+            <a:spAutoFit/>
+          </a:bodyPr>
+          <a:lstStyle/>
+          <a:p>
+            <a:pPr>
+              <a:defRPr sz="1150" b="1">
+                <a:solidFill>
+                  <a:srgbClr val="20E3B2"/>
+                </a:solidFill>
+                <a:latin typeface="Arial"/>
+              </a:defRPr>
+            </a:pPr>
+            <a:r>
+              <a:t>Impartido por Tryolabs • Solución de Referencia: ./labs/lab-04-multi-agent-capstone/apply_solution.sh    |    Slide 15/15</a:t>
             </a:r>
           </a:p>
         </p:txBody>
@@ -6031,7 +8825,7 @@
           <a:lstStyle/>
           <a:p>
             <a:pPr>
-              <a:defRPr sz="2400" b="1">
+              <a:defRPr sz="2250" b="1">
                 <a:solidFill>
                   <a:srgbClr val="F0F6FC"/>
                 </a:solidFill>
@@ -6067,7 +8861,7 @@
           <a:lstStyle/>
           <a:p>
             <a:pPr>
-              <a:defRPr sz="1350">
+              <a:defRPr sz="1300">
                 <a:solidFill>
                   <a:srgbClr val="8B949E"/>
                 </a:solidFill>
@@ -6200,8 +8994,8 @@
         </p:nvSpPr>
         <p:spPr>
           <a:xfrm>
-            <a:off x="6537960" y="1920240"/>
-            <a:ext cx="4919472" cy="3886200"/>
+            <a:off x="6510528" y="1901952"/>
+            <a:ext cx="4974336" cy="3922776"/>
           </a:xfrm>
           <a:prstGeom prst="rect">
             <a:avLst/>
@@ -6216,25 +9010,25 @@
           <a:p>
             <a:pPr>
               <a:spcAft>
-                <a:spcPts val="1000"/>
-              </a:spcAft>
-              <a:defRPr sz="1600" b="1">
-                <a:solidFill>
-                  <a:srgbClr val="58A6FF"/>
-                </a:solidFill>
-                <a:latin typeface="Arial"/>
-              </a:defRPr>
-            </a:pPr>
-            <a:r>
-              <a:t>Cronograma Minuto a Minuto</a:t>
-            </a:r>
-          </a:p>
-          <a:p>
-            <a:pPr>
-              <a:spcAft>
                 <a:spcPts val="800"/>
               </a:spcAft>
-              <a:defRPr sz="1220">
+              <a:defRPr sz="1500" b="1">
+                <a:solidFill>
+                  <a:srgbClr val="58A6FF"/>
+                </a:solidFill>
+                <a:latin typeface="Arial"/>
+              </a:defRPr>
+            </a:pPr>
+            <a:r>
+              <a:t>Cronograma Minuto a Minuto</a:t>
+            </a:r>
+          </a:p>
+          <a:p>
+            <a:pPr>
+              <a:spcAft>
+                <a:spcPts val="650"/>
+              </a:spcAft>
+              <a:defRPr sz="1130">
                 <a:solidFill>
                   <a:srgbClr val="F0F6FC"/>
                 </a:solidFill>
@@ -6248,9 +9042,9 @@
           <a:p>
             <a:pPr>
               <a:spcAft>
-                <a:spcPts val="800"/>
+                <a:spcPts val="650"/>
               </a:spcAft>
-              <a:defRPr sz="1220">
+              <a:defRPr sz="1130">
                 <a:solidFill>
                   <a:srgbClr val="F0F6FC"/>
                 </a:solidFill>
@@ -6264,9 +9058,9 @@
           <a:p>
             <a:pPr>
               <a:spcAft>
-                <a:spcPts val="800"/>
+                <a:spcPts val="650"/>
               </a:spcAft>
-              <a:defRPr sz="1220">
+              <a:defRPr sz="1130">
                 <a:solidFill>
                   <a:srgbClr val="F0F6FC"/>
                 </a:solidFill>
@@ -6280,9 +9074,9 @@
           <a:p>
             <a:pPr>
               <a:spcAft>
-                <a:spcPts val="800"/>
+                <a:spcPts val="650"/>
               </a:spcAft>
-              <a:defRPr sz="1220">
+              <a:defRPr sz="1130">
                 <a:solidFill>
                   <a:srgbClr val="F0F6FC"/>
                 </a:solidFill>
@@ -6296,9 +9090,9 @@
           <a:p>
             <a:pPr>
               <a:spcAft>
-                <a:spcPts val="800"/>
+                <a:spcPts val="650"/>
               </a:spcAft>
-              <a:defRPr sz="1220">
+              <a:defRPr sz="1130">
                 <a:solidFill>
                   <a:srgbClr val="F0F6FC"/>
                 </a:solidFill>
@@ -6387,7 +9181,7 @@
               </a:defRPr>
             </a:pPr>
             <a:r>
-              <a:t>Cada laboratorio incluye README.es.md, PROMPTS.es.md (prompts optimizados), install.sh y verify.sh.    |    Slide 2/11</a:t>
+              <a:t>Cada laboratorio incluye LAB_0X_INSTRUCTIONS_ES.pdf, README.es.md, PROMPTS.es.md, install.sh y verify.sh.    |    Slide 2/15</a:t>
             </a:r>
           </a:p>
         </p:txBody>
@@ -6579,7 +9373,7 @@
           <a:lstStyle/>
           <a:p>
             <a:pPr>
-              <a:defRPr sz="2400" b="1">
+              <a:defRPr sz="2250" b="1">
                 <a:solidFill>
                   <a:srgbClr val="F0F6FC"/>
                 </a:solidFill>
@@ -6615,7 +9409,7 @@
           <a:lstStyle/>
           <a:p>
             <a:pPr>
-              <a:defRPr sz="1350">
+              <a:defRPr sz="1300">
                 <a:solidFill>
                   <a:srgbClr val="8B949E"/>
                 </a:solidFill>
@@ -6748,8 +9542,8 @@
         </p:nvSpPr>
         <p:spPr>
           <a:xfrm>
-            <a:off x="6537960" y="1920240"/>
-            <a:ext cx="4919472" cy="3886200"/>
+            <a:off x="6510528" y="1901952"/>
+            <a:ext cx="4974336" cy="3922776"/>
           </a:xfrm>
           <a:prstGeom prst="rect">
             <a:avLst/>
@@ -6764,25 +9558,25 @@
           <a:p>
             <a:pPr>
               <a:spcAft>
-                <a:spcPts val="1000"/>
-              </a:spcAft>
-              <a:defRPr sz="1600" b="1">
-                <a:solidFill>
-                  <a:srgbClr val="BC8CFF"/>
-                </a:solidFill>
-                <a:latin typeface="Arial"/>
-              </a:defRPr>
-            </a:pPr>
-            <a:r>
-              <a:t>El Ciclo Interno de Ejecución en 5 Etapas</a:t>
-            </a:r>
-          </a:p>
-          <a:p>
-            <a:pPr>
-              <a:spcAft>
                 <a:spcPts val="800"/>
               </a:spcAft>
-              <a:defRPr sz="1220">
+              <a:defRPr sz="1500" b="1">
+                <a:solidFill>
+                  <a:srgbClr val="BC8CFF"/>
+                </a:solidFill>
+                <a:latin typeface="Arial"/>
+              </a:defRPr>
+            </a:pPr>
+            <a:r>
+              <a:t>El Ciclo Interno de Ejecución en 5 Etapas</a:t>
+            </a:r>
+          </a:p>
+          <a:p>
+            <a:pPr>
+              <a:spcAft>
+                <a:spcPts val="650"/>
+              </a:spcAft>
+              <a:defRPr sz="1130">
                 <a:solidFill>
                   <a:srgbClr val="F0F6FC"/>
                 </a:solidFill>
@@ -6796,9 +9590,9 @@
           <a:p>
             <a:pPr>
               <a:spcAft>
-                <a:spcPts val="800"/>
+                <a:spcPts val="650"/>
               </a:spcAft>
-              <a:defRPr sz="1220">
+              <a:defRPr sz="1130">
                 <a:solidFill>
                   <a:srgbClr val="F0F6FC"/>
                 </a:solidFill>
@@ -6812,9 +9606,9 @@
           <a:p>
             <a:pPr>
               <a:spcAft>
-                <a:spcPts val="800"/>
+                <a:spcPts val="650"/>
               </a:spcAft>
-              <a:defRPr sz="1220">
+              <a:defRPr sz="1130">
                 <a:solidFill>
                   <a:srgbClr val="F0F6FC"/>
                 </a:solidFill>
@@ -6828,9 +9622,9 @@
           <a:p>
             <a:pPr>
               <a:spcAft>
-                <a:spcPts val="800"/>
+                <a:spcPts val="650"/>
               </a:spcAft>
-              <a:defRPr sz="1220">
+              <a:defRPr sz="1130">
                 <a:solidFill>
                   <a:srgbClr val="F0F6FC"/>
                 </a:solidFill>
@@ -6844,9 +9638,9 @@
           <a:p>
             <a:pPr>
               <a:spcAft>
-                <a:spcPts val="800"/>
+                <a:spcPts val="650"/>
               </a:spcAft>
-              <a:defRPr sz="1220">
+              <a:defRPr sz="1130">
                 <a:solidFill>
                   <a:srgbClr val="F0F6FC"/>
                 </a:solidFill>
@@ -6935,7 +9729,7 @@
               </a:defRPr>
             </a:pPr>
             <a:r>
-              <a:t>Concepto Clave: Antigravity no es solo un chat, sino un motor de ingeniería en bucle cerrado verificable.    |    Slide 3/11</a:t>
+              <a:t>Concepto Clave: Antigravity no es solo un chat, sino un motor de ingeniería en bucle cerrado verificable.    |    Slide 3/15</a:t>
             </a:r>
           </a:p>
         </p:txBody>
@@ -7127,7 +9921,7 @@
           <a:lstStyle/>
           <a:p>
             <a:pPr>
-              <a:defRPr sz="2400" b="1">
+              <a:defRPr sz="2250" b="1">
                 <a:solidFill>
                   <a:srgbClr val="F0F6FC"/>
                 </a:solidFill>
@@ -7163,7 +9957,7 @@
           <a:lstStyle/>
           <a:p>
             <a:pPr>
-              <a:defRPr sz="1350">
+              <a:defRPr sz="1300">
                 <a:solidFill>
                   <a:srgbClr val="8B949E"/>
                 </a:solidFill>
@@ -7296,8 +10090,8 @@
         </p:nvSpPr>
         <p:spPr>
           <a:xfrm>
-            <a:off x="6537960" y="1920240"/>
-            <a:ext cx="4919472" cy="3886200"/>
+            <a:off x="6510528" y="1901952"/>
+            <a:ext cx="4974336" cy="3922776"/>
           </a:xfrm>
           <a:prstGeom prst="rect">
             <a:avLst/>
@@ -7312,25 +10106,25 @@
           <a:p>
             <a:pPr>
               <a:spcAft>
-                <a:spcPts val="1000"/>
-              </a:spcAft>
-              <a:defRPr sz="1600" b="1">
-                <a:solidFill>
-                  <a:srgbClr val="58A6FF"/>
-                </a:solidFill>
-                <a:latin typeface="Arial"/>
-              </a:defRPr>
-            </a:pPr>
-            <a:r>
-              <a:t>Funcionalidades que Explorarás Hoy</a:t>
-            </a:r>
-          </a:p>
-          <a:p>
-            <a:pPr>
-              <a:spcAft>
                 <a:spcPts val="800"/>
               </a:spcAft>
-              <a:defRPr sz="1220">
+              <a:defRPr sz="1500" b="1">
+                <a:solidFill>
+                  <a:srgbClr val="58A6FF"/>
+                </a:solidFill>
+                <a:latin typeface="Arial"/>
+              </a:defRPr>
+            </a:pPr>
+            <a:r>
+              <a:t>Funcionalidades que Explorarás Hoy</a:t>
+            </a:r>
+          </a:p>
+          <a:p>
+            <a:pPr>
+              <a:spcAft>
+                <a:spcPts val="650"/>
+              </a:spcAft>
+              <a:defRPr sz="1130">
                 <a:solidFill>
                   <a:srgbClr val="F0F6FC"/>
                 </a:solidFill>
@@ -7344,9 +10138,9 @@
           <a:p>
             <a:pPr>
               <a:spcAft>
-                <a:spcPts val="800"/>
+                <a:spcPts val="650"/>
               </a:spcAft>
-              <a:defRPr sz="1220">
+              <a:defRPr sz="1130">
                 <a:solidFill>
                   <a:srgbClr val="F0F6FC"/>
                 </a:solidFill>
@@ -7360,9 +10154,9 @@
           <a:p>
             <a:pPr>
               <a:spcAft>
-                <a:spcPts val="800"/>
+                <a:spcPts val="650"/>
               </a:spcAft>
-              <a:defRPr sz="1220">
+              <a:defRPr sz="1130">
                 <a:solidFill>
                   <a:srgbClr val="F0F6FC"/>
                 </a:solidFill>
@@ -7376,9 +10170,9 @@
           <a:p>
             <a:pPr>
               <a:spcAft>
-                <a:spcPts val="800"/>
+                <a:spcPts val="650"/>
               </a:spcAft>
-              <a:defRPr sz="1220">
+              <a:defRPr sz="1130">
                 <a:solidFill>
                   <a:srgbClr val="F0F6FC"/>
                 </a:solidFill>
@@ -7392,9 +10186,9 @@
           <a:p>
             <a:pPr>
               <a:spcAft>
-                <a:spcPts val="800"/>
+                <a:spcPts val="650"/>
               </a:spcAft>
-              <a:defRPr sz="1220">
+              <a:defRPr sz="1130">
                 <a:solidFill>
                   <a:srgbClr val="F0F6FC"/>
                 </a:solidFill>
@@ -7483,7 +10277,7 @@
               </a:defRPr>
             </a:pPr>
             <a:r>
-              <a:t>Tip Pro: Inicia tareas complejas con /plan y menciones @archivo; usa Cmd+I para ajustes puntuales de fórmulas.    |    Slide 4/11</a:t>
+              <a:t>Tip Pro: Inicia tareas complejas con /plan y menciones @archivo; usa Cmd+I para ajustes puntuales de fórmulas.    |    Slide 4/15</a:t>
             </a:r>
           </a:p>
         </p:txBody>
@@ -7647,7 +10441,7 @@
               </a:defRPr>
             </a:pPr>
             <a:r>
-              <a:t>LABORATORIO PRÁCTICO 1 (52 MINUTOS) • TRIAGE Y RECUPERACIÓN</a:t>
+              <a:t>LABORATORIO PRÁCTICO 1 (PARTE 1/2) • OBJETIVOS Y QUÉ CONSTRUIRÁS</a:t>
             </a:r>
           </a:p>
         </p:txBody>
@@ -7675,7 +10469,7 @@
           <a:lstStyle/>
           <a:p>
             <a:pPr>
-              <a:defRPr sz="2400" b="1">
+              <a:defRPr sz="2250" b="1">
                 <a:solidFill>
                   <a:srgbClr val="F0F6FC"/>
                 </a:solidFill>
@@ -7683,7 +10477,7 @@
               </a:defRPr>
             </a:pPr>
             <a:r>
-              <a:t>Lab 1: Diagnóstico de Causa Raíz y Recuperación de Ingresos/Márgenes</a:t>
+              <a:t>Lab 1: Piso de Margen y True ATP — Objetivos y Arquitectura</a:t>
             </a:r>
           </a:p>
         </p:txBody>
@@ -7711,7 +10505,7 @@
           <a:lstStyle/>
           <a:p>
             <a:pPr>
-              <a:defRPr sz="1350">
+              <a:defRPr sz="1300">
                 <a:solidFill>
                   <a:srgbClr val="8B949E"/>
                 </a:solidFill>
@@ -7719,7 +10513,7 @@
               </a:defRPr>
             </a:pPr>
             <a:r>
-              <a:t>Usa Antigravity (/plan, @menciones, Cmd+I, pytest) para corregir dos bugs críticos en producción</a:t>
+              <a:t>52 Minutos • Guía PDF Imprimible: labs/lab-01-margin-inventory-triage/LAB_01_INSTRUCTIONS_ES.pdf</a:t>
             </a:r>
           </a:p>
         </p:txBody>
@@ -7844,8 +10638,8 @@
         </p:nvSpPr>
         <p:spPr>
           <a:xfrm>
-            <a:off x="6537960" y="1920240"/>
-            <a:ext cx="4919472" cy="3886200"/>
+            <a:off x="6510528" y="1901952"/>
+            <a:ext cx="4974336" cy="3922776"/>
           </a:xfrm>
           <a:prstGeom prst="rect">
             <a:avLst/>
@@ -7860,25 +10654,25 @@
           <a:p>
             <a:pPr>
               <a:spcAft>
-                <a:spcPts val="1000"/>
-              </a:spcAft>
-              <a:defRPr sz="1600" b="1">
-                <a:solidFill>
-                  <a:srgbClr val="D29922"/>
-                </a:solidFill>
-                <a:latin typeface="Arial"/>
-              </a:defRPr>
-            </a:pPr>
-            <a:r>
-              <a:t>Guía del Lab 1 y Prompts Optimizados</a:t>
-            </a:r>
-          </a:p>
-          <a:p>
-            <a:pPr>
-              <a:spcAft>
                 <a:spcPts val="800"/>
               </a:spcAft>
-              <a:defRPr sz="1220">
+              <a:defRPr sz="1500" b="1">
+                <a:solidFill>
+                  <a:srgbClr val="D29922"/>
+                </a:solidFill>
+                <a:latin typeface="Arial"/>
+              </a:defRPr>
+            </a:pPr>
+            <a:r>
+              <a:t>Objetivos del Lab 1 y Qué Construirás</a:t>
+            </a:r>
+          </a:p>
+          <a:p>
+            <a:pPr>
+              <a:spcAft>
+                <a:spcPts val="650"/>
+              </a:spcAft>
+              <a:defRPr sz="1130">
                 <a:solidFill>
                   <a:srgbClr val="F0F6FC"/>
                 </a:solidFill>
@@ -7886,15 +10680,15 @@
               </a:defRPr>
             </a:pPr>
             <a:r>
-              <a:t>▸  Setup: Ejecuta ./labs/lab-01-margin-inventory-triage/install.sh y abre http://localhost:8002</a:t>
+              <a:t>▸  Objetivo 1 (Triage Agéntico Multi-Archivo): Dominar `@menciones`, `/plan` y edición en línea `Cmd/Ctrl+I` correlacionando eventos POS/WMS (`pos_wms_webhooks.jsonl`) con código de precios e inventario.</a:t>
             </a:r>
           </a:p>
           <a:p>
             <a:pPr>
               <a:spcAft>
-                <a:spcPts val="800"/>
+                <a:spcPts val="650"/>
               </a:spcAft>
-              <a:defRPr sz="1220">
+              <a:defRPr sz="1130">
                 <a:solidFill>
                   <a:srgbClr val="F0F6FC"/>
                 </a:solidFill>
@@ -7902,15 +10696,15 @@
               </a:defRPr>
             </a:pPr>
             <a:r>
-              <a:t>▸  Bug #1 (Fuga de Margen Comercial): src/services/promo_pricing.py acumula promos no acumulables e ignora el piso de margen del 15% (-$35,113.25 en pérdidas)</a:t>
+              <a:t>▸  Objetivo 2 (Recuperación de Margen y Órdenes VIP): Detener `$35,113.25 USD` en fuga de margen negativo en 30 órdenes y detectar 35 órdenes VIP `DIAMOND`/`GOLD` (`&gt;$250K` LTV) con stock fantasma.</a:t>
             </a:r>
           </a:p>
           <a:p>
             <a:pPr>
               <a:spcAft>
-                <a:spcPts val="800"/>
+                <a:spcPts val="650"/>
               </a:spcAft>
-              <a:defRPr sz="1220">
+              <a:defRPr sz="1130">
                 <a:solidFill>
                   <a:srgbClr val="F0F6FC"/>
                 </a:solidFill>
@@ -7918,15 +10712,15 @@
               </a:defRPr>
             </a:pPr>
             <a:r>
-              <a:t>▸  Bug #2 (Sobreventa Técnica ATP): src/services/inventory_atp.py ignora reserved_bopis_qty, damaged_hold_qty y safety_stock_qty (35 órdenes VIP en riesgo)</a:t>
+              <a:t>▸  Qué Construirás #1 (Motor de Precios GS1 y Piso de Margen): Refactorizarás `src/services/promo_pricing.py` validando `gtin_14` Módulo-10 GS1, `Decimal(ROUND_HALF_UP)`, descuentos acumulables multiplicativos y piso mínimo de margen (`15%`).</a:t>
             </a:r>
           </a:p>
           <a:p>
             <a:pPr>
               <a:spcAft>
-                <a:spcPts val="800"/>
+                <a:spcPts val="650"/>
               </a:spcAft>
-              <a:defRPr sz="1220">
+              <a:defRPr sz="1130">
                 <a:solidFill>
                   <a:srgbClr val="F0F6FC"/>
                 </a:solidFill>
@@ -7934,15 +10728,15 @@
               </a:defRPr>
             </a:pPr>
             <a:r>
-              <a:t>▸  Prompt 1 (/plan): '/plan Inspecciona @src/services/promo_pricing.py, @src/services/inventory_atp.py y @tests/test_lab01_triage.py para diagnosticar los bugs de margen y ATP'</a:t>
+              <a:t>▸  Qué Construirás #2 (Motor de Inventario True ATP): Refactorizarás `src/services/inventory_atp.py` calculando `raw_atp = on_hand - reserved - safety_stock - unprocessed_webhook_delta_qty`.</a:t>
             </a:r>
           </a:p>
           <a:p>
             <a:pPr>
               <a:spcAft>
-                <a:spcPts val="800"/>
+                <a:spcPts val="650"/>
               </a:spcAft>
-              <a:defRPr sz="1220">
+              <a:defRPr sz="1130">
                 <a:solidFill>
                   <a:srgbClr val="F0F6FC"/>
                 </a:solidFill>
@@ -7950,7 +10744,7 @@
               </a:defRPr>
             </a:pPr>
             <a:r>
-              <a:t>▸  Prompt 2 (Cmd+I y Fix): Usa Cmd+I en línea para corregir con Decimal y ejecuta ./labs/lab-01-margin-inventory-triage/verify.sh</a:t>
+              <a:t>▸  Entregable y Verificación: Pasar los 5 tests en `tests/test_lab01_triage.py` (`./labs/lab-01-margin-inventory-triage/verify.sh`) y validar en `http://localhost:8002`.</a:t>
             </a:r>
           </a:p>
         </p:txBody>
@@ -8031,7 +10825,7 @@
               </a:defRPr>
             </a:pPr>
             <a:r>
-              <a:t>Abre PROMPTS.es.md dentro de labs/lab-01-* para copiar prompts optimizados de Diagnóstico, /plan, Cmd+I y Verificación.    |    Slide 5/11</a:t>
+              <a:t>Impartido por Tryolabs • Guía imprimible completa: LAB_01_INSTRUCTIONS_ES.pdf    |    Slide 5/15</a:t>
             </a:r>
           </a:p>
         </p:txBody>
@@ -8195,7 +10989,7 @@
               </a:defRPr>
             </a:pPr>
             <a:r>
-              <a:t>MÓDULO TEÓRICO 2 (6 MINUTOS) • ARQUITECTURA DE PERSONALIZACIÓN</a:t>
+              <a:t>LABORATORIO PRÁCTICO 1 (PARTE 2/2) • INSTRUCCIONES PASO A PASO Y PROMPTS</a:t>
             </a:r>
           </a:p>
         </p:txBody>
@@ -8223,7 +11017,7 @@
           <a:lstStyle/>
           <a:p>
             <a:pPr>
-              <a:defRPr sz="2400" b="1">
+              <a:defRPr sz="2250" b="1">
                 <a:solidFill>
                   <a:srgbClr val="F0F6FC"/>
                 </a:solidFill>
@@ -8231,7 +11025,7 @@
               </a:defRPr>
             </a:pPr>
             <a:r>
-              <a:t>Cómo Funcionan Internamente las Rules y Skills Progresivos</a:t>
+              <a:t>Instrucciones del Lab 1 y Prompts para Copiar y Pegar</a:t>
             </a:r>
           </a:p>
         </p:txBody>
@@ -8259,7 +11053,7 @@
           <a:lstStyle/>
           <a:p>
             <a:pPr>
-              <a:defRPr sz="1350">
+              <a:defRPr sz="1300">
                 <a:solidFill>
                   <a:srgbClr val="8B949E"/>
                 </a:solidFill>
@@ -8267,45 +11061,21 @@
               </a:defRPr>
             </a:pPr>
             <a:r>
-              <a:t>Especializando a Antigravity en tu industria sin saturar la ventana de contexto</a:t>
-            </a:r>
-          </a:p>
-        </p:txBody>
-      </p:sp>
-      <p:pic>
-        <p:nvPicPr>
-          <p:cNvPr id="8" name="Picture 7" descr="customizations_es.png"/>
-          <p:cNvPicPr>
-            <a:picLocks noChangeAspect="1"/>
-          </p:cNvPicPr>
-          <p:nvPr/>
-        </p:nvPicPr>
-        <p:blipFill>
-          <a:blip r:embed="rId3"/>
-          <a:stretch>
-            <a:fillRect/>
-          </a:stretch>
-        </p:blipFill>
+              <a:t>Sigue los Pasos 1–5 a la izquierda y copia los prompts desde labs/lab-01-margin-inventory-triage/PROMPTS.es.md</a:t>
+            </a:r>
+          </a:p>
+        </p:txBody>
+      </p:sp>
+      <p:sp>
+        <p:nvSpPr>
+          <p:cNvPr id="8" name="Rounded Rectangle 7"/>
+          <p:cNvSpPr/>
+          <p:nvPr/>
+        </p:nvSpPr>
         <p:spPr>
           <a:xfrm>
             <a:off x="502920" y="1755648"/>
-            <a:ext cx="5623560" cy="3186684"/>
-          </a:xfrm>
-          <a:prstGeom prst="rect">
-            <a:avLst/>
-          </a:prstGeom>
-        </p:spPr>
-      </p:pic>
-      <p:sp>
-        <p:nvSpPr>
-          <p:cNvPr id="9" name="Rounded Rectangle 8"/>
-          <p:cNvSpPr/>
-          <p:nvPr/>
-        </p:nvSpPr>
-        <p:spPr>
-          <a:xfrm>
-            <a:off x="6309360" y="1755648"/>
-            <a:ext cx="5376672" cy="4160520"/>
+            <a:ext cx="5504688" cy="4160520"/>
           </a:xfrm>
           <a:prstGeom prst="roundRect">
             <a:avLst/>
@@ -8343,20 +11113,20 @@
       </p:sp>
       <p:sp>
         <p:nvSpPr>
-          <p:cNvPr id="10" name="Rectangle 9"/>
+          <p:cNvPr id="9" name="Rectangle 8"/>
           <p:cNvSpPr/>
           <p:nvPr/>
         </p:nvSpPr>
         <p:spPr>
           <a:xfrm>
-            <a:off x="6309360" y="1755648"/>
-            <a:ext cx="5376672" cy="64008"/>
+            <a:off x="502920" y="1755648"/>
+            <a:ext cx="5504688" cy="64008"/>
           </a:xfrm>
           <a:prstGeom prst="rect">
             <a:avLst/>
           </a:prstGeom>
           <a:solidFill>
-            <a:srgbClr val="3FB950"/>
+            <a:srgbClr val="D29922"/>
           </a:solidFill>
           <a:ln>
             <a:noFill/>
@@ -8386,14 +11156,14 @@
       </p:sp>
       <p:sp>
         <p:nvSpPr>
-          <p:cNvPr id="11" name="TextBox 10"/>
+          <p:cNvPr id="10" name="TextBox 9"/>
           <p:cNvSpPr txBox="1"/>
           <p:nvPr/>
         </p:nvSpPr>
         <p:spPr>
           <a:xfrm>
-            <a:off x="6537960" y="1920240"/>
-            <a:ext cx="4919472" cy="3886200"/>
+            <a:off x="704088" y="1901952"/>
+            <a:ext cx="5102352" cy="3922776"/>
           </a:xfrm>
           <a:prstGeom prst="rect">
             <a:avLst/>
@@ -8408,25 +11178,232 @@
           <a:p>
             <a:pPr>
               <a:spcAft>
-                <a:spcPts val="1000"/>
+                <a:spcPts val="800"/>
               </a:spcAft>
-              <a:defRPr sz="1600" b="1">
-                <a:solidFill>
-                  <a:srgbClr val="3FB950"/>
-                </a:solidFill>
-                <a:latin typeface="Arial"/>
-              </a:defRPr>
-            </a:pPr>
-            <a:r>
-              <a:t>Rules vs. Skills vs. /learn</a:t>
-            </a:r>
-          </a:p>
+              <a:defRPr sz="1500" b="1">
+                <a:solidFill>
+                  <a:srgbClr val="D29922"/>
+                </a:solidFill>
+                <a:latin typeface="Arial"/>
+              </a:defRPr>
+            </a:pPr>
+            <a:r>
+              <a:t>Instrucciones Paso a Paso del Lab 1</a:t>
+            </a:r>
+          </a:p>
+          <a:p>
+            <a:pPr>
+              <a:spcAft>
+                <a:spcPts val="650"/>
+              </a:spcAft>
+              <a:defRPr sz="1130">
+                <a:solidFill>
+                  <a:srgbClr val="F0F6FC"/>
+                </a:solidFill>
+                <a:latin typeface="Arial"/>
+              </a:defRPr>
+            </a:pPr>
+            <a:r>
+              <a:t>▸  Paso 1 (Inicializar Lab 01): Ejecuta `./labs/lab-01-margin-inventory-triage/install.sh` para inicializar `data/retail_pulse.db`.</a:t>
+            </a:r>
+          </a:p>
+          <a:p>
+            <a:pPr>
+              <a:spcAft>
+                <a:spcPts val="650"/>
+              </a:spcAft>
+              <a:defRPr sz="1130">
+                <a:solidFill>
+                  <a:srgbClr val="F0F6FC"/>
+                </a:solidFill>
+                <a:latin typeface="Arial"/>
+              </a:defRPr>
+            </a:pPr>
+            <a:r>
+              <a:t>▸  Paso 2 (Reproducir Fallos): Ejecuta `./.venv/bin/pytest tests/test_lab01_triage.py` para observar los fallos de margen y ATP.</a:t>
+            </a:r>
+          </a:p>
+          <a:p>
+            <a:pPr>
+              <a:spcAft>
+                <a:spcPts val="650"/>
+              </a:spcAft>
+              <a:defRPr sz="1130">
+                <a:solidFill>
+                  <a:srgbClr val="F0F6FC"/>
+                </a:solidFill>
+                <a:latin typeface="Arial"/>
+              </a:defRPr>
+            </a:pPr>
+            <a:r>
+              <a:t>▸  Paso 3 (Corregir `src/services/promo_pricing.py`): Valida `gtin_14` Módulo-10 GS1, usa `Decimal(ROUND_HALF_UP)`, no combines cupones `EXCLUSIVE`, aplica los acumulables multiplicativamente y protege `contract_min_margin_floor_pct`.</a:t>
+            </a:r>
+          </a:p>
+          <a:p>
+            <a:pPr>
+              <a:spcAft>
+                <a:spcPts val="650"/>
+              </a:spcAft>
+              <a:defRPr sz="1130">
+                <a:solidFill>
+                  <a:srgbClr val="F0F6FC"/>
+                </a:solidFill>
+                <a:latin typeface="Arial"/>
+              </a:defRPr>
+            </a:pPr>
+            <a:r>
+              <a:t>▸  Paso 4 (Corregir `src/services/inventory_atp.py`): Calcula `raw_atp = on_hand - reserved - safety_stock - unprocessed_webhook_delta_qty` y `true_atp = max(0, raw_atp)`.</a:t>
+            </a:r>
+          </a:p>
+          <a:p>
+            <a:pPr>
+              <a:spcAft>
+                <a:spcPts val="650"/>
+              </a:spcAft>
+              <a:defRPr sz="1130">
+                <a:solidFill>
+                  <a:srgbClr val="F0F6FC"/>
+                </a:solidFill>
+                <a:latin typeface="Arial"/>
+              </a:defRPr>
+            </a:pPr>
+            <a:r>
+              <a:t>▸  Paso 5 (Verificar): Ejecuta `./labs/lab-01-margin-inventory-triage/verify.sh` (`5 passed`: `$35,113.25` recuperados; 35 órdenes VIP detectadas).</a:t>
+            </a:r>
+          </a:p>
+        </p:txBody>
+      </p:sp>
+      <p:sp>
+        <p:nvSpPr>
+          <p:cNvPr id="11" name="Rounded Rectangle 10"/>
+          <p:cNvSpPr/>
+          <p:nvPr/>
+        </p:nvSpPr>
+        <p:spPr>
+          <a:xfrm>
+            <a:off x="6199632" y="1755648"/>
+            <a:ext cx="5486400" cy="4160520"/>
+          </a:xfrm>
+          <a:prstGeom prst="roundRect">
+            <a:avLst/>
+          </a:prstGeom>
+          <a:solidFill>
+            <a:srgbClr val="161B22"/>
+          </a:solidFill>
+          <a:ln w="19050">
+            <a:solidFill>
+              <a:srgbClr val="30363D"/>
+            </a:solidFill>
+          </a:ln>
+        </p:spPr>
+        <p:style>
+          <a:lnRef idx="1">
+            <a:schemeClr val="accent1"/>
+          </a:lnRef>
+          <a:fillRef idx="3">
+            <a:schemeClr val="accent1"/>
+          </a:fillRef>
+          <a:effectRef idx="2">
+            <a:schemeClr val="accent1"/>
+          </a:effectRef>
+          <a:fontRef idx="minor">
+            <a:schemeClr val="lt1"/>
+          </a:fontRef>
+        </p:style>
+        <p:txBody>
+          <a:bodyPr rtlCol="0" anchor="ctr"/>
+          <a:lstStyle/>
+          <a:p>
+            <a:pPr algn="ctr"/>
+          </a:p>
+        </p:txBody>
+      </p:sp>
+      <p:sp>
+        <p:nvSpPr>
+          <p:cNvPr id="12" name="Rectangle 11"/>
+          <p:cNvSpPr/>
+          <p:nvPr/>
+        </p:nvSpPr>
+        <p:spPr>
+          <a:xfrm>
+            <a:off x="6199632" y="1755648"/>
+            <a:ext cx="5486400" cy="64008"/>
+          </a:xfrm>
+          <a:prstGeom prst="rect">
+            <a:avLst/>
+          </a:prstGeom>
+          <a:solidFill>
+            <a:srgbClr val="58A6FF"/>
+          </a:solidFill>
+          <a:ln>
+            <a:noFill/>
+          </a:ln>
+        </p:spPr>
+        <p:style>
+          <a:lnRef idx="1">
+            <a:schemeClr val="accent1"/>
+          </a:lnRef>
+          <a:fillRef idx="3">
+            <a:schemeClr val="accent1"/>
+          </a:fillRef>
+          <a:effectRef idx="2">
+            <a:schemeClr val="accent1"/>
+          </a:effectRef>
+          <a:fontRef idx="minor">
+            <a:schemeClr val="lt1"/>
+          </a:fontRef>
+        </p:style>
+        <p:txBody>
+          <a:bodyPr rtlCol="0" anchor="ctr"/>
+          <a:lstStyle/>
+          <a:p>
+            <a:pPr algn="ctr"/>
+          </a:p>
+        </p:txBody>
+      </p:sp>
+      <p:sp>
+        <p:nvSpPr>
+          <p:cNvPr id="13" name="TextBox 12"/>
+          <p:cNvSpPr txBox="1"/>
+          <p:nvPr/>
+        </p:nvSpPr>
+        <p:spPr>
+          <a:xfrm>
+            <a:off x="6400800" y="1901952"/>
+            <a:ext cx="5084064" cy="3922776"/>
+          </a:xfrm>
+          <a:prstGeom prst="rect">
+            <a:avLst/>
+          </a:prstGeom>
+          <a:noFill/>
+        </p:spPr>
+        <p:txBody>
+          <a:bodyPr wrap="square">
+            <a:spAutoFit/>
+          </a:bodyPr>
+          <a:lstStyle/>
           <a:p>
             <a:pPr>
               <a:spcAft>
                 <a:spcPts val="800"/>
               </a:spcAft>
-              <a:defRPr sz="1220">
+              <a:defRPr sz="1500" b="1">
+                <a:solidFill>
+                  <a:srgbClr val="58A6FF"/>
+                </a:solidFill>
+                <a:latin typeface="Arial"/>
+              </a:defRPr>
+            </a:pPr>
+            <a:r>
+              <a:t>Prompts Optimizados (PROMPTS.es.md) y Verificación</a:t>
+            </a:r>
+          </a:p>
+          <a:p>
+            <a:pPr>
+              <a:spcAft>
+                <a:spcPts val="650"/>
+              </a:spcAft>
+              <a:defRPr sz="1130">
                 <a:solidFill>
                   <a:srgbClr val="F0F6FC"/>
                 </a:solidFill>
@@ -8434,15 +11411,15 @@
               </a:defRPr>
             </a:pPr>
             <a:r>
-              <a:t>▸  Reglas Jerárquicas (GEMINI.md y .agents/rules/*.md): Invariantes de dominio cargados desde la raíz del workspace hasta los subdirectorios (deduplicados automáticamente)</a:t>
+              <a:t>▸  Prompt 1 — Diagnóstico (@Menciones): '@src/services/promo_pricing.py @src/services/inventory_atp.py @data/logs/pos_wms_webhooks.jsonl @tests/test_lab01_triage.py Ejecuta pytest y explica por qué 30 órdenes pierden margen y 35 órdenes VIP tienen inventario fantasma.'</a:t>
             </a:r>
           </a:p>
           <a:p>
             <a:pPr>
               <a:spcAft>
-                <a:spcPts val="800"/>
+                <a:spcPts val="650"/>
               </a:spcAft>
-              <a:defRPr sz="1220">
+              <a:defRPr sz="1130">
                 <a:solidFill>
                   <a:srgbClr val="F0F6FC"/>
                 </a:solidFill>
@@ -8450,15 +11427,15 @@
               </a:defRPr>
             </a:pPr>
             <a:r>
-              <a:t>▸  Skills con Divulgación Progresiva (.agents/skills/&lt;name&gt;/SKILL.md): Solo el frontmatter YAML (name, description) entra al prompt inicial; el cuerpo completo y scripts/ se cargan SOLO al activarse</a:t>
+              <a:t>▸  Prompt 2 — Planificación (/plan): '/plan Crea un plan de corrección para promo_pricing.py (GS1 GTIN-14, Decimal, promos acumulables multiplicativas, piso de margen) e inventory_atp.py (restar reserved, safety_stock y webhook delta).'</a:t>
             </a:r>
           </a:p>
           <a:p>
             <a:pPr>
               <a:spcAft>
-                <a:spcPts val="800"/>
+                <a:spcPts val="650"/>
               </a:spcAft>
-              <a:defRPr sz="1220">
+              <a:defRPr sz="1130">
                 <a:solidFill>
                   <a:srgbClr val="F0F6FC"/>
                 </a:solidFill>
@@ -8466,15 +11443,15 @@
               </a:defRPr>
             </a:pPr>
             <a:r>
-              <a:t>▸  Memoria Auto-Mejorable (/learn): Pide a Antigravity codificar un patrón aprendido durante el debugging en una regla o skill permanente</a:t>
+              <a:t>▸  Prompt 3 — Edición en Línea (Cmd+I): Selecciona `calculate_node_atp` en `inventory_atp.py` -&gt; 'Resta reserved_qty, safety_stock_qty y unprocessed_webhook_delta_qty de on_hand_qty.'</a:t>
             </a:r>
           </a:p>
           <a:p>
             <a:pPr>
               <a:spcAft>
-                <a:spcPts val="800"/>
+                <a:spcPts val="650"/>
               </a:spcAft>
-              <a:defRPr sz="1220">
+              <a:defRPr sz="1130">
                 <a:solidFill>
                   <a:srgbClr val="F0F6FC"/>
                 </a:solidFill>
@@ -8482,14 +11459,14 @@
               </a:defRPr>
             </a:pPr>
             <a:r>
-              <a:t>▸  Jerarquía de Prioridad: Workspace (.agents/) &gt; JSON Declarado (skills.json) &gt; Global (~/.gemini/config/) &gt; Integrado</a:t>
-            </a:r>
-          </a:p>
-        </p:txBody>
-      </p:sp>
-      <p:sp>
-        <p:nvSpPr>
-          <p:cNvPr id="12" name="Rectangle 11"/>
+              <a:t>▸  Prompt 4 — Verificación Autónoma: 'Aplica las correcciones en @src/services/promo_pricing.py y @src/services/inventory_atp.py y ejecuta ./labs/lab-01-margin-inventory-triage/verify.sh.'</a:t>
+            </a:r>
+          </a:p>
+        </p:txBody>
+      </p:sp>
+      <p:sp>
+        <p:nvSpPr>
+          <p:cNvPr id="14" name="Rectangle 13"/>
           <p:cNvSpPr/>
           <p:nvPr/>
         </p:nvSpPr>
@@ -8534,7 +11511,7 @@
       </p:sp>
       <p:sp>
         <p:nvSpPr>
-          <p:cNvPr id="13" name="TextBox 12"/>
+          <p:cNvPr id="15" name="TextBox 14"/>
           <p:cNvSpPr txBox="1"/>
           <p:nvPr/>
         </p:nvSpPr>
@@ -8563,7 +11540,7 @@
               </a:defRPr>
             </a:pPr>
             <a:r>
-              <a:t>Regla Práctica: Coloca invariantes permanentes en GEMINI.md/rules y flujos multifase con scripts en SKILL.md.    |    Slide 6/11</a:t>
+              <a:t>Impartido por Tryolabs • Solución de Referencia: ./labs/lab-01-margin-inventory-triage/apply_solution.sh    |    Slide 6/15</a:t>
             </a:r>
           </a:p>
         </p:txBody>
@@ -8727,7 +11704,7 @@
               </a:defRPr>
             </a:pPr>
             <a:r>
-              <a:t>LABORATORIO PRÁCTICO 2 (54 MINUTOS) • CEREBRO DE DOMINIO</a:t>
+              <a:t>MÓDULO TEÓRICO 2 (6 MINUTOS) • ARQUITECTURA DE PERSONALIZACIÓN</a:t>
             </a:r>
           </a:p>
         </p:txBody>
@@ -8755,7 +11732,7 @@
           <a:lstStyle/>
           <a:p>
             <a:pPr>
-              <a:defRPr sz="2400" b="1">
+              <a:defRPr sz="2250" b="1">
                 <a:solidFill>
                   <a:srgbClr val="F0F6FC"/>
                 </a:solidFill>
@@ -8763,7 +11740,7 @@
               </a:defRPr>
             </a:pPr>
             <a:r>
-              <a:t>Lab 2: Reglas de Industria y Skill de Auditoría Ejecutiva</a:t>
+              <a:t>Cómo Funcionan Internamente las Rules y Skills Progresivos</a:t>
             </a:r>
           </a:p>
         </p:txBody>
@@ -8791,7 +11768,7 @@
           <a:lstStyle/>
           <a:p>
             <a:pPr>
-              <a:defRPr sz="1350">
+              <a:defRPr sz="1300">
                 <a:solidFill>
                   <a:srgbClr val="8B949E"/>
                 </a:solidFill>
@@ -8799,7 +11776,7 @@
               </a:defRPr>
             </a:pPr>
             <a:r>
-              <a:t>Enseña a Antigravity los estándares de tu industria y construye un Auditor Técnico + Comercial</a:t>
+              <a:t>Especializando a Antigravity en tu industria sin saturar la ventana de contexto</a:t>
             </a:r>
           </a:p>
         </p:txBody>
@@ -8924,8 +11901,8 @@
         </p:nvSpPr>
         <p:spPr>
           <a:xfrm>
-            <a:off x="6537960" y="1920240"/>
-            <a:ext cx="4919472" cy="3886200"/>
+            <a:off x="6510528" y="1901952"/>
+            <a:ext cx="4974336" cy="3922776"/>
           </a:xfrm>
           <a:prstGeom prst="rect">
             <a:avLst/>
@@ -8940,25 +11917,25 @@
           <a:p>
             <a:pPr>
               <a:spcAft>
-                <a:spcPts val="1000"/>
-              </a:spcAft>
-              <a:defRPr sz="1600" b="1">
-                <a:solidFill>
-                  <a:srgbClr val="3FB950"/>
-                </a:solidFill>
-                <a:latin typeface="Arial"/>
-              </a:defRPr>
-            </a:pPr>
-            <a:r>
-              <a:t>Guía del Lab 2 y Prompts Optimizados</a:t>
-            </a:r>
-          </a:p>
-          <a:p>
-            <a:pPr>
-              <a:spcAft>
                 <a:spcPts val="800"/>
               </a:spcAft>
-              <a:defRPr sz="1220">
+              <a:defRPr sz="1500" b="1">
+                <a:solidFill>
+                  <a:srgbClr val="3FB950"/>
+                </a:solidFill>
+                <a:latin typeface="Arial"/>
+              </a:defRPr>
+            </a:pPr>
+            <a:r>
+              <a:t>Rules vs. Skills vs. /learn</a:t>
+            </a:r>
+          </a:p>
+          <a:p>
+            <a:pPr>
+              <a:spcAft>
+                <a:spcPts val="650"/>
+              </a:spcAft>
+              <a:defRPr sz="1130">
                 <a:solidFill>
                   <a:srgbClr val="F0F6FC"/>
                 </a:solidFill>
@@ -8966,15 +11943,15 @@
               </a:defRPr>
             </a:pPr>
             <a:r>
-              <a:t>▸  Setup: Ejecuta ./labs/lab-02-rules-and-skills/install.sh (aplica la solución del Lab 1 automáticamente)</a:t>
+              <a:t>▸  Reglas Jerárquicas (GEMINI.md y .agents/rules/*.md): Invariantes de dominio cargados desde la raíz del workspace hasta los subdirectorios (deduplicados automáticamente)</a:t>
             </a:r>
           </a:p>
           <a:p>
             <a:pPr>
               <a:spcAft>
-                <a:spcPts val="800"/>
+                <a:spcPts val="650"/>
               </a:spcAft>
-              <a:defRPr sz="1220">
+              <a:defRPr sz="1130">
                 <a:solidFill>
                   <a:srgbClr val="F0F6FC"/>
                 </a:solidFill>
@@ -8982,15 +11959,15 @@
               </a:defRPr>
             </a:pPr>
             <a:r>
-              <a:t>▸  Tarea 1 (Reglas de Workspace): Crea GEMINI.md y .agents/rules/retail-standards.md imponiendo Decimal(0.01), validación GS1 Módulo-10 GTIN-14 y piso de margen del 15%</a:t>
+              <a:t>▸  Skills con Divulgación Progresiva (.agents/skills/&lt;name&gt;/SKILL.md): Solo el frontmatter YAML (name, description) entra al prompt inicial; el cuerpo completo y scripts/ se cargan SOLO al activarse</a:t>
             </a:r>
           </a:p>
           <a:p>
             <a:pPr>
               <a:spcAft>
-                <a:spcPts val="800"/>
+                <a:spcPts val="650"/>
               </a:spcAft>
-              <a:defRPr sz="1220">
+              <a:defRPr sz="1130">
                 <a:solidFill>
                   <a:srgbClr val="F0F6FC"/>
                 </a:solidFill>
@@ -8998,15 +11975,15 @@
               </a:defRPr>
             </a:pPr>
             <a:r>
-              <a:t>▸  Tarea 2 (Skill Progresivo): Crea .agents/skills/retail-otif-margin-auditor/SKILL.md correlacionando retrasos EDI 856 con penalizaciones OTIF</a:t>
+              <a:t>▸  Memoria Auto-Mejorable (/learn): Pide a Antigravity codificar un patrón aprendido durante el debugging en una regla o skill permanente</a:t>
             </a:r>
           </a:p>
           <a:p>
             <a:pPr>
               <a:spcAft>
-                <a:spcPts val="800"/>
+                <a:spcPts val="650"/>
               </a:spcAft>
-              <a:defRPr sz="1220">
+              <a:defRPr sz="1130">
                 <a:solidFill>
                   <a:srgbClr val="F0F6FC"/>
                 </a:solidFill>
@@ -9014,23 +11991,7 @@
               </a:defRPr>
             </a:pPr>
             <a:r>
-              <a:t>▸  Prompt Optimizado: 'Crea @GEMINI.md, @.agents/rules/retail-standards.md y @.agents/skills/retail-otif-margin-auditor/SKILL.md, y ejecuta @scripts/run_otif_margin_audit.py'</a:t>
-            </a:r>
-          </a:p>
-          <a:p>
-            <a:pPr>
-              <a:spcAft>
-                <a:spcPts val="800"/>
-              </a:spcAft>
-              <a:defRPr sz="1220">
-                <a:solidFill>
-                  <a:srgbClr val="F0F6FC"/>
-                </a:solidFill>
-                <a:latin typeface="Arial"/>
-              </a:defRPr>
-            </a:pPr>
-            <a:r>
-              <a:t>▸  Verificación: Ejecuta ./labs/lab-02-rules-and-skills/verify.sh y prueba /learn para persistir reglas</a:t>
+              <a:t>▸  Jerarquía de Prioridad: Workspace (.agents/) &gt; JSON Declarado (skills.json) &gt; Global (~/.gemini/config/) &gt; Integrado</a:t>
             </a:r>
           </a:p>
         </p:txBody>
@@ -9111,7 +12072,7 @@
               </a:defRPr>
             </a:pPr>
             <a:r>
-              <a:t>Abre labs/lab-02-rules-and-skills/PROMPTS.es.md para seguir los prompts paso a paso.    |    Slide 7/11</a:t>
+              <a:t>Regla Práctica: Coloca invariantes permanentes en GEMINI.md/rules y flujos multifase con scripts en SKILL.md.    |    Slide 7/15</a:t>
             </a:r>
           </a:p>
         </p:txBody>
@@ -9275,7 +12236,7 @@
               </a:defRPr>
             </a:pPr>
             <a:r>
-              <a:t>MÓDULO TEÓRICO 3 (6 MINUTOS) • MCP, HOOKS Y GOBERNANZA EMPRESARIAL</a:t>
+              <a:t>LABORATORIO PRÁCTICO 2 (PARTE 1/2) • OBJETIVOS Y QUÉ CONSTRUIRÁS</a:t>
             </a:r>
           </a:p>
         </p:txBody>
@@ -9303,7 +12264,7 @@
           <a:lstStyle/>
           <a:p>
             <a:pPr>
-              <a:defRPr sz="2400" b="1">
+              <a:defRPr sz="2250" b="1">
                 <a:solidFill>
                   <a:srgbClr val="F0F6FC"/>
                 </a:solidFill>
@@ -9311,7 +12272,7 @@
               </a:defRPr>
             </a:pPr>
             <a:r>
-              <a:t>Puente MCP en Vivo, Hooks Deterministas y Gobernanza Gemini Enterprise</a:t>
+              <a:t>Lab 2: Rules de Workspace y Skills Progresivos — Objetivos y Diseño</a:t>
             </a:r>
           </a:p>
         </p:txBody>
@@ -9339,7 +12300,7 @@
           <a:lstStyle/>
           <a:p>
             <a:pPr>
-              <a:defRPr sz="1350">
+              <a:defRPr sz="1300">
                 <a:solidFill>
                   <a:srgbClr val="8B949E"/>
                 </a:solidFill>
@@ -9347,14 +12308,14 @@
               </a:defRPr>
             </a:pPr>
             <a:r>
-              <a:t>Conectando bases de datos en tiempo real con seguridad empresarial demostrable en Google Cloud</a:t>
+              <a:t>54 Minutos • Guía PDF Imprimible: labs/lab-02-rules-and-skills/LAB_02_INSTRUCTIONS_ES.pdf</a:t>
             </a:r>
           </a:p>
         </p:txBody>
       </p:sp>
       <p:pic>
         <p:nvPicPr>
-          <p:cNvPr id="8" name="Picture 7" descr="governance_es.png"/>
+          <p:cNvPr id="8" name="Picture 7" descr="customizations_es.png"/>
           <p:cNvPicPr>
             <a:picLocks noChangeAspect="1"/>
           </p:cNvPicPr>
@@ -9436,7 +12397,7 @@
             <a:avLst/>
           </a:prstGeom>
           <a:solidFill>
-            <a:srgbClr val="D29922"/>
+            <a:srgbClr val="3FB950"/>
           </a:solidFill>
           <a:ln>
             <a:noFill/>
@@ -9472,8 +12433,8 @@
         </p:nvSpPr>
         <p:spPr>
           <a:xfrm>
-            <a:off x="6537960" y="1920240"/>
-            <a:ext cx="4919472" cy="3886200"/>
+            <a:off x="6510528" y="1901952"/>
+            <a:ext cx="4974336" cy="3922776"/>
           </a:xfrm>
           <a:prstGeom prst="rect">
             <a:avLst/>
@@ -9488,25 +12449,25 @@
           <a:p>
             <a:pPr>
               <a:spcAft>
-                <a:spcPts val="1000"/>
-              </a:spcAft>
-              <a:defRPr sz="1600" b="1">
-                <a:solidFill>
-                  <a:srgbClr val="D29922"/>
-                </a:solidFill>
-                <a:latin typeface="Arial"/>
-              </a:defRPr>
-            </a:pPr>
-            <a:r>
-              <a:t>Seguridad y Gobernanza en 2 Capas</a:t>
-            </a:r>
-          </a:p>
-          <a:p>
-            <a:pPr>
-              <a:spcAft>
                 <a:spcPts val="800"/>
               </a:spcAft>
-              <a:defRPr sz="1220">
+              <a:defRPr sz="1500" b="1">
+                <a:solidFill>
+                  <a:srgbClr val="3FB950"/>
+                </a:solidFill>
+                <a:latin typeface="Arial"/>
+              </a:defRPr>
+            </a:pPr>
+            <a:r>
+              <a:t>Objetivos del Lab 2 y Qué Construirás</a:t>
+            </a:r>
+          </a:p>
+          <a:p>
+            <a:pPr>
+              <a:spcAft>
+                <a:spcPts val="650"/>
+              </a:spcAft>
+              <a:defRPr sz="1130">
                 <a:solidFill>
                   <a:srgbClr val="F0F6FC"/>
                 </a:solidFill>
@@ -9514,15 +12475,15 @@
               </a:defRPr>
             </a:pPr>
             <a:r>
-              <a:t>▸  Capa 1 — Google Cloud y Gemini Enterprise (Demo en Vivo del Instructor): Cloud IAM (roles/cloudaicompanion.user), Cloud Audit Logs (cloudaicompanion.googleapis.com), perímetros VPC-SC, Cero Retención y Cero Entrenamiento con código del cliente</a:t>
+              <a:t>▸  Objetivo 1 (Reglas Jerárquicas de Dominio): Codificar invariantes permanentes GS1 GTIN-14, True ATP, promociones multiplicativas y cargos OTIF en el workspace.</a:t>
             </a:r>
           </a:p>
           <a:p>
             <a:pPr>
               <a:spcAft>
-                <a:spcPts val="800"/>
+                <a:spcPts val="650"/>
               </a:spcAft>
-              <a:defRPr sz="1220">
+              <a:defRPr sz="1130">
                 <a:solidFill>
                   <a:srgbClr val="F0F6FC"/>
                 </a:solidFill>
@@ -9530,15 +12491,15 @@
               </a:defRPr>
             </a:pPr>
             <a:r>
-              <a:t>▸  Capa 2 — Seguridad Local en Antigravity: Política de Ejecución (strict / request-review / proceed-in-sandbox), Sandbox de Terminal SO, bloqueo de archivos fuera del workspace y listas permitidas/bloqueadas</a:t>
+              <a:t>▸  Objetivo 2 (Skills con Divulgación Progresiva): Construir un skill ejecutivo de auditoría comercial y logística en `.agents/skills/` usando frontmatter YAML ligero.</a:t>
             </a:r>
           </a:p>
           <a:p>
             <a:pPr>
               <a:spcAft>
-                <a:spcPts val="800"/>
+                <a:spcPts val="650"/>
               </a:spcAft>
-              <a:defRPr sz="1220">
+              <a:defRPr sz="1130">
                 <a:solidFill>
                   <a:srgbClr val="F0F6FC"/>
                 </a:solidFill>
@@ -9546,15 +12507,15 @@
               </a:defRPr>
             </a:pPr>
             <a:r>
-              <a:t>▸  Contexto en Vivo vía FastMCP (.agents/mcp_config.json): Expone herramientas Python tipadas sobre SQLite y telemetría vía stdio/SSE</a:t>
+              <a:t>▸  Qué Construirás #1 (`GEMINI.md` y `.agents/rules/retail-standards.md`): Memoria y reglas del workspace exigiendo `Decimal(ROUND_HALF_UP)`, dígito verificador GS1 Módulo-10, piso de margen `15%` y fórmulas OTIF.</a:t>
             </a:r>
           </a:p>
           <a:p>
             <a:pPr>
               <a:spcAft>
-                <a:spcPts val="800"/>
+                <a:spcPts val="650"/>
               </a:spcAft>
-              <a:defRPr sz="1220">
+              <a:defRPr sz="1130">
                 <a:solidFill>
                   <a:srgbClr val="F0F6FC"/>
                 </a:solidFill>
@@ -9562,7 +12523,23 @@
               </a:defRPr>
             </a:pPr>
             <a:r>
-              <a:t>▸  Hooks Deterministas (.agents/hooks.json): El script PreToolUse inspecciona el JSON en stdin; devolver código 2 bloquea violaciones e imprime un registro de auditoría inmutable</a:t>
+              <a:t>▸  Qué Construirás #2 (`.agents/skills/margin-otif-audit/SKILL.md`): Skill progresivo (`name: margin-otif-audit`) que ejecuta `scripts/run_otif_margin_audit.py`.</a:t>
+            </a:r>
+          </a:p>
+          <a:p>
+            <a:pPr>
+              <a:spcAft>
+                <a:spcPts val="650"/>
+              </a:spcAft>
+              <a:defRPr sz="1130">
+                <a:solidFill>
+                  <a:srgbClr val="F0F6FC"/>
+                </a:solidFill>
+                <a:latin typeface="Arial"/>
+              </a:defRPr>
+            </a:pPr>
+            <a:r>
+              <a:t>▸  Entregable y Verificación: Generar `data/exports/executive_margin_otif_audit.json` y `.md` (`$98,250.00` en cargos OTIF) y pasar `./labs/lab-02-rules-and-skills/verify.sh`.</a:t>
             </a:r>
           </a:p>
         </p:txBody>
@@ -9643,7 +12620,7 @@
               </a:defRPr>
             </a:pPr>
             <a:r>
-              <a:t>Demo del Instructor: Mostrar Cloud Audit Logs en GCP Console + disparar un bloqueo PreToolUse con código 2 localmente.    |    Slide 8/11</a:t>
+              <a:t>Impartido por Tryolabs • Guía imprimible completa: LAB_02_INSTRUCTIONS_ES.pdf    |    Slide 8/15</a:t>
             </a:r>
           </a:p>
         </p:txBody>
@@ -9807,7 +12784,7 @@
               </a:defRPr>
             </a:pPr>
             <a:r>
-              <a:t>LABORATORIO PRÁCTICO 3 (55 MINUTOS) • SERVIDOR MCP Y HOOKS</a:t>
+              <a:t>LABORATORIO PRÁCTICO 2 (PARTE 2/2) • INSTRUCCIONES PASO A PASO Y PROMPTS</a:t>
             </a:r>
           </a:p>
         </p:txBody>
@@ -9835,7 +12812,7 @@
           <a:lstStyle/>
           <a:p>
             <a:pPr>
-              <a:defRPr sz="2400" b="1">
+              <a:defRPr sz="2250" b="1">
                 <a:solidFill>
                   <a:srgbClr val="F0F6FC"/>
                 </a:solidFill>
@@ -9843,7 +12820,7 @@
               </a:defRPr>
             </a:pPr>
             <a:r>
-              <a:t>Lab 3: Servidor FastMCP Local y Guardarraíles de Cumplimiento</a:t>
+              <a:t>Instrucciones del Lab 2 y Prompts para Copiar y Pegar</a:t>
             </a:r>
           </a:p>
         </p:txBody>
@@ -9871,7 +12848,7 @@
           <a:lstStyle/>
           <a:p>
             <a:pPr>
-              <a:defRPr sz="1350">
+              <a:defRPr sz="1300">
                 <a:solidFill>
                   <a:srgbClr val="8B949E"/>
                 </a:solidFill>
@@ -9879,45 +12856,21 @@
               </a:defRPr>
             </a:pPr>
             <a:r>
-              <a:t>Conecta Antigravity a bases de datos en vivo con protección determinista PreToolUse</a:t>
-            </a:r>
-          </a:p>
-        </p:txBody>
-      </p:sp>
-      <p:pic>
-        <p:nvPicPr>
-          <p:cNvPr id="8" name="Picture 7" descr="governance_es.png"/>
-          <p:cNvPicPr>
-            <a:picLocks noChangeAspect="1"/>
-          </p:cNvPicPr>
-          <p:nvPr/>
-        </p:nvPicPr>
-        <p:blipFill>
-          <a:blip r:embed="rId3"/>
-          <a:stretch>
-            <a:fillRect/>
-          </a:stretch>
-        </p:blipFill>
+              <a:t>Sigue los Pasos 1–5 a la izquierda y copia los prompts desde labs/lab-02-rules-and-skills/PROMPTS.es.md</a:t>
+            </a:r>
+          </a:p>
+        </p:txBody>
+      </p:sp>
+      <p:sp>
+        <p:nvSpPr>
+          <p:cNvPr id="8" name="Rounded Rectangle 7"/>
+          <p:cNvSpPr/>
+          <p:nvPr/>
+        </p:nvSpPr>
         <p:spPr>
           <a:xfrm>
             <a:off x="502920" y="1755648"/>
-            <a:ext cx="5623560" cy="3186684"/>
-          </a:xfrm>
-          <a:prstGeom prst="rect">
-            <a:avLst/>
-          </a:prstGeom>
-        </p:spPr>
-      </p:pic>
-      <p:sp>
-        <p:nvSpPr>
-          <p:cNvPr id="9" name="Rounded Rectangle 8"/>
-          <p:cNvSpPr/>
-          <p:nvPr/>
-        </p:nvSpPr>
-        <p:spPr>
-          <a:xfrm>
-            <a:off x="6309360" y="1755648"/>
-            <a:ext cx="5376672" cy="4160520"/>
+            <a:ext cx="5504688" cy="4160520"/>
           </a:xfrm>
           <a:prstGeom prst="roundRect">
             <a:avLst/>
@@ -9955,20 +12908,20 @@
       </p:sp>
       <p:sp>
         <p:nvSpPr>
-          <p:cNvPr id="10" name="Rectangle 9"/>
+          <p:cNvPr id="9" name="Rectangle 8"/>
           <p:cNvSpPr/>
           <p:nvPr/>
         </p:nvSpPr>
         <p:spPr>
           <a:xfrm>
-            <a:off x="6309360" y="1755648"/>
-            <a:ext cx="5376672" cy="64008"/>
+            <a:off x="502920" y="1755648"/>
+            <a:ext cx="5504688" cy="64008"/>
           </a:xfrm>
           <a:prstGeom prst="rect">
             <a:avLst/>
           </a:prstGeom>
           <a:solidFill>
-            <a:srgbClr val="BC8CFF"/>
+            <a:srgbClr val="3FB950"/>
           </a:solidFill>
           <a:ln>
             <a:noFill/>
@@ -9998,14 +12951,14 @@
       </p:sp>
       <p:sp>
         <p:nvSpPr>
-          <p:cNvPr id="11" name="TextBox 10"/>
+          <p:cNvPr id="10" name="TextBox 9"/>
           <p:cNvSpPr txBox="1"/>
           <p:nvPr/>
         </p:nvSpPr>
         <p:spPr>
           <a:xfrm>
-            <a:off x="6537960" y="1920240"/>
-            <a:ext cx="4919472" cy="3886200"/>
+            <a:off x="704088" y="1901952"/>
+            <a:ext cx="5102352" cy="3922776"/>
           </a:xfrm>
           <a:prstGeom prst="rect">
             <a:avLst/>
@@ -10020,25 +12973,232 @@
           <a:p>
             <a:pPr>
               <a:spcAft>
-                <a:spcPts val="1000"/>
+                <a:spcPts val="800"/>
               </a:spcAft>
-              <a:defRPr sz="1600" b="1">
-                <a:solidFill>
-                  <a:srgbClr val="BC8CFF"/>
-                </a:solidFill>
-                <a:latin typeface="Arial"/>
-              </a:defRPr>
-            </a:pPr>
-            <a:r>
-              <a:t>Guía del Lab 3 y Prompts Optimizados</a:t>
-            </a:r>
-          </a:p>
+              <a:defRPr sz="1500" b="1">
+                <a:solidFill>
+                  <a:srgbClr val="3FB950"/>
+                </a:solidFill>
+                <a:latin typeface="Arial"/>
+              </a:defRPr>
+            </a:pPr>
+            <a:r>
+              <a:t>Instrucciones Paso a Paso del Lab 2</a:t>
+            </a:r>
+          </a:p>
+          <a:p>
+            <a:pPr>
+              <a:spcAft>
+                <a:spcPts val="650"/>
+              </a:spcAft>
+              <a:defRPr sz="1130">
+                <a:solidFill>
+                  <a:srgbClr val="F0F6FC"/>
+                </a:solidFill>
+                <a:latin typeface="Arial"/>
+              </a:defRPr>
+            </a:pPr>
+            <a:r>
+              <a:t>▸  Paso 1 (Inicializar Lab 02): Ejecuta `./labs/lab-02-rules-and-skills/install.sh` (aplica Lab 01 automáticamente).</a:t>
+            </a:r>
+          </a:p>
+          <a:p>
+            <a:pPr>
+              <a:spcAft>
+                <a:spcPts val="650"/>
+              </a:spcAft>
+              <a:defRPr sz="1130">
+                <a:solidFill>
+                  <a:srgbClr val="F0F6FC"/>
+                </a:solidFill>
+                <a:latin typeface="Arial"/>
+              </a:defRPr>
+            </a:pPr>
+            <a:r>
+              <a:t>▸  Paso 2 (Crear `GEMINI.md` en la raíz): Documenta `sku_catalog`, `wms_inventory`, `vendor_contracts`, `promo_campaigns`, `omnichannel_orders` y las reglas `Decimal(ROUND_HALF_UP)` y `gtin_14`.</a:t>
+            </a:r>
+          </a:p>
+          <a:p>
+            <a:pPr>
+              <a:spcAft>
+                <a:spcPts val="650"/>
+              </a:spcAft>
+              <a:defRPr sz="1130">
+                <a:solidFill>
+                  <a:srgbClr val="F0F6FC"/>
+                </a:solidFill>
+                <a:latin typeface="Arial"/>
+              </a:defRPr>
+            </a:pPr>
+            <a:r>
+              <a:t>▸  Paso 3 (Crear `.agents/rules/retail-standards.md`): Codifica validación GS1 GTIN-14 Módulo-10, fórmula True ATP, descuentos multiplicativos, piso de margen y penalidades OTIF.</a:t>
+            </a:r>
+          </a:p>
+          <a:p>
+            <a:pPr>
+              <a:spcAft>
+                <a:spcPts val="650"/>
+              </a:spcAft>
+              <a:defRPr sz="1130">
+                <a:solidFill>
+                  <a:srgbClr val="F0F6FC"/>
+                </a:solidFill>
+                <a:latin typeface="Arial"/>
+              </a:defRPr>
+            </a:pPr>
+            <a:r>
+              <a:t>▸  Paso 4 (Crear `.agents/skills/margin-otif-audit/SKILL.md`): Incluye frontmatter YAML (`name: margin-otif-audit`, `description: ...`) e instrucciones para correr `./.venv/bin/python scripts/run_otif_margin_audit.py`.</a:t>
+            </a:r>
+          </a:p>
+          <a:p>
+            <a:pPr>
+              <a:spcAft>
+                <a:spcPts val="650"/>
+              </a:spcAft>
+              <a:defRPr sz="1130">
+                <a:solidFill>
+                  <a:srgbClr val="F0F6FC"/>
+                </a:solidFill>
+                <a:latin typeface="Arial"/>
+              </a:defRPr>
+            </a:pPr>
+            <a:r>
+              <a:t>▸  Paso 5 (Verificar): Ejecuta `./labs/lab-02-rules-and-skills/verify.sh` (`5 passed` + reportes ejecutivos JSON/MD).</a:t>
+            </a:r>
+          </a:p>
+        </p:txBody>
+      </p:sp>
+      <p:sp>
+        <p:nvSpPr>
+          <p:cNvPr id="11" name="Rounded Rectangle 10"/>
+          <p:cNvSpPr/>
+          <p:nvPr/>
+        </p:nvSpPr>
+        <p:spPr>
+          <a:xfrm>
+            <a:off x="6199632" y="1755648"/>
+            <a:ext cx="5486400" cy="4160520"/>
+          </a:xfrm>
+          <a:prstGeom prst="roundRect">
+            <a:avLst/>
+          </a:prstGeom>
+          <a:solidFill>
+            <a:srgbClr val="161B22"/>
+          </a:solidFill>
+          <a:ln w="19050">
+            <a:solidFill>
+              <a:srgbClr val="30363D"/>
+            </a:solidFill>
+          </a:ln>
+        </p:spPr>
+        <p:style>
+          <a:lnRef idx="1">
+            <a:schemeClr val="accent1"/>
+          </a:lnRef>
+          <a:fillRef idx="3">
+            <a:schemeClr val="accent1"/>
+          </a:fillRef>
+          <a:effectRef idx="2">
+            <a:schemeClr val="accent1"/>
+          </a:effectRef>
+          <a:fontRef idx="minor">
+            <a:schemeClr val="lt1"/>
+          </a:fontRef>
+        </p:style>
+        <p:txBody>
+          <a:bodyPr rtlCol="0" anchor="ctr"/>
+          <a:lstStyle/>
+          <a:p>
+            <a:pPr algn="ctr"/>
+          </a:p>
+        </p:txBody>
+      </p:sp>
+      <p:sp>
+        <p:nvSpPr>
+          <p:cNvPr id="12" name="Rectangle 11"/>
+          <p:cNvSpPr/>
+          <p:nvPr/>
+        </p:nvSpPr>
+        <p:spPr>
+          <a:xfrm>
+            <a:off x="6199632" y="1755648"/>
+            <a:ext cx="5486400" cy="64008"/>
+          </a:xfrm>
+          <a:prstGeom prst="rect">
+            <a:avLst/>
+          </a:prstGeom>
+          <a:solidFill>
+            <a:srgbClr val="58A6FF"/>
+          </a:solidFill>
+          <a:ln>
+            <a:noFill/>
+          </a:ln>
+        </p:spPr>
+        <p:style>
+          <a:lnRef idx="1">
+            <a:schemeClr val="accent1"/>
+          </a:lnRef>
+          <a:fillRef idx="3">
+            <a:schemeClr val="accent1"/>
+          </a:fillRef>
+          <a:effectRef idx="2">
+            <a:schemeClr val="accent1"/>
+          </a:effectRef>
+          <a:fontRef idx="minor">
+            <a:schemeClr val="lt1"/>
+          </a:fontRef>
+        </p:style>
+        <p:txBody>
+          <a:bodyPr rtlCol="0" anchor="ctr"/>
+          <a:lstStyle/>
+          <a:p>
+            <a:pPr algn="ctr"/>
+          </a:p>
+        </p:txBody>
+      </p:sp>
+      <p:sp>
+        <p:nvSpPr>
+          <p:cNvPr id="13" name="TextBox 12"/>
+          <p:cNvSpPr txBox="1"/>
+          <p:nvPr/>
+        </p:nvSpPr>
+        <p:spPr>
+          <a:xfrm>
+            <a:off x="6400800" y="1901952"/>
+            <a:ext cx="5084064" cy="3922776"/>
+          </a:xfrm>
+          <a:prstGeom prst="rect">
+            <a:avLst/>
+          </a:prstGeom>
+          <a:noFill/>
+        </p:spPr>
+        <p:txBody>
+          <a:bodyPr wrap="square">
+            <a:spAutoFit/>
+          </a:bodyPr>
+          <a:lstStyle/>
           <a:p>
             <a:pPr>
               <a:spcAft>
                 <a:spcPts val="800"/>
               </a:spcAft>
-              <a:defRPr sz="1220">
+              <a:defRPr sz="1500" b="1">
+                <a:solidFill>
+                  <a:srgbClr val="58A6FF"/>
+                </a:solidFill>
+                <a:latin typeface="Arial"/>
+              </a:defRPr>
+            </a:pPr>
+            <a:r>
+              <a:t>Prompts Optimizados (PROMPTS.es.md) y Verificación</a:t>
+            </a:r>
+          </a:p>
+          <a:p>
+            <a:pPr>
+              <a:spcAft>
+                <a:spcPts val="650"/>
+              </a:spcAft>
+              <a:defRPr sz="1130">
                 <a:solidFill>
                   <a:srgbClr val="F0F6FC"/>
                 </a:solidFill>
@@ -10046,15 +13206,15 @@
               </a:defRPr>
             </a:pPr>
             <a:r>
-              <a:t>▸  Setup: Ejecuta ./labs/lab-03-mcp-and-hooks/install.sh</a:t>
+              <a:t>▸  Prompt 1 — Crear Rules de Dominio: '/plan Crea @GEMINI.md y @.agents/rules/retail-standards.md exigiendo Decimal ROUND_HALF_UP, validación GS1 GTIN-14 Módulo-10, deducción de webhook delta en True ATP, promos multiplicativas y reglas OTIF.'</a:t>
             </a:r>
           </a:p>
           <a:p>
             <a:pPr>
               <a:spcAft>
-                <a:spcPts val="800"/>
+                <a:spcPts val="650"/>
               </a:spcAft>
-              <a:defRPr sz="1220">
+              <a:defRPr sz="1130">
                 <a:solidFill>
                   <a:srgbClr val="F0F6FC"/>
                 </a:solidFill>
@@ -10062,15 +13222,15 @@
               </a:defRPr>
             </a:pPr>
             <a:r>
-              <a:t>▸  Tarea 1 (Servidor FastMCP): Implementa herramientas en @mcp_server/retail_mcp.py (query_true_atp_inventory, audit_vendor_otif_contracts, simulate_promo_margin_guard, list_at_risk_vip_orders)</a:t>
+              <a:t>▸  Prompt 2 — Crear Skill Progresivo: 'Crea @.agents/skills/margin-otif-audit/SKILL.md con frontmatter YAML (name: margin-otif-audit) que ejecute ./scripts/run_otif_margin_audit.py y genere data/exports/executive_margin_otif_audit.json y .md.'</a:t>
             </a:r>
           </a:p>
           <a:p>
             <a:pPr>
               <a:spcAft>
-                <a:spcPts val="800"/>
+                <a:spcPts val="650"/>
               </a:spcAft>
-              <a:defRPr sz="1220">
+              <a:defRPr sz="1130">
                 <a:solidFill>
                   <a:srgbClr val="F0F6FC"/>
                 </a:solidFill>
@@ -10078,15 +13238,15 @@
               </a:defRPr>
             </a:pPr>
             <a:r>
-              <a:t>▸  Tarea 2 (MCP y Hook Determinista): Configura .agents/mcp_config.json y .agents/hooks.json (ejecuta @scripts/margin_guard_hook.py bloqueando pisos &lt;15% con código 2)</a:t>
+              <a:t>▸  Prompt 3 — Invocar el Skill: 'Ejecuta una auditoría ejecutiva de márgenes, True ATP y penalidades OTIF de proveedores usando nuestro skill del workspace.'</a:t>
             </a:r>
           </a:p>
           <a:p>
             <a:pPr>
               <a:spcAft>
-                <a:spcPts val="800"/>
+                <a:spcPts val="650"/>
               </a:spcAft>
-              <a:defRPr sz="1220">
+              <a:defRPr sz="1130">
                 <a:solidFill>
                   <a:srgbClr val="F0F6FC"/>
                 </a:solidFill>
@@ -10094,30 +13254,14 @@
               </a:defRPr>
             </a:pPr>
             <a:r>
-              <a:t>▸  Prompt Optimizado: 'Completa @mcp_server/retail_mcp.py, registra @.agents/mcp_config.json y @.agents/hooks.json, y consulta órdenes VIP en riesgo vía MCP'</a:t>
-            </a:r>
-          </a:p>
-          <a:p>
-            <a:pPr>
-              <a:spcAft>
-                <a:spcPts val="800"/>
-              </a:spcAft>
-              <a:defRPr sz="1220">
-                <a:solidFill>
-                  <a:srgbClr val="F0F6FC"/>
-                </a:solidFill>
-                <a:latin typeface="Arial"/>
-              </a:defRPr>
-            </a:pPr>
-            <a:r>
-              <a:t>▸  Verificación: Ejecuta ./labs/lab-03-mcp-and-hooks/verify.sh y revisa data/logs/hook_compliance_audit.jsonl</a:t>
-            </a:r>
-          </a:p>
-        </p:txBody>
-      </p:sp>
-      <p:sp>
-        <p:nvSpPr>
-          <p:cNvPr id="12" name="Rectangle 11"/>
+              <a:t>▸  Comando de Verificación: Ejecuta `./labs/lab-02-rules-and-skills/verify.sh` y prueba `/learn`.</a:t>
+            </a:r>
+          </a:p>
+        </p:txBody>
+      </p:sp>
+      <p:sp>
+        <p:nvSpPr>
+          <p:cNvPr id="14" name="Rectangle 13"/>
           <p:cNvSpPr/>
           <p:nvPr/>
         </p:nvSpPr>
@@ -10162,7 +13306,7 @@
       </p:sp>
       <p:sp>
         <p:nvSpPr>
-          <p:cNvPr id="13" name="TextBox 12"/>
+          <p:cNvPr id="15" name="TextBox 14"/>
           <p:cNvSpPr txBox="1"/>
           <p:nvPr/>
         </p:nvSpPr>
@@ -10191,7 +13335,7 @@
               </a:defRPr>
             </a:pPr>
             <a:r>
-              <a:t>Abre labs/lab-03-mcp-and-hooks/PROMPTS.es.md para copiar los prompts de construcción y prueba de MCP y Hooks.    |    Slide 9/11</a:t>
+              <a:t>Impartido por Tryolabs • Solución de Referencia: ./labs/lab-02-rules-and-skills/apply_solution.sh    |    Slide 9/15</a:t>
             </a:r>
           </a:p>
         </p:txBody>

--- a/slides/antigravity_retail_workshop_es.pptx
+++ b/slides/antigravity_retail_workshop_es.pptx
@@ -379,7 +379,7 @@
             <a:pPr indent="0" algn="r">
               <a:buNone/>
             </a:pPr>
-            <a:fld id="{9E4D46A8-66A3-41A5-B16E-27017FE35D0D}" type="slidenum">
+            <a:fld id="{EE06D4B2-6438-4E09-B2C7-1BE1550FB6E2}" type="slidenum">
               <a:rPr lang="en-US" sz="1400" b="0" u="none" strike="noStrike">
                 <a:solidFill>
                   <a:srgbClr val="000000"/>
@@ -553,7 +553,7 @@
               </a:lnSpc>
               <a:buNone/>
             </a:pPr>
-            <a:fld id="{4CFCA116-25EB-4783-909E-F79AC73C3C9E}" type="slidenum">
+            <a:fld id="{27F183B6-270A-44E5-AC01-DD79BC9923F3}" type="slidenum">
               <a:rPr lang="en-US" sz="1200" b="0" u="none" strike="noStrike">
                 <a:solidFill>
                   <a:srgbClr val="000000"/>
@@ -726,7 +726,7 @@
               </a:lnSpc>
               <a:buNone/>
             </a:pPr>
-            <a:fld id="{525AB4B6-AC59-45C7-9BB4-D612DA26F6A4}" type="slidenum">
+            <a:fld id="{59789724-4CEC-4CEE-88F6-3B97BFCBD57B}" type="slidenum">
               <a:rPr lang="en-US" sz="1200" b="0" u="none" strike="noStrike">
                 <a:solidFill>
                   <a:srgbClr val="000000"/>
@@ -899,7 +899,7 @@
               </a:lnSpc>
               <a:buNone/>
             </a:pPr>
-            <a:fld id="{57667086-6FF3-4141-BF33-4EE81CFE42A1}" type="slidenum">
+            <a:fld id="{D610472C-D474-432E-822B-1E6ED8D0004F}" type="slidenum">
               <a:rPr lang="en-US" sz="1200" b="0" u="none" strike="noStrike">
                 <a:solidFill>
                   <a:srgbClr val="000000"/>
@@ -1072,7 +1072,7 @@
               </a:lnSpc>
               <a:buNone/>
             </a:pPr>
-            <a:fld id="{7A3EEC00-FCD3-473F-9658-CDF18B9FF6C6}" type="slidenum">
+            <a:fld id="{79C6E33D-2340-4F4F-8363-9F3948916380}" type="slidenum">
               <a:rPr lang="en-US" sz="1200" b="0" u="none" strike="noStrike">
                 <a:solidFill>
                   <a:srgbClr val="000000"/>
@@ -1245,7 +1245,7 @@
               </a:lnSpc>
               <a:buNone/>
             </a:pPr>
-            <a:fld id="{E8D44293-8EE6-4E55-ADB4-512320687D1D}" type="slidenum">
+            <a:fld id="{35657D27-7EC0-4024-BDA7-C668A511F04D}" type="slidenum">
               <a:rPr lang="en-US" sz="1200" b="0" u="none" strike="noStrike">
                 <a:solidFill>
                   <a:srgbClr val="000000"/>
@@ -1418,7 +1418,7 @@
               </a:lnSpc>
               <a:buNone/>
             </a:pPr>
-            <a:fld id="{99F288DA-4BB7-4970-A500-66CECE2CCBD3}" type="slidenum">
+            <a:fld id="{A72E7C6D-A49F-48C2-B4A7-2FEF7AEB329E}" type="slidenum">
               <a:rPr lang="en-US" sz="1200" b="0" u="none" strike="noStrike">
                 <a:solidFill>
                   <a:srgbClr val="000000"/>
@@ -1591,7 +1591,7 @@
               </a:lnSpc>
               <a:buNone/>
             </a:pPr>
-            <a:fld id="{1B422F64-BA17-4A43-8196-4AB31EA42E3F}" type="slidenum">
+            <a:fld id="{DFF5D1BB-11BC-4CF6-B877-87100B38BCDE}" type="slidenum">
               <a:rPr lang="en-US" sz="1200" b="0" u="none" strike="noStrike">
                 <a:solidFill>
                   <a:srgbClr val="000000"/>
@@ -1764,7 +1764,7 @@
               </a:lnSpc>
               <a:buNone/>
             </a:pPr>
-            <a:fld id="{AD1B6373-D881-46D3-BFA3-C636A70386E4}" type="slidenum">
+            <a:fld id="{8F2B62E1-5458-4404-89DC-52EF55E7447E}" type="slidenum">
               <a:rPr lang="en-US" sz="1200" b="0" u="none" strike="noStrike">
                 <a:solidFill>
                   <a:srgbClr val="000000"/>
@@ -1937,7 +1937,7 @@
               </a:lnSpc>
               <a:buNone/>
             </a:pPr>
-            <a:fld id="{21292FFC-3DF5-43BE-AB90-0ECCBC28400B}" type="slidenum">
+            <a:fld id="{644656D5-EA68-4AF5-BA72-5910AD9BCE5E}" type="slidenum">
               <a:rPr lang="en-US" sz="1200" b="0" u="none" strike="noStrike">
                 <a:solidFill>
                   <a:srgbClr val="000000"/>
@@ -2110,7 +2110,7 @@
               </a:lnSpc>
               <a:buNone/>
             </a:pPr>
-            <a:fld id="{B026028F-B50C-47D3-85C9-17A41A5F52E5}" type="slidenum">
+            <a:fld id="{20303255-10E8-4480-81EE-1D44C4E241A9}" type="slidenum">
               <a:rPr lang="en-US" sz="1200" b="0" u="none" strike="noStrike">
                 <a:solidFill>
                   <a:srgbClr val="000000"/>
@@ -2283,7 +2283,7 @@
               </a:lnSpc>
               <a:buNone/>
             </a:pPr>
-            <a:fld id="{5FB675F1-6193-464D-98AF-45F53D5DCFDE}" type="slidenum">
+            <a:fld id="{9527F9AB-A6D4-4503-80E4-C5F43090DA0E}" type="slidenum">
               <a:rPr lang="en-US" sz="1200" b="0" u="none" strike="noStrike">
                 <a:solidFill>
                   <a:srgbClr val="000000"/>
@@ -2456,7 +2456,7 @@
               </a:lnSpc>
               <a:buNone/>
             </a:pPr>
-            <a:fld id="{D593400F-0887-4BDD-BAFC-AD5C6FADC486}" type="slidenum">
+            <a:fld id="{AB248628-F35B-422D-A3D9-87352E9CBC6D}" type="slidenum">
               <a:rPr lang="en-US" sz="1200" b="0" u="none" strike="noStrike">
                 <a:solidFill>
                   <a:srgbClr val="000000"/>
@@ -2629,7 +2629,7 @@
               </a:lnSpc>
               <a:buNone/>
             </a:pPr>
-            <a:fld id="{C85F9ECF-F1F9-4F12-B70B-462DFFA2892D}" type="slidenum">
+            <a:fld id="{037B7059-E6BA-43CA-8F83-3A6F41A01A69}" type="slidenum">
               <a:rPr lang="en-US" sz="1200" b="0" u="none" strike="noStrike">
                 <a:solidFill>
                   <a:srgbClr val="000000"/>
@@ -2802,7 +2802,7 @@
               </a:lnSpc>
               <a:buNone/>
             </a:pPr>
-            <a:fld id="{F3C8C2BD-B12D-4329-BAE6-BEDA0C98D2B7}" type="slidenum">
+            <a:fld id="{BABFE095-4941-401B-BFD1-FF75C2799B6D}" type="slidenum">
               <a:rPr lang="en-US" sz="1200" b="0" u="none" strike="noStrike">
                 <a:solidFill>
                   <a:srgbClr val="000000"/>
@@ -2975,7 +2975,7 @@
               </a:lnSpc>
               <a:buNone/>
             </a:pPr>
-            <a:fld id="{864F9ACB-2276-4CC3-B10C-8DB917B7C72D}" type="slidenum">
+            <a:fld id="{EE28C5F8-AD9B-4969-B00C-83E2FB24943C}" type="slidenum">
               <a:rPr lang="en-US" sz="1200" b="0" u="none" strike="noStrike">
                 <a:solidFill>
                   <a:srgbClr val="000000"/>
@@ -3292,7 +3292,7 @@
               </a:lnSpc>
               <a:buNone/>
             </a:pPr>
-            <a:fld id="{C851700A-A0C3-4435-9BDA-124AE1D76FE9}" type="slidenum">
+            <a:fld id="{800AD9F7-CC0C-4405-9D72-C5B785AEF264}" type="slidenum">
               <a:rPr lang="en-US" sz="1200" b="0" u="none" strike="noStrike">
                 <a:solidFill>
                   <a:schemeClr val="dk1">
@@ -4001,7 +4001,7 @@
               </a:lnSpc>
               <a:buNone/>
             </a:pPr>
-            <a:fld id="{0D2FFC08-A9E7-4B54-9365-BD7CC5AFDBDC}" type="slidenum">
+            <a:fld id="{6CE30E5C-3855-40B9-AA4E-D4D9F327AF23}" type="slidenum">
               <a:rPr lang="en-US" sz="1200" b="0" u="none" strike="noStrike">
                 <a:solidFill>
                   <a:schemeClr val="dk1">
@@ -4796,7 +4796,7 @@
               </a:lnSpc>
               <a:buNone/>
             </a:pPr>
-            <a:fld id="{E3C4C40C-50C3-433E-B09A-6C030D6E24CF}" type="slidenum">
+            <a:fld id="{D492F0B0-E376-4D7F-87BD-77A6643B3A5D}" type="slidenum">
               <a:rPr lang="en-US" sz="1200" b="0" u="none" strike="noStrike">
                 <a:solidFill>
                   <a:schemeClr val="dk1">
@@ -5421,7 +5421,7 @@
               </a:lnSpc>
               <a:buNone/>
             </a:pPr>
-            <a:fld id="{0E2F85AA-89F1-4093-9FD1-0121E58A9EF0}" type="slidenum">
+            <a:fld id="{F1B5DBC7-49D3-4C09-AE5C-8D939F6C9418}" type="slidenum">
               <a:rPr lang="en-US" sz="1200" b="0" u="none" strike="noStrike">
                 <a:solidFill>
                   <a:schemeClr val="dk1">
@@ -6046,7 +6046,7 @@
               </a:lnSpc>
               <a:buNone/>
             </a:pPr>
-            <a:fld id="{8A4569FB-C935-49B9-84C0-C8DCC2B64933}" type="slidenum">
+            <a:fld id="{4C49E9BD-2E4E-4773-85B9-EAF08A5CEA7A}" type="slidenum">
               <a:rPr lang="en-US" sz="1200" b="0" u="none" strike="noStrike">
                 <a:solidFill>
                   <a:schemeClr val="dk1">
@@ -6671,7 +6671,7 @@
               </a:lnSpc>
               <a:buNone/>
             </a:pPr>
-            <a:fld id="{6942947D-0979-4D76-898A-0EA6E2329329}" type="slidenum">
+            <a:fld id="{FAF8C62C-9F3C-444E-8357-72460E7F276E}" type="slidenum">
               <a:rPr lang="en-US" sz="1200" b="0" u="none" strike="noStrike">
                 <a:solidFill>
                   <a:schemeClr val="dk1">
@@ -7080,7 +7080,7 @@
               </a:lnSpc>
               <a:buNone/>
             </a:pPr>
-            <a:fld id="{8A1A4E55-BBB9-43A4-8F3A-91EF56299835}" type="slidenum">
+            <a:fld id="{4C8C8D4D-7FAE-440F-9B59-52865BCE1C46}" type="slidenum">
               <a:rPr lang="en-US" sz="1200" b="0" u="none" strike="noStrike">
                 <a:solidFill>
                   <a:schemeClr val="dk1">
@@ -8011,7 +8011,7 @@
               </a:lnSpc>
               <a:buNone/>
             </a:pPr>
-            <a:fld id="{6BF664CF-35B7-451C-A37E-B7B1BD8F9C25}" type="slidenum">
+            <a:fld id="{1F7687F4-5438-40BA-828A-B0FFE54F858D}" type="slidenum">
               <a:rPr lang="en-US" sz="1200" b="0" u="none" strike="noStrike">
                 <a:solidFill>
                   <a:schemeClr val="dk1">
@@ -9170,7 +9170,7 @@
               </a:lnSpc>
               <a:buNone/>
             </a:pPr>
-            <a:fld id="{F057B6CF-7F7A-45F2-8ABC-79EC45C5B89E}" type="slidenum">
+            <a:fld id="{97CCD657-9823-4521-BF01-24C7736FDBF9}" type="slidenum">
               <a:rPr lang="en-US" sz="1200" b="0" u="none" strike="noStrike">
                 <a:solidFill>
                   <a:schemeClr val="dk1">
@@ -9489,7 +9489,7 @@
               </a:lnSpc>
               <a:buNone/>
             </a:pPr>
-            <a:fld id="{7F4C1487-B95A-4720-B7AB-B1AF5744C76B}" type="slidenum">
+            <a:fld id="{11E8E09F-F73E-4B11-9E9A-4538B3A96DBC}" type="slidenum">
               <a:rPr lang="en-US" sz="1200" b="0" u="none" strike="noStrike">
                 <a:solidFill>
                   <a:schemeClr val="dk1">
@@ -9736,7 +9736,7 @@
               </a:lnSpc>
               <a:buNone/>
             </a:pPr>
-            <a:fld id="{17C27D1A-BC86-4DD6-BB03-B2115F2928F9}" type="slidenum">
+            <a:fld id="{759D1D9C-6908-4AC8-AEB6-304BDB82E07B}" type="slidenum">
               <a:rPr lang="en-US" sz="1200" b="0" u="none" strike="noStrike">
                 <a:solidFill>
                   <a:schemeClr val="dk1">
@@ -11027,7 +11027,7 @@
                 <a:uFillTx/>
                 <a:latin typeface="Arial"/>
               </a:rPr>
-              <a:t> Detener $35,113.25 de fuga de margen, rescatar 35 órdenes VIP y cobrar $98,250 OTIF</a:t>
+              <a:t> Detener $18,420.50 de fuga de margen, rescatar 35 órdenes VIP ($749.3K LTV) y cobrar $98,250 OTIF</a:t>
             </a:r>
             <a:endParaRPr lang="en-US" sz="1100" b="0" u="none" strike="noStrike">
               <a:solidFill>
@@ -12677,7 +12677,7 @@
                 <a:uFillTx/>
                 <a:latin typeface="Arial"/>
               </a:rPr>
-              <a:t> Interceptar ediciones de código y comandos shell con un hook </a:t>
+              <a:t> Interceptar ediciones de código y comandos shell con hooks </a:t>
             </a:r>
             <a:r>
               <a:rPr lang="en-US" sz="1100" b="1" u="none" strike="noStrike">
@@ -12699,7 +12699,7 @@
                 <a:uFillTx/>
                 <a:latin typeface="Arial"/>
               </a:rPr>
-              <a:t> que bloquee con código </a:t>
+              <a:t> y </a:t>
             </a:r>
             <a:r>
               <a:rPr lang="en-US" sz="1100" b="1" u="none" strike="noStrike">
@@ -12710,6 +12710,28 @@
                 <a:uFillTx/>
                 <a:latin typeface="Courier New"/>
               </a:rPr>
+              <a:t>PostToolUse</a:t>
+            </a:r>
+            <a:r>
+              <a:rPr lang="en-US" sz="1100" b="0" u="none" strike="noStrike">
+                <a:solidFill>
+                  <a:srgbClr val="F0F6FC"/>
+                </a:solidFill>
+                <a:effectLst/>
+                <a:uFillTx/>
+                <a:latin typeface="Arial"/>
+              </a:rPr>
+              <a:t> que bloqueen con código </a:t>
+            </a:r>
+            <a:r>
+              <a:rPr lang="en-US" sz="1100" b="1" u="none" strike="noStrike">
+                <a:solidFill>
+                  <a:srgbClr val="20E3B2"/>
+                </a:solidFill>
+                <a:effectLst/>
+                <a:uFillTx/>
+                <a:latin typeface="Courier New"/>
+              </a:rPr>
               <a:t>2</a:t>
             </a:r>
             <a:r>
@@ -12721,7 +12743,7 @@
                 <a:uFillTx/>
                 <a:latin typeface="Arial"/>
               </a:rPr>
-              <a:t> cualquier intento de desactivar el piso de margen (</a:t>
+              <a:t> desactivar </a:t>
             </a:r>
             <a:r>
               <a:rPr lang="en-US" sz="1100" b="1" u="none" strike="noStrike">
@@ -12732,7 +12754,7 @@
                 <a:uFillTx/>
                 <a:latin typeface="Courier New"/>
               </a:rPr>
-              <a:t>15%</a:t>
+              <a:t>margin_floor_pct</a:t>
             </a:r>
             <a:r>
               <a:rPr lang="en-US" sz="1100" b="0" u="none" strike="noStrike">
@@ -12743,7 +12765,7 @@
                 <a:uFillTx/>
                 <a:latin typeface="Arial"/>
               </a:rPr>
-              <a:t>).</a:t>
+              <a:t> o SQL destructivo.</a:t>
             </a:r>
             <a:endParaRPr lang="en-US" sz="1100" b="0" u="none" strike="noStrike">
               <a:solidFill>
@@ -13065,6 +13087,28 @@
                 <a:uFillTx/>
                 <a:latin typeface="Arial"/>
               </a:rPr>
+              <a:t> y </a:t>
+            </a:r>
+            <a:r>
+              <a:rPr lang="en-US" sz="1100" b="1" u="none" strike="noStrike">
+                <a:solidFill>
+                  <a:srgbClr val="20E3B2"/>
+                </a:solidFill>
+                <a:effectLst/>
+                <a:uFillTx/>
+                <a:latin typeface="Courier New"/>
+              </a:rPr>
+              <a:t>PostToolUse</a:t>
+            </a:r>
+            <a:r>
+              <a:rPr lang="en-US" sz="1100" b="0" u="none" strike="noStrike">
+                <a:solidFill>
+                  <a:srgbClr val="F0F6FC"/>
+                </a:solidFill>
+                <a:effectLst/>
+                <a:uFillTx/>
+                <a:latin typeface="Arial"/>
+              </a:rPr>
               <a:t> que bloquea </a:t>
             </a:r>
             <a:r>
@@ -13076,7 +13120,7 @@
                 <a:uFillTx/>
                 <a:latin typeface="Courier New"/>
               </a:rPr>
-              <a:t>enforce_floor=False</a:t>
+              <a:t>margin_floor_pct = 0.0</a:t>
             </a:r>
             <a:r>
               <a:rPr lang="en-US" sz="1100" b="0" u="none" strike="noStrike">
@@ -13087,7 +13131,7 @@
                 <a:uFillTx/>
                 <a:latin typeface="Arial"/>
               </a:rPr>
-              <a:t>, margen </a:t>
+              <a:t>, </a:t>
             </a:r>
             <a:r>
               <a:rPr lang="en-US" sz="1100" b="1" u="none" strike="noStrike">
@@ -13098,7 +13142,7 @@
                 <a:uFillTx/>
                 <a:latin typeface="Courier New"/>
               </a:rPr>
-              <a:t>&lt; 0.15</a:t>
+              <a:t>DISABLE_MARGIN_FLOOR</a:t>
             </a:r>
             <a:r>
               <a:rPr lang="en-US" sz="1100" b="0" u="none" strike="noStrike">
@@ -13226,7 +13270,29 @@
                 <a:uFillTx/>
                 <a:latin typeface="Arial"/>
               </a:rPr>
-              <a:t> Pasar los 5 tests de MCP y Hooks en </a:t>
+              <a:t> Pasar los 3 tests de MCP y Hooks (</a:t>
+            </a:r>
+            <a:r>
+              <a:rPr lang="en-US" sz="1100" b="1" u="none" strike="noStrike">
+                <a:solidFill>
+                  <a:srgbClr val="20E3B2"/>
+                </a:solidFill>
+                <a:effectLst/>
+                <a:uFillTx/>
+                <a:latin typeface="Courier New"/>
+              </a:rPr>
+              <a:t>13 passed</a:t>
+            </a:r>
+            <a:r>
+              <a:rPr lang="en-US" sz="1100" b="0" u="none" strike="noStrike">
+                <a:solidFill>
+                  <a:srgbClr val="F0F6FC"/>
+                </a:solidFill>
+                <a:effectLst/>
+                <a:uFillTx/>
+                <a:latin typeface="Arial"/>
+              </a:rPr>
+              <a:t> acumulados) en </a:t>
             </a:r>
             <a:r>
               <a:rPr lang="en-US" sz="1100" b="1" u="none" strike="noStrike">
@@ -14042,7 +14108,7 @@
                 <a:uFillTx/>
                 <a:latin typeface="Courier New"/>
               </a:rPr>
-              <a:t>simulate_promo_margin_guard(promo_code, category, loyalty_tier)</a:t>
+              <a:t>audit_vendor_otif_contracts(only_breaching=True)</a:t>
             </a:r>
             <a:r>
               <a:rPr lang="en-US" sz="1100" b="0" u="none" strike="noStrike">
@@ -14053,6 +14119,28 @@
                 <a:uFillTx/>
                 <a:latin typeface="Arial"/>
               </a:rPr>
+              <a:t>, </a:t>
+            </a:r>
+            <a:r>
+              <a:rPr lang="en-US" sz="1100" b="1" u="none" strike="noStrike">
+                <a:solidFill>
+                  <a:srgbClr val="20E3B2"/>
+                </a:solidFill>
+                <a:effectLst/>
+                <a:uFillTx/>
+                <a:latin typeface="Courier New"/>
+              </a:rPr>
+              <a:t>simulate_promo_margin_guard(sku, qty=1, promo_codes_csv="")</a:t>
+            </a:r>
+            <a:r>
+              <a:rPr lang="en-US" sz="1100" b="0" u="none" strike="noStrike">
+                <a:solidFill>
+                  <a:srgbClr val="F0F6FC"/>
+                </a:solidFill>
+                <a:effectLst/>
+                <a:uFillTx/>
+                <a:latin typeface="Arial"/>
+              </a:rPr>
               <a:t> y </a:t>
             </a:r>
             <a:r>
@@ -14064,7 +14152,7 @@
                 <a:uFillTx/>
                 <a:latin typeface="Courier New"/>
               </a:rPr>
-              <a:t>list_at_risk_vip_orders(loyalty_tier, limit)</a:t>
+              <a:t>list_at_risk_vip_orders(loyalty_tier="DIAMOND")</a:t>
             </a:r>
             <a:r>
               <a:rPr lang="en-US" sz="1100" b="0" u="none" strike="noStrike">
@@ -14181,7 +14269,7 @@
                 <a:uFillTx/>
                 <a:latin typeface="Courier New"/>
               </a:rPr>
-              <a:t>.venv/bin/python -m mcp_server.retail_mcp</a:t>
+              <a:t>./.venv/bin/python mcp_server/retail_mcp.py</a:t>
             </a:r>
             <a:r>
               <a:rPr lang="en-US" sz="1100" b="0" u="none" strike="noStrike">
@@ -14192,7 +14280,7 @@
                 <a:uFillTx/>
                 <a:latin typeface="Arial"/>
               </a:rPr>
-              <a:t>.</a:t>
+              <a:t> vía stdio.</a:t>
             </a:r>
             <a:endParaRPr lang="en-US" sz="1100" b="0" u="none" strike="noStrike">
               <a:solidFill>
@@ -14287,6 +14375,28 @@
                 <a:uFillTx/>
                 <a:latin typeface="Arial"/>
               </a:rPr>
+              <a:t> y </a:t>
+            </a:r>
+            <a:r>
+              <a:rPr lang="en-US" sz="1100" b="1" u="none" strike="noStrike">
+                <a:solidFill>
+                  <a:srgbClr val="20E3B2"/>
+                </a:solidFill>
+                <a:effectLst/>
+                <a:uFillTx/>
+                <a:latin typeface="Courier New"/>
+              </a:rPr>
+              <a:t>PostToolUse</a:t>
+            </a:r>
+            <a:r>
+              <a:rPr lang="en-US" sz="1100" b="0" u="none" strike="noStrike">
+                <a:solidFill>
+                  <a:srgbClr val="F0F6FC"/>
+                </a:solidFill>
+                <a:effectLst/>
+                <a:uFillTx/>
+                <a:latin typeface="Arial"/>
+              </a:rPr>
               <a:t> a </a:t>
             </a:r>
             <a:r>
@@ -14298,7 +14408,7 @@
                 <a:uFillTx/>
                 <a:latin typeface="Courier New"/>
               </a:rPr>
-              <a:t>scripts/margin_guard_hook.py</a:t>
+              <a:t>./.venv/bin/python scripts/margin_guard_hook.py --phase pre</a:t>
             </a:r>
             <a:r>
               <a:rPr lang="en-US" sz="1100" b="0" u="none" strike="noStrike">
@@ -14309,7 +14419,7 @@
                 <a:uFillTx/>
                 <a:latin typeface="Arial"/>
               </a:rPr>
-              <a:t> (bloquea </a:t>
+              <a:t> (y </a:t>
             </a:r>
             <a:r>
               <a:rPr lang="en-US" sz="1100" b="1" u="none" strike="noStrike">
@@ -14320,7 +14430,7 @@
                 <a:uFillTx/>
                 <a:latin typeface="Courier New"/>
               </a:rPr>
-              <a:t>enforce_floor=False</a:t>
+              <a:t>--phase post</a:t>
             </a:r>
             <a:r>
               <a:rPr lang="en-US" sz="1100" b="0" u="none" strike="noStrike">
@@ -14331,29 +14441,7 @@
                 <a:uFillTx/>
                 <a:latin typeface="Arial"/>
               </a:rPr>
-              <a:t> o margen </a:t>
-            </a:r>
-            <a:r>
-              <a:rPr lang="en-US" sz="1100" b="1" u="none" strike="noStrike">
-                <a:solidFill>
-                  <a:srgbClr val="20E3B2"/>
-                </a:solidFill>
-                <a:effectLst/>
-                <a:uFillTx/>
-                <a:latin typeface="Courier New"/>
-              </a:rPr>
-              <a:t>&lt; 0.15</a:t>
-            </a:r>
-            <a:r>
-              <a:rPr lang="en-US" sz="1100" b="0" u="none" strike="noStrike">
-                <a:solidFill>
-                  <a:srgbClr val="F0F6FC"/>
-                </a:solidFill>
-                <a:effectLst/>
-                <a:uFillTx/>
-                <a:latin typeface="Arial"/>
-              </a:rPr>
-              <a:t> con código </a:t>
+              <a:t>, bloqueando violaciones con código </a:t>
             </a:r>
             <a:r>
               <a:rPr lang="en-US" sz="1100" b="1" u="none" strike="noStrike">
@@ -14459,7 +14547,7 @@
                 <a:uFillTx/>
                 <a:latin typeface="Courier New"/>
               </a:rPr>
-              <a:t>5 passed</a:t>
+              <a:t>13 passed</a:t>
             </a:r>
             <a:r>
               <a:rPr lang="en-US" sz="1100" b="0" u="none" strike="noStrike">
@@ -14470,7 +14558,7 @@
                 <a:uFillTx/>
                 <a:latin typeface="Arial"/>
               </a:rPr>
-              <a:t> + bitácora de auditoría).</a:t>
+              <a:t> acumulados en Labs 01–03 + bitácora de auditoría).</a:t>
             </a:r>
             <a:endParaRPr lang="en-US" sz="1100" b="0" u="none" strike="noStrike">
               <a:solidFill>
@@ -14699,7 +14787,7 @@
                 <a:uFillTx/>
                 <a:latin typeface="Arial"/>
               </a:rPr>
-              <a:t> '/plan Implementa simulate_promo_margin_guard y list_at_risk_vip_orders en @mcp_server/retail_mcp.py cumpliendo con @tests/test_lab03_mcp_hooks.py.'</a:t>
+              <a:t> '/plan Implementa audit_vendor_otif_contracts, simulate_promo_margin_guard y list_at_risk_vip_orders en @mcp_server/retail_mcp.py cumpliendo con @tests/test_lab03_mcp_hooks.py.'</a:t>
             </a:r>
             <a:endParaRPr lang="en-US" sz="1100" b="0" u="none" strike="noStrike">
               <a:solidFill>
@@ -14750,7 +14838,7 @@
                 <a:uFillTx/>
                 <a:latin typeface="Arial"/>
               </a:rPr>
-              <a:t> 'Crea @.agents/mcp_config.json para retail-pulse-mcp y @.agents/hooks.json conectando PreToolUse a ./scripts/margin_guard_hook.py.'</a:t>
+              <a:t> 'Crea @.agents/mcp_config.json para retail-pulse-mcp y @.agents/hooks.json conectando PreToolUse y PostToolUse a ./scripts/margin_guard_hook.py.'</a:t>
             </a:r>
             <a:endParaRPr lang="en-US" sz="1100" b="0" u="none" strike="noStrike">
               <a:solidFill>
@@ -14812,7 +14900,7 @@
                 <a:uFillTx/>
                 <a:latin typeface="Courier New"/>
               </a:rPr>
-              <a:t>echo '{"tool_name":"edit_file","tool_input":{"Path":"src/services/promo_pricing.py","Replacement":"enforce_floor=False"}}' | .venv/bin/python scripts/margin_guard_hook.py</a:t>
+              <a:t>echo '{"tool_name":"edit_file","tool_input":{"content":"margin_floor_pct = 0.0"}}' | ./.venv/bin/python scripts/margin_guard_hook.py --phase pre</a:t>
             </a:r>
             <a:endParaRPr lang="en-US" sz="1100" b="0" u="none" strike="noStrike">
               <a:solidFill>
@@ -17022,7 +17110,7 @@
                 <a:uFillTx/>
                 <a:latin typeface="Courier New"/>
               </a:rPr>
-              <a:t>evaluate_candidates</a:t>
+              <a:t>optimize_at_risk_order_routing</a:t>
             </a:r>
             <a:r>
               <a:rPr lang="en-US" sz="1100" b="0" u="none" strike="noStrike">
@@ -17044,7 +17132,7 @@
                 <a:uFillTx/>
                 <a:latin typeface="Courier New"/>
               </a:rPr>
-              <a:t>optimize_at_risk_orders</a:t>
+              <a:t>claim_vendor_otif_chargebacks</a:t>
             </a:r>
             <a:r>
               <a:rPr lang="en-US" sz="1100" b="0" u="none" strike="noStrike">
@@ -17055,7 +17143,51 @@
                 <a:uFillTx/>
                 <a:latin typeface="Arial"/>
               </a:rPr>
-              <a:t>) rescatando las 35 órdenes VIP según margen neto post-envío.</a:t>
+              <a:t>) rescatando las 35 órdenes VIP (</a:t>
+            </a:r>
+            <a:r>
+              <a:rPr lang="en-US" sz="1100" b="1" u="none" strike="noStrike">
+                <a:solidFill>
+                  <a:srgbClr val="58A6FF"/>
+                </a:solidFill>
+                <a:effectLst/>
+                <a:uFillTx/>
+                <a:latin typeface="Courier New"/>
+              </a:rPr>
+              <a:t>$749,300.00</a:t>
+            </a:r>
+            <a:r>
+              <a:rPr lang="en-US" sz="1100" b="0" u="none" strike="noStrike">
+                <a:solidFill>
+                  <a:srgbClr val="F0F6FC"/>
+                </a:solidFill>
+                <a:effectLst/>
+                <a:uFillTx/>
+                <a:latin typeface="Arial"/>
+              </a:rPr>
+              <a:t> LTV) y reclamando </a:t>
+            </a:r>
+            <a:r>
+              <a:rPr lang="en-US" sz="1100" b="1" u="none" strike="noStrike">
+                <a:solidFill>
+                  <a:srgbClr val="58A6FF"/>
+                </a:solidFill>
+                <a:effectLst/>
+                <a:uFillTx/>
+                <a:latin typeface="Courier New"/>
+              </a:rPr>
+              <a:t>$98,250.00</a:t>
+            </a:r>
+            <a:r>
+              <a:rPr lang="en-US" sz="1100" b="0" u="none" strike="noStrike">
+                <a:solidFill>
+                  <a:srgbClr val="F0F6FC"/>
+                </a:solidFill>
+                <a:effectLst/>
+                <a:uFillTx/>
+                <a:latin typeface="Arial"/>
+              </a:rPr>
+              <a:t> OTIF.</a:t>
             </a:r>
             <a:endParaRPr lang="en-US" sz="1100" b="0" u="none" strike="noStrike">
               <a:solidFill>
@@ -18138,7 +18270,7 @@
                 <a:uFillTx/>
                 <a:latin typeface="Courier New"/>
               </a:rPr>
-              <a:t>evaluate_candidates()</a:t>
+              <a:t>optimize_at_risk_order_routing()</a:t>
             </a:r>
             <a:r>
               <a:rPr lang="en-US" sz="1100" b="0" u="none" strike="noStrike">
@@ -18160,7 +18292,7 @@
                 <a:uFillTx/>
                 <a:latin typeface="Courier New"/>
               </a:rPr>
-              <a:t>optimize_at_risk_orders()</a:t>
+              <a:t>claim_vendor_otif_chargebacks()</a:t>
             </a:r>
             <a:r>
               <a:rPr lang="en-US" sz="1100" b="0" u="none" strike="noStrike">
@@ -18193,7 +18325,51 @@
                 <a:uFillTx/>
                 <a:latin typeface="Arial"/>
               </a:rPr>
-              <a:t> (re-enrutando las 35 órdenes VIP según mayor margen neto post-envío).</a:t>
+              <a:t> (re-enrutando las 35 órdenes VIP a </a:t>
+            </a:r>
+            <a:r>
+              <a:rPr lang="en-US" sz="1100" b="1" u="none" strike="noStrike">
+                <a:solidFill>
+                  <a:srgbClr val="58A6FF"/>
+                </a:solidFill>
+                <a:effectLst/>
+                <a:uFillTx/>
+                <a:latin typeface="Courier New"/>
+              </a:rPr>
+              <a:t>REROUTED_SAVED</a:t>
+            </a:r>
+            <a:r>
+              <a:rPr lang="en-US" sz="1100" b="0" u="none" strike="noStrike">
+                <a:solidFill>
+                  <a:srgbClr val="F0F6FC"/>
+                </a:solidFill>
+                <a:effectLst/>
+                <a:uFillTx/>
+                <a:latin typeface="Arial"/>
+              </a:rPr>
+              <a:t> y cobrando </a:t>
+            </a:r>
+            <a:r>
+              <a:rPr lang="en-US" sz="1100" b="1" u="none" strike="noStrike">
+                <a:solidFill>
+                  <a:srgbClr val="58A6FF"/>
+                </a:solidFill>
+                <a:effectLst/>
+                <a:uFillTx/>
+                <a:latin typeface="Courier New"/>
+              </a:rPr>
+              <a:t>$98,250.00</a:t>
+            </a:r>
+            <a:r>
+              <a:rPr lang="en-US" sz="1100" b="0" u="none" strike="noStrike">
+                <a:solidFill>
+                  <a:srgbClr val="F0F6FC"/>
+                </a:solidFill>
+                <a:effectLst/>
+                <a:uFillTx/>
+                <a:latin typeface="Arial"/>
+              </a:rPr>
+              <a:t> OTIF).</a:t>
             </a:r>
             <a:endParaRPr lang="en-US" sz="1100" b="0" u="none" strike="noStrike">
               <a:solidFill>
@@ -18343,7 +18519,7 @@
                 <a:uFillTx/>
                 <a:latin typeface="Courier New"/>
               </a:rPr>
-              <a:t>GET /.well-known/agent.json</a:t>
+              <a:t>get_a2a_agent_card</a:t>
             </a:r>
             <a:r>
               <a:rPr lang="en-US" sz="1100" b="0" u="none" strike="noStrike">
@@ -18365,7 +18541,7 @@
                 <a:uFillTx/>
                 <a:latin typeface="Courier New"/>
               </a:rPr>
-              <a:t>POST /api/v1/a2a</a:t>
+              <a:t>handle_a2a_jsonrpc</a:t>
             </a:r>
             <a:r>
               <a:rPr lang="en-US" sz="1100" b="0" u="none" strike="noStrike">
@@ -18460,7 +18636,7 @@
                 <a:uFillTx/>
                 <a:latin typeface="Courier New"/>
               </a:rPr>
-              <a:t>./scripts/run_adk_web.sh --port 8080</a:t>
+              <a:t>./scripts/run_adk_web.sh</a:t>
             </a:r>
             <a:r>
               <a:rPr lang="en-US" sz="1100" b="0" u="none" strike="noStrike">
@@ -18883,7 +19059,7 @@
                 <a:uFillTx/>
                 <a:latin typeface="Arial"/>
               </a:rPr>
-              <a:t> '/plan Implementa evaluate_candidates y optimize_at_risk_orders en @src/services/fulfillment_router.py ordenando nodos por (-post_shipping_net_margin_usd, shipping_cost_usd, prioridad DC).'</a:t>
+              <a:t> '/plan Implementa optimize_at_risk_order_routing y claim_vendor_otif_chargebacks en @src/services/fulfillment_router.py ordenando nodos candidatos por menor shipping_cost_per_unit y mayor true_atp.'</a:t>
             </a:r>
             <a:endParaRPr lang="en-US" sz="1100" b="0" u="none" strike="noStrike">
               <a:solidFill>
@@ -18934,7 +19110,7 @@
                 <a:uFillTx/>
                 <a:latin typeface="Arial"/>
               </a:rPr>
-              <a:t> '/teamwork Implementa WMSInventoryATPAgent, MerchandisingMarginOTIFAgent, RetailPulseOrchestratorAgent, build_a2a_agent_card y handle_a2a_jsonrpc en @src/agents/adk_a2a_orchestrator.py.'</a:t>
+              <a:t> '/teamwork Implementa WMSInventoryATPAgent, MerchandisingMarginOTIFAgent, RetailPulseOrchestratorAgent, get_a2a_agent_card y handle_a2a_jsonrpc en @src/agents/adk_a2a_orchestrator.py.'</a:t>
             </a:r>
             <a:endParaRPr lang="en-US" sz="1100" b="0" u="none" strike="noStrike">
               <a:solidFill>
@@ -19007,7 +19183,7 @@
                 <a:uFillTx/>
                 <a:latin typeface="Arial"/>
               </a:rPr>
-              <a:t> 'Ejecuta remediación omnicanal: aplica el piso de 15% de margen, re-enruta las 35 órdenes VIP y reclama penalidades OTIF.'</a:t>
+              <a:t> 'Ejecuta remediación omnicanal: aplica el piso de margen en las 28 órdenes, re-enruta las 35 órdenes VIP y reclama penalidades OTIF.'</a:t>
             </a:r>
             <a:endParaRPr lang="en-US" sz="1100" b="0" u="none" strike="noStrike">
               <a:solidFill>
@@ -22756,7 +22932,7 @@
                 <a:uFillTx/>
                 <a:latin typeface="Courier New"/>
               </a:rPr>
-              <a:t>$35,113.25 USD</a:t>
+              <a:t>$18,420.50 USD</a:t>
             </a:r>
             <a:r>
               <a:rPr lang="en-US" sz="1100" b="0" u="none" strike="noStrike">
@@ -22767,7 +22943,7 @@
                 <a:uFillTx/>
                 <a:latin typeface="Arial"/>
               </a:rPr>
-              <a:t> en fuga de margen negativo en 30 órdenes y detectar 35 órdenes VIP </a:t>
+              <a:t> en fuga de margen negativo en 28 órdenes </a:t>
             </a:r>
             <a:r>
               <a:rPr lang="en-US" sz="1100" b="1" u="none" strike="noStrike">
@@ -22778,6 +22954,28 @@
                 <a:uFillTx/>
                 <a:latin typeface="Courier New"/>
               </a:rPr>
+              <a:t>MARGIN_HOLD</a:t>
+            </a:r>
+            <a:r>
+              <a:rPr lang="en-US" sz="1100" b="0" u="none" strike="noStrike">
+                <a:solidFill>
+                  <a:srgbClr val="F0F6FC"/>
+                </a:solidFill>
+                <a:effectLst/>
+                <a:uFillTx/>
+                <a:latin typeface="Arial"/>
+              </a:rPr>
+              <a:t> y detectar 35 órdenes VIP </a:t>
+            </a:r>
+            <a:r>
+              <a:rPr lang="en-US" sz="1100" b="1" u="none" strike="noStrike">
+                <a:solidFill>
+                  <a:srgbClr val="20E3B2"/>
+                </a:solidFill>
+                <a:effectLst/>
+                <a:uFillTx/>
+                <a:latin typeface="Courier New"/>
+              </a:rPr>
               <a:t>DIAMOND</a:t>
             </a:r>
             <a:r>
@@ -22822,7 +23020,7 @@
                 <a:uFillTx/>
                 <a:latin typeface="Courier New"/>
               </a:rPr>
-              <a:t>&gt;$250K</a:t>
+              <a:t>$749,300.00</a:t>
             </a:r>
             <a:r>
               <a:rPr lang="en-US" sz="1100" b="0" u="none" strike="noStrike">
@@ -22961,7 +23159,7 @@
                 <a:uFillTx/>
                 <a:latin typeface="Courier New"/>
               </a:rPr>
-              <a:t>15%</a:t>
+              <a:t>margin_floor_pct</a:t>
             </a:r>
             <a:r>
               <a:rPr lang="en-US" sz="1100" b="0" u="none" strike="noStrike">
@@ -23045,7 +23243,7 @@
                 <a:uFillTx/>
                 <a:latin typeface="Arial"/>
               </a:rPr>
-              <a:t> calculando </a:t>
+              <a:t> (</a:t>
             </a:r>
             <a:r>
               <a:rPr lang="en-US" sz="1100" b="1" u="none" strike="noStrike">
@@ -23056,7 +23254,51 @@
                 <a:uFillTx/>
                 <a:latin typeface="Courier New"/>
               </a:rPr>
-              <a:t>raw_atp = on_hand - reserved - safety_stock - unprocessed_webhook_delta_qty</a:t>
+              <a:t>calculate_true_atp</a:t>
+            </a:r>
+            <a:r>
+              <a:rPr lang="en-US" sz="1100" b="0" u="none" strike="noStrike">
+                <a:solidFill>
+                  <a:srgbClr val="F0F6FC"/>
+                </a:solidFill>
+                <a:effectLst/>
+                <a:uFillTx/>
+                <a:latin typeface="Arial"/>
+              </a:rPr>
+              <a:t> / </a:t>
+            </a:r>
+            <a:r>
+              <a:rPr lang="en-US" sz="1100" b="1" u="none" strike="noStrike">
+                <a:solidFill>
+                  <a:srgbClr val="20E3B2"/>
+                </a:solidFill>
+                <a:effectLst/>
+                <a:uFillTx/>
+                <a:latin typeface="Courier New"/>
+              </a:rPr>
+              <a:t>evaluate_location_atp</a:t>
+            </a:r>
+            <a:r>
+              <a:rPr lang="en-US" sz="1100" b="0" u="none" strike="noStrike">
+                <a:solidFill>
+                  <a:srgbClr val="F0F6FC"/>
+                </a:solidFill>
+                <a:effectLst/>
+                <a:uFillTx/>
+                <a:latin typeface="Arial"/>
+              </a:rPr>
+              <a:t>) restando </a:t>
+            </a:r>
+            <a:r>
+              <a:rPr lang="en-US" sz="1100" b="1" u="none" strike="noStrike">
+                <a:solidFill>
+                  <a:srgbClr val="20E3B2"/>
+                </a:solidFill>
+                <a:effectLst/>
+                <a:uFillTx/>
+                <a:latin typeface="Courier New"/>
+              </a:rPr>
+              <a:t>reserved_qty + damaged_hold_qty + bopis_lock_qty + safety_stock_qty + unprocessed_pos_events</a:t>
             </a:r>
             <a:r>
               <a:rPr lang="en-US" sz="1100" b="0" u="none" strike="noStrike">
@@ -23118,7 +23360,7 @@
                 <a:uFillTx/>
                 <a:latin typeface="Arial"/>
               </a:rPr>
-              <a:t> Pasar los 5 tests en </a:t>
+              <a:t> Pasar los 6 tests en </a:t>
             </a:r>
             <a:r>
               <a:rPr lang="en-US" sz="1100" b="1" u="none" strike="noStrike">
@@ -24139,7 +24381,7 @@
                 <a:uFillTx/>
                 <a:latin typeface="Courier New"/>
               </a:rPr>
-              <a:t>contract_min_margin_floor_pct</a:t>
+              <a:t>margin_floor_pct</a:t>
             </a:r>
             <a:r>
               <a:rPr lang="en-US" sz="1100" b="0" u="none" strike="noStrike">
@@ -24223,7 +24465,7 @@
                 <a:uFillTx/>
                 <a:latin typeface="Arial"/>
               </a:rPr>
-              <a:t> Calcula </a:t>
+              <a:t> Resta </a:t>
             </a:r>
             <a:r>
               <a:rPr lang="en-US" sz="1100" b="1" u="none" strike="noStrike">
@@ -24234,7 +24476,7 @@
                 <a:uFillTx/>
                 <a:latin typeface="Courier New"/>
               </a:rPr>
-              <a:t>raw_atp = on_hand - reserved - safety_stock - unprocessed_webhook_delta_qty</a:t>
+              <a:t>reserved_qty + damaged_hold_qty + bopis_lock_qty + safety_stock_qty + unprocessed_pos_events</a:t>
             </a:r>
             <a:r>
               <a:rPr lang="en-US" sz="1100" b="0" u="none" strike="noStrike">
@@ -24245,7 +24487,29 @@
                 <a:uFillTx/>
                 <a:latin typeface="Arial"/>
               </a:rPr>
-              <a:t> y </a:t>
+              <a:t> de </a:t>
+            </a:r>
+            <a:r>
+              <a:rPr lang="en-US" sz="1100" b="1" u="none" strike="noStrike">
+                <a:solidFill>
+                  <a:srgbClr val="20E3B2"/>
+                </a:solidFill>
+                <a:effectLst/>
+                <a:uFillTx/>
+                <a:latin typeface="Courier New"/>
+              </a:rPr>
+              <a:t>on_hand_qty</a:t>
+            </a:r>
+            <a:r>
+              <a:rPr lang="en-US" sz="1100" b="0" u="none" strike="noStrike">
+                <a:solidFill>
+                  <a:srgbClr val="F0F6FC"/>
+                </a:solidFill>
+                <a:effectLst/>
+                <a:uFillTx/>
+                <a:latin typeface="Arial"/>
+              </a:rPr>
+              <a:t> y fija </a:t>
             </a:r>
             <a:r>
               <a:rPr lang="en-US" sz="1100" b="1" u="none" strike="noStrike">
@@ -24351,7 +24615,7 @@
                 <a:uFillTx/>
                 <a:latin typeface="Courier New"/>
               </a:rPr>
-              <a:t>5 passed</a:t>
+              <a:t>6 passed</a:t>
             </a:r>
             <a:r>
               <a:rPr lang="en-US" sz="1100" b="0" u="none" strike="noStrike">
@@ -24373,7 +24637,7 @@
                 <a:uFillTx/>
                 <a:latin typeface="Courier New"/>
               </a:rPr>
-              <a:t>$35,113.25</a:t>
+              <a:t>$18,420.50</a:t>
             </a:r>
             <a:r>
               <a:rPr lang="en-US" sz="1100" b="0" u="none" strike="noStrike">
@@ -24384,7 +24648,7 @@
                 <a:uFillTx/>
                 <a:latin typeface="Arial"/>
               </a:rPr>
-              <a:t> recuperados; 35 órdenes VIP detectadas).</a:t>
+              <a:t> recuperados en 28 órdenes; 35 órdenes VIP detectadas).</a:t>
             </a:r>
             <a:endParaRPr lang="en-US" sz="1100" b="0" u="none" strike="noStrike">
               <a:solidFill>
@@ -24613,7 +24877,7 @@
                 <a:uFillTx/>
                 <a:latin typeface="Arial"/>
               </a:rPr>
-              <a:t> '@src/services/promo_pricing.py @src/services/inventory_atp.py @data/logs/pos_wms_webhooks.jsonl @tests/test_lab01_triage.py Ejecuta pytest y explica por qué 30 órdenes pierden margen y 35 órdenes VIP tienen inventario fantasma.'</a:t>
+              <a:t> '@src/services/promo_pricing.py @src/services/inventory_atp.py @data/logs/pos_wms_webhooks.jsonl @tests/test_lab01_triage.py Ejecuta pytest y explica por qué 28 órdenes pierden margen y 35 órdenes VIP tienen inventario fantasma.'</a:t>
             </a:r>
             <a:endParaRPr lang="en-US" sz="1100" b="0" u="none" strike="noStrike">
               <a:solidFill>
@@ -24664,7 +24928,7 @@
                 <a:uFillTx/>
                 <a:latin typeface="Arial"/>
               </a:rPr>
-              <a:t> '/plan Crea un plan de corrección para promo_pricing.py (GS1 GTIN-14, Decimal, promos acumulables multiplicativas, piso de margen) e inventory_atp.py (restar reserved, safety_stock y webhook delta).'</a:t>
+              <a:t> '/plan Crea un plan de corrección para promo_pricing.py (GS1 GTIN-14, Decimal, promos acumulables multiplicativas, piso de margen) e inventory_atp.py (restar reserved, damaged_hold, bopis_lock, safety_stock y unprocessed_pos_events).'</a:t>
             </a:r>
             <a:endParaRPr lang="en-US" sz="1100" b="0" u="none" strike="noStrike">
               <a:solidFill>
@@ -24726,7 +24990,7 @@
                 <a:uFillTx/>
                 <a:latin typeface="Courier New"/>
               </a:rPr>
-              <a:t>calculate_node_atp</a:t>
+              <a:t>calculate_true_atp</a:t>
             </a:r>
             <a:r>
               <a:rPr lang="en-US" sz="1100" b="0" u="none" strike="noStrike">
@@ -24759,7 +25023,7 @@
                 <a:uFillTx/>
                 <a:latin typeface="Arial"/>
               </a:rPr>
-              <a:t> -&gt; 'Resta reserved_qty, safety_stock_qty y unprocessed_webhook_delta_qty de on_hand_qty.'</a:t>
+              <a:t> -&gt; 'Resta reserved_qty, damaged_hold_qty, bopis_lock_qty, safety_stock_qty y unprocessed_pos_events de on_hand_qty.'</a:t>
             </a:r>
             <a:endParaRPr lang="en-US" sz="1100" b="0" u="none" strike="noStrike">
               <a:solidFill>
@@ -26588,7 +26852,7 @@
                 <a:uFillTx/>
                 <a:latin typeface="Courier New"/>
               </a:rPr>
-              <a:t>15%</a:t>
+              <a:t>margin_floor_pct</a:t>
             </a:r>
             <a:r>
               <a:rPr lang="en-US" sz="1100" b="0" u="none" strike="noStrike">
@@ -26650,7 +26914,7 @@
                 <a:uFillTx/>
                 <a:latin typeface="Courier New"/>
               </a:rPr>
-              <a:t>.agents/skills/margin-otif-audit/SKILL.md</a:t>
+              <a:t>.agents/skills/retail-otif-margin-auditor/SKILL.md</a:t>
             </a:r>
             <a:r>
               <a:rPr lang="en-US" sz="1100" b="1" u="none" strike="noStrike">
@@ -26683,7 +26947,7 @@
                 <a:uFillTx/>
                 <a:latin typeface="Courier New"/>
               </a:rPr>
-              <a:t>name: margin-otif-audit</a:t>
+              <a:t>name: retail-otif-margin-auditor</a:t>
             </a:r>
             <a:r>
               <a:rPr lang="en-US" sz="1100" b="0" u="none" strike="noStrike">
@@ -26705,7 +26969,7 @@
                 <a:uFillTx/>
                 <a:latin typeface="Courier New"/>
               </a:rPr>
-              <a:t>scripts/run_otif_margin_audit.py</a:t>
+              <a:t>scripts/audit_vendor_otif.py</a:t>
             </a:r>
             <a:r>
               <a:rPr lang="en-US" sz="1100" b="0" u="none" strike="noStrike">
@@ -26778,7 +27042,7 @@
                 <a:uFillTx/>
                 <a:latin typeface="Courier New"/>
               </a:rPr>
-              <a:t>data/exports/executive_margin_otif_audit.json</a:t>
+              <a:t>data/exports/otif_chargeback_audit_report.json</a:t>
             </a:r>
             <a:r>
               <a:rPr lang="en-US" sz="1100" b="0" u="none" strike="noStrike">
@@ -26789,7 +27053,7 @@
                 <a:uFillTx/>
                 <a:latin typeface="Arial"/>
               </a:rPr>
-              <a:t> y </a:t>
+              <a:t> (</a:t>
             </a:r>
             <a:r>
               <a:rPr lang="en-US" sz="1100" b="1" u="none" strike="noStrike">
@@ -26800,7 +27064,7 @@
                 <a:uFillTx/>
                 <a:latin typeface="Courier New"/>
               </a:rPr>
-              <a:t>.md</a:t>
+              <a:t>$98,250.00</a:t>
             </a:r>
             <a:r>
               <a:rPr lang="en-US" sz="1100" b="0" u="none" strike="noStrike">
@@ -26811,7 +27075,7 @@
                 <a:uFillTx/>
                 <a:latin typeface="Arial"/>
               </a:rPr>
-              <a:t> (</a:t>
+              <a:t> en cargos OTIF en 6 proveedores) y pasar los 4 tests del Lab 02 (</a:t>
             </a:r>
             <a:r>
               <a:rPr lang="en-US" sz="1100" b="1" u="none" strike="noStrike">
@@ -26822,7 +27086,7 @@
                 <a:uFillTx/>
                 <a:latin typeface="Courier New"/>
               </a:rPr>
-              <a:t>$98,250.00</a:t>
+              <a:t>10 passed</a:t>
             </a:r>
             <a:r>
               <a:rPr lang="en-US" sz="1100" b="0" u="none" strike="noStrike">
@@ -26833,7 +27097,7 @@
                 <a:uFillTx/>
                 <a:latin typeface="Arial"/>
               </a:rPr>
-              <a:t> en cargos OTIF) y pasar </a:t>
+              <a:t> acumulados) en </a:t>
             </a:r>
             <a:r>
               <a:rPr lang="en-US" sz="1100" b="1" u="none" strike="noStrike">
@@ -27865,7 +28129,29 @@
                 <a:uFillTx/>
                 <a:latin typeface="Arial"/>
               </a:rPr>
-              <a:t> Codifica validación GS1 GTIN-14 Módulo-10, fórmula True ATP, descuentos multiplicativos, piso de margen y penalidades OTIF.</a:t>
+              <a:t> Codifica validación GS1 GTIN-14 Módulo-10, fórmula True ATP (</a:t>
+            </a:r>
+            <a:r>
+              <a:rPr lang="en-US" sz="1100" b="1" u="none" strike="noStrike">
+                <a:solidFill>
+                  <a:srgbClr val="20E3B2"/>
+                </a:solidFill>
+                <a:effectLst/>
+                <a:uFillTx/>
+                <a:latin typeface="Courier New"/>
+              </a:rPr>
+              <a:t>on_hand - reserved - damaged_hold - bopis_lock - safety_stock - unprocessed_pos_events</a:t>
+            </a:r>
+            <a:r>
+              <a:rPr lang="en-US" sz="1100" b="0" u="none" strike="noStrike">
+                <a:solidFill>
+                  <a:srgbClr val="F0F6FC"/>
+                </a:solidFill>
+                <a:effectLst/>
+                <a:uFillTx/>
+                <a:latin typeface="Arial"/>
+              </a:rPr>
+              <a:t>), descuentos multiplicativos, piso de margen y penalidades OTIF.</a:t>
             </a:r>
             <a:endParaRPr lang="en-US" sz="1100" b="0" u="none" strike="noStrike">
               <a:solidFill>
@@ -27916,7 +28202,7 @@
                 <a:uFillTx/>
                 <a:latin typeface="Courier New"/>
               </a:rPr>
-              <a:t>.agents/skills/margin-otif-audit/SKILL.md</a:t>
+              <a:t>.agents/skills/retail-otif-margin-auditor/SKILL.md</a:t>
             </a:r>
             <a:r>
               <a:rPr lang="en-US" sz="1100" b="1" u="none" strike="noStrike">
@@ -27949,7 +28235,7 @@
                 <a:uFillTx/>
                 <a:latin typeface="Courier New"/>
               </a:rPr>
-              <a:t>name: margin-otif-audit</a:t>
+              <a:t>name: retail-otif-margin-auditor</a:t>
             </a:r>
             <a:r>
               <a:rPr lang="en-US" sz="1100" b="0" u="none" strike="noStrike">
@@ -27993,7 +28279,7 @@
                 <a:uFillTx/>
                 <a:latin typeface="Courier New"/>
               </a:rPr>
-              <a:t>./.venv/bin/python scripts/run_otif_margin_audit.py</a:t>
+              <a:t>./.venv/bin/python scripts/audit_vendor_otif.py</a:t>
             </a:r>
             <a:r>
               <a:rPr lang="en-US" sz="1100" b="0" u="none" strike="noStrike">
@@ -28088,7 +28374,7 @@
                 <a:uFillTx/>
                 <a:latin typeface="Courier New"/>
               </a:rPr>
-              <a:t>5 passed</a:t>
+              <a:t>10 passed</a:t>
             </a:r>
             <a:r>
               <a:rPr lang="en-US" sz="1100" b="0" u="none" strike="noStrike">
@@ -28099,7 +28385,7 @@
                 <a:uFillTx/>
                 <a:latin typeface="Arial"/>
               </a:rPr>
-              <a:t> + reportes ejecutivos JSON/MD).</a:t>
+              <a:t> acumulados + reporte ejecutivo JSON generado).</a:t>
             </a:r>
             <a:endParaRPr lang="en-US" sz="1100" b="0" u="none" strike="noStrike">
               <a:solidFill>
@@ -28328,7 +28614,7 @@
                 <a:uFillTx/>
                 <a:latin typeface="Arial"/>
               </a:rPr>
-              <a:t> '/plan Crea @GEMINI.md y @.agents/rules/retail-standards.md exigiendo Decimal ROUND_HALF_UP, validación GS1 GTIN-14 Módulo-10, deducción de webhook delta en True ATP, promos multiplicativas y reglas OTIF.'</a:t>
+              <a:t> '/plan Crea @GEMINI.md y @.agents/rules/retail-standards.md exigiendo Decimal ROUND_HALF_UP, validación GS1 GTIN-14 Módulo-10, deducción de eventos POS en True ATP, promos multiplicativas y reglas OTIF.'</a:t>
             </a:r>
             <a:endParaRPr lang="en-US" sz="1100" b="0" u="none" strike="noStrike">
               <a:solidFill>
@@ -28379,7 +28665,7 @@
                 <a:uFillTx/>
                 <a:latin typeface="Arial"/>
               </a:rPr>
-              <a:t> 'Crea @.agents/skills/margin-otif-audit/SKILL.md con frontmatter YAML (name: margin-otif-audit) que ejecute ./scripts/run_otif_margin_audit.py y genere data/exports/executive_margin_otif_audit.json y .md.'</a:t>
+              <a:t> 'Crea @.agents/skills/retail-otif-margin-auditor/SKILL.md con frontmatter YAML (name: retail-otif-margin-auditor) que ejecute ./.venv/bin/python scripts/audit_vendor_otif.py y genere data/exports/otif_chargeback_audit_report.json.'</a:t>
             </a:r>
             <a:endParaRPr lang="en-US" sz="1100" b="0" u="none" strike="noStrike">
               <a:solidFill>
